--- a/design/Jawa/research_review/research_trees_boxes.pptx
+++ b/design/Jawa/research_review/research_trees_boxes.pptx
@@ -5,24 +5,24 @@
     <p:sldMasterId id="2147483648" r:id="rId1"/>
   </p:sldMasterIdLst>
   <p:sldIdLst>
-    <p:sldId id="256" r:id="rId7"/>
-    <p:sldId id="257" r:id="rId8"/>
-    <p:sldId id="258" r:id="rId9"/>
-    <p:sldId id="259" r:id="rId10"/>
-    <p:sldId id="260" r:id="rId11"/>
-    <p:sldId id="261" r:id="rId12"/>
-    <p:sldId id="262" r:id="rId13"/>
-    <p:sldId id="263" r:id="rId14"/>
-    <p:sldId id="264" r:id="rId15"/>
-    <p:sldId id="265" r:id="rId16"/>
-    <p:sldId id="266" r:id="rId17"/>
-    <p:sldId id="267" r:id="rId18"/>
-    <p:sldId id="268" r:id="rId19"/>
-    <p:sldId id="269" r:id="rId20"/>
-    <p:sldId id="270" r:id="rId21"/>
-    <p:sldId id="271" r:id="rId22"/>
+    <p:sldId id="256" r:id="rId2"/>
+    <p:sldId id="257" r:id="rId3"/>
+    <p:sldId id="258" r:id="rId4"/>
+    <p:sldId id="259" r:id="rId5"/>
+    <p:sldId id="260" r:id="rId6"/>
+    <p:sldId id="261" r:id="rId7"/>
+    <p:sldId id="262" r:id="rId8"/>
+    <p:sldId id="263" r:id="rId9"/>
+    <p:sldId id="264" r:id="rId10"/>
+    <p:sldId id="265" r:id="rId11"/>
+    <p:sldId id="266" r:id="rId12"/>
+    <p:sldId id="267" r:id="rId13"/>
+    <p:sldId id="268" r:id="rId14"/>
+    <p:sldId id="269" r:id="rId15"/>
+    <p:sldId id="270" r:id="rId16"/>
+    <p:sldId id="271" r:id="rId17"/>
   </p:sldIdLst>
-  <p:sldSz cx="12191695" cy="6858000" type="screen4x3"/>
+  <p:sldSz cx="12192000" cy="6858000"/>
   <p:notesSz cx="6858000" cy="9144000"/>
   <p:defaultTextStyle>
     <a:defPPr>
@@ -119,6 +119,22 @@
       </a:defRPr>
     </a:lvl9pPr>
   </p:defaultTextStyle>
+  <p:extLst>
+    <p:ext uri="{EFAFB233-063F-42B5-8137-9DF3F51BA10A}">
+      <p15:sldGuideLst xmlns:p15="http://schemas.microsoft.com/office/powerpoint/2012/main">
+        <p15:guide id="1" orient="horz" pos="2160">
+          <p15:clr>
+            <a:srgbClr val="A4A3A4"/>
+          </p15:clr>
+        </p15:guide>
+        <p15:guide id="2" pos="2880">
+          <p15:clr>
+            <a:srgbClr val="A4A3A4"/>
+          </p15:clr>
+        </p15:guide>
+      </p15:sldGuideLst>
+    </p:ext>
+  </p:extLst>
 </p:presentation>
 </file>
 
@@ -160,10 +176,9 @@
           <a:lstStyle/>
           <a:p>
             <a:r>
-              <a:rPr lang="en-US" smtClean="0"/>
+              <a:rPr lang="en-US"/>
               <a:t>Click to edit Master title style</a:t>
             </a:r>
-            <a:endParaRPr lang="en-US"/>
           </a:p>
         </p:txBody>
       </p:sp>
@@ -279,10 +294,9 @@
           </a:lstStyle>
           <a:p>
             <a:r>
-              <a:rPr lang="en-US" smtClean="0"/>
+              <a:rPr lang="en-US"/>
               <a:t>Click to edit Master subtitle style</a:t>
             </a:r>
-            <a:endParaRPr lang="en-US"/>
           </a:p>
         </p:txBody>
       </p:sp>
@@ -303,7 +317,7 @@
           <a:p>
             <a:fld id="{5BCAD085-E8A6-8845-BD4E-CB4CCA059FC4}" type="datetimeFigureOut">
               <a:rPr lang="en-US" smtClean="0"/>
-              <a:t>1/27/13</a:t>
+              <a:t>9/4/2026</a:t>
             </a:fld>
             <a:endParaRPr lang="en-US"/>
           </a:p>
@@ -397,10 +411,9 @@
           <a:lstStyle/>
           <a:p>
             <a:r>
-              <a:rPr lang="en-US" smtClean="0"/>
+              <a:rPr lang="en-US"/>
               <a:t>Click to edit Master title style</a:t>
             </a:r>
-            <a:endParaRPr lang="en-US"/>
           </a:p>
         </p:txBody>
       </p:sp>
@@ -421,38 +434,37 @@
           <a:p>
             <a:pPr lvl="0"/>
             <a:r>
-              <a:rPr lang="en-US" smtClean="0"/>
+              <a:rPr lang="en-US"/>
               <a:t>Click to edit Master text styles</a:t>
             </a:r>
           </a:p>
           <a:p>
             <a:pPr lvl="1"/>
             <a:r>
-              <a:rPr lang="en-US" smtClean="0"/>
+              <a:rPr lang="en-US"/>
               <a:t>Second level</a:t>
             </a:r>
           </a:p>
           <a:p>
             <a:pPr lvl="2"/>
             <a:r>
-              <a:rPr lang="en-US" smtClean="0"/>
+              <a:rPr lang="en-US"/>
               <a:t>Third level</a:t>
             </a:r>
           </a:p>
           <a:p>
             <a:pPr lvl="3"/>
             <a:r>
-              <a:rPr lang="en-US" smtClean="0"/>
+              <a:rPr lang="en-US"/>
               <a:t>Fourth level</a:t>
             </a:r>
           </a:p>
           <a:p>
             <a:pPr lvl="4"/>
             <a:r>
-              <a:rPr lang="en-US" smtClean="0"/>
+              <a:rPr lang="en-US"/>
               <a:t>Fifth level</a:t>
             </a:r>
-            <a:endParaRPr lang="en-US"/>
           </a:p>
         </p:txBody>
       </p:sp>
@@ -473,7 +485,7 @@
           <a:p>
             <a:fld id="{5BCAD085-E8A6-8845-BD4E-CB4CCA059FC4}" type="datetimeFigureOut">
               <a:rPr lang="en-US" smtClean="0"/>
-              <a:t>1/27/13</a:t>
+              <a:t>9/4/2026</a:t>
             </a:fld>
             <a:endParaRPr lang="en-US"/>
           </a:p>
@@ -572,10 +584,9 @@
           <a:lstStyle/>
           <a:p>
             <a:r>
-              <a:rPr lang="en-US" smtClean="0"/>
+              <a:rPr lang="en-US"/>
               <a:t>Click to edit Master title style</a:t>
             </a:r>
-            <a:endParaRPr lang="en-US"/>
           </a:p>
         </p:txBody>
       </p:sp>
@@ -601,38 +612,37 @@
           <a:p>
             <a:pPr lvl="0"/>
             <a:r>
-              <a:rPr lang="en-US" smtClean="0"/>
+              <a:rPr lang="en-US"/>
               <a:t>Click to edit Master text styles</a:t>
             </a:r>
           </a:p>
           <a:p>
             <a:pPr lvl="1"/>
             <a:r>
-              <a:rPr lang="en-US" smtClean="0"/>
+              <a:rPr lang="en-US"/>
               <a:t>Second level</a:t>
             </a:r>
           </a:p>
           <a:p>
             <a:pPr lvl="2"/>
             <a:r>
-              <a:rPr lang="en-US" smtClean="0"/>
+              <a:rPr lang="en-US"/>
               <a:t>Third level</a:t>
             </a:r>
           </a:p>
           <a:p>
             <a:pPr lvl="3"/>
             <a:r>
-              <a:rPr lang="en-US" smtClean="0"/>
+              <a:rPr lang="en-US"/>
               <a:t>Fourth level</a:t>
             </a:r>
           </a:p>
           <a:p>
             <a:pPr lvl="4"/>
             <a:r>
-              <a:rPr lang="en-US" smtClean="0"/>
+              <a:rPr lang="en-US"/>
               <a:t>Fifth level</a:t>
             </a:r>
-            <a:endParaRPr lang="en-US"/>
           </a:p>
         </p:txBody>
       </p:sp>
@@ -653,7 +663,7 @@
           <a:p>
             <a:fld id="{5BCAD085-E8A6-8845-BD4E-CB4CCA059FC4}" type="datetimeFigureOut">
               <a:rPr lang="en-US" smtClean="0"/>
-              <a:t>1/27/13</a:t>
+              <a:t>9/4/2026</a:t>
             </a:fld>
             <a:endParaRPr lang="en-US"/>
           </a:p>
@@ -747,10 +757,9 @@
           <a:lstStyle/>
           <a:p>
             <a:r>
-              <a:rPr lang="en-US" smtClean="0"/>
+              <a:rPr lang="en-US"/>
               <a:t>Click to edit Master title style</a:t>
             </a:r>
-            <a:endParaRPr lang="en-US"/>
           </a:p>
         </p:txBody>
       </p:sp>
@@ -771,38 +780,37 @@
           <a:p>
             <a:pPr lvl="0"/>
             <a:r>
-              <a:rPr lang="en-US" smtClean="0"/>
+              <a:rPr lang="en-US"/>
               <a:t>Click to edit Master text styles</a:t>
             </a:r>
           </a:p>
           <a:p>
             <a:pPr lvl="1"/>
             <a:r>
-              <a:rPr lang="en-US" smtClean="0"/>
+              <a:rPr lang="en-US"/>
               <a:t>Second level</a:t>
             </a:r>
           </a:p>
           <a:p>
             <a:pPr lvl="2"/>
             <a:r>
-              <a:rPr lang="en-US" smtClean="0"/>
+              <a:rPr lang="en-US"/>
               <a:t>Third level</a:t>
             </a:r>
           </a:p>
           <a:p>
             <a:pPr lvl="3"/>
             <a:r>
-              <a:rPr lang="en-US" smtClean="0"/>
+              <a:rPr lang="en-US"/>
               <a:t>Fourth level</a:t>
             </a:r>
           </a:p>
           <a:p>
             <a:pPr lvl="4"/>
             <a:r>
-              <a:rPr lang="en-US" smtClean="0"/>
+              <a:rPr lang="en-US"/>
               <a:t>Fifth level</a:t>
             </a:r>
-            <a:endParaRPr lang="en-US"/>
           </a:p>
         </p:txBody>
       </p:sp>
@@ -823,7 +831,7 @@
           <a:p>
             <a:fld id="{5BCAD085-E8A6-8845-BD4E-CB4CCA059FC4}" type="datetimeFigureOut">
               <a:rPr lang="en-US" smtClean="0"/>
-              <a:t>1/27/13</a:t>
+              <a:t>9/4/2026</a:t>
             </a:fld>
             <a:endParaRPr lang="en-US"/>
           </a:p>
@@ -926,10 +934,9 @@
           </a:lstStyle>
           <a:p>
             <a:r>
-              <a:rPr lang="en-US" smtClean="0"/>
+              <a:rPr lang="en-US"/>
               <a:t>Click to edit Master title style</a:t>
             </a:r>
-            <a:endParaRPr lang="en-US"/>
           </a:p>
         </p:txBody>
       </p:sp>
@@ -1046,7 +1053,7 @@
           <a:p>
             <a:pPr lvl="0"/>
             <a:r>
-              <a:rPr lang="en-US" smtClean="0"/>
+              <a:rPr lang="en-US"/>
               <a:t>Click to edit Master text styles</a:t>
             </a:r>
           </a:p>
@@ -1069,7 +1076,7 @@
           <a:p>
             <a:fld id="{5BCAD085-E8A6-8845-BD4E-CB4CCA059FC4}" type="datetimeFigureOut">
               <a:rPr lang="en-US" smtClean="0"/>
-              <a:t>1/27/13</a:t>
+              <a:t>9/4/2026</a:t>
             </a:fld>
             <a:endParaRPr lang="en-US"/>
           </a:p>
@@ -1163,10 +1170,9 @@
           <a:lstStyle/>
           <a:p>
             <a:r>
-              <a:rPr lang="en-US" smtClean="0"/>
+              <a:rPr lang="en-US"/>
               <a:t>Click to edit Master title style</a:t>
             </a:r>
-            <a:endParaRPr lang="en-US"/>
           </a:p>
         </p:txBody>
       </p:sp>
@@ -1220,38 +1226,37 @@
           <a:p>
             <a:pPr lvl="0"/>
             <a:r>
-              <a:rPr lang="en-US" smtClean="0"/>
+              <a:rPr lang="en-US"/>
               <a:t>Click to edit Master text styles</a:t>
             </a:r>
           </a:p>
           <a:p>
             <a:pPr lvl="1"/>
             <a:r>
-              <a:rPr lang="en-US" smtClean="0"/>
+              <a:rPr lang="en-US"/>
               <a:t>Second level</a:t>
             </a:r>
           </a:p>
           <a:p>
             <a:pPr lvl="2"/>
             <a:r>
-              <a:rPr lang="en-US" smtClean="0"/>
+              <a:rPr lang="en-US"/>
               <a:t>Third level</a:t>
             </a:r>
           </a:p>
           <a:p>
             <a:pPr lvl="3"/>
             <a:r>
-              <a:rPr lang="en-US" smtClean="0"/>
+              <a:rPr lang="en-US"/>
               <a:t>Fourth level</a:t>
             </a:r>
           </a:p>
           <a:p>
             <a:pPr lvl="4"/>
             <a:r>
-              <a:rPr lang="en-US" smtClean="0"/>
+              <a:rPr lang="en-US"/>
               <a:t>Fifth level</a:t>
             </a:r>
-            <a:endParaRPr lang="en-US"/>
           </a:p>
         </p:txBody>
       </p:sp>
@@ -1305,38 +1310,37 @@
           <a:p>
             <a:pPr lvl="0"/>
             <a:r>
-              <a:rPr lang="en-US" smtClean="0"/>
+              <a:rPr lang="en-US"/>
               <a:t>Click to edit Master text styles</a:t>
             </a:r>
           </a:p>
           <a:p>
             <a:pPr lvl="1"/>
             <a:r>
-              <a:rPr lang="en-US" smtClean="0"/>
+              <a:rPr lang="en-US"/>
               <a:t>Second level</a:t>
             </a:r>
           </a:p>
           <a:p>
             <a:pPr lvl="2"/>
             <a:r>
-              <a:rPr lang="en-US" smtClean="0"/>
+              <a:rPr lang="en-US"/>
               <a:t>Third level</a:t>
             </a:r>
           </a:p>
           <a:p>
             <a:pPr lvl="3"/>
             <a:r>
-              <a:rPr lang="en-US" smtClean="0"/>
+              <a:rPr lang="en-US"/>
               <a:t>Fourth level</a:t>
             </a:r>
           </a:p>
           <a:p>
             <a:pPr lvl="4"/>
             <a:r>
-              <a:rPr lang="en-US" smtClean="0"/>
+              <a:rPr lang="en-US"/>
               <a:t>Fifth level</a:t>
             </a:r>
-            <a:endParaRPr lang="en-US"/>
           </a:p>
         </p:txBody>
       </p:sp>
@@ -1357,7 +1361,7 @@
           <a:p>
             <a:fld id="{5BCAD085-E8A6-8845-BD4E-CB4CCA059FC4}" type="datetimeFigureOut">
               <a:rPr lang="en-US" smtClean="0"/>
-              <a:t>1/27/13</a:t>
+              <a:t>9/4/2026</a:t>
             </a:fld>
             <a:endParaRPr lang="en-US"/>
           </a:p>
@@ -1455,10 +1459,9 @@
           </a:lstStyle>
           <a:p>
             <a:r>
-              <a:rPr lang="en-US" smtClean="0"/>
+              <a:rPr lang="en-US"/>
               <a:t>Click to edit Master title style</a:t>
             </a:r>
-            <a:endParaRPr lang="en-US"/>
           </a:p>
         </p:txBody>
       </p:sp>
@@ -1521,7 +1524,7 @@
           <a:p>
             <a:pPr lvl="0"/>
             <a:r>
-              <a:rPr lang="en-US" smtClean="0"/>
+              <a:rPr lang="en-US"/>
               <a:t>Click to edit Master text styles</a:t>
             </a:r>
           </a:p>
@@ -1577,38 +1580,37 @@
           <a:p>
             <a:pPr lvl="0"/>
             <a:r>
-              <a:rPr lang="en-US" smtClean="0"/>
+              <a:rPr lang="en-US"/>
               <a:t>Click to edit Master text styles</a:t>
             </a:r>
           </a:p>
           <a:p>
             <a:pPr lvl="1"/>
             <a:r>
-              <a:rPr lang="en-US" smtClean="0"/>
+              <a:rPr lang="en-US"/>
               <a:t>Second level</a:t>
             </a:r>
           </a:p>
           <a:p>
             <a:pPr lvl="2"/>
             <a:r>
-              <a:rPr lang="en-US" smtClean="0"/>
+              <a:rPr lang="en-US"/>
               <a:t>Third level</a:t>
             </a:r>
           </a:p>
           <a:p>
             <a:pPr lvl="3"/>
             <a:r>
-              <a:rPr lang="en-US" smtClean="0"/>
+              <a:rPr lang="en-US"/>
               <a:t>Fourth level</a:t>
             </a:r>
           </a:p>
           <a:p>
             <a:pPr lvl="4"/>
             <a:r>
-              <a:rPr lang="en-US" smtClean="0"/>
+              <a:rPr lang="en-US"/>
               <a:t>Fifth level</a:t>
             </a:r>
-            <a:endParaRPr lang="en-US"/>
           </a:p>
         </p:txBody>
       </p:sp>
@@ -1671,7 +1673,7 @@
           <a:p>
             <a:pPr lvl="0"/>
             <a:r>
-              <a:rPr lang="en-US" smtClean="0"/>
+              <a:rPr lang="en-US"/>
               <a:t>Click to edit Master text styles</a:t>
             </a:r>
           </a:p>
@@ -1727,38 +1729,37 @@
           <a:p>
             <a:pPr lvl="0"/>
             <a:r>
-              <a:rPr lang="en-US" smtClean="0"/>
+              <a:rPr lang="en-US"/>
               <a:t>Click to edit Master text styles</a:t>
             </a:r>
           </a:p>
           <a:p>
             <a:pPr lvl="1"/>
             <a:r>
-              <a:rPr lang="en-US" smtClean="0"/>
+              <a:rPr lang="en-US"/>
               <a:t>Second level</a:t>
             </a:r>
           </a:p>
           <a:p>
             <a:pPr lvl="2"/>
             <a:r>
-              <a:rPr lang="en-US" smtClean="0"/>
+              <a:rPr lang="en-US"/>
               <a:t>Third level</a:t>
             </a:r>
           </a:p>
           <a:p>
             <a:pPr lvl="3"/>
             <a:r>
-              <a:rPr lang="en-US" smtClean="0"/>
+              <a:rPr lang="en-US"/>
               <a:t>Fourth level</a:t>
             </a:r>
           </a:p>
           <a:p>
             <a:pPr lvl="4"/>
             <a:r>
-              <a:rPr lang="en-US" smtClean="0"/>
+              <a:rPr lang="en-US"/>
               <a:t>Fifth level</a:t>
             </a:r>
-            <a:endParaRPr lang="en-US"/>
           </a:p>
         </p:txBody>
       </p:sp>
@@ -1779,7 +1780,7 @@
           <a:p>
             <a:fld id="{5BCAD085-E8A6-8845-BD4E-CB4CCA059FC4}" type="datetimeFigureOut">
               <a:rPr lang="en-US" smtClean="0"/>
-              <a:t>1/27/13</a:t>
+              <a:t>9/4/2026</a:t>
             </a:fld>
             <a:endParaRPr lang="en-US"/>
           </a:p>
@@ -1873,10 +1874,9 @@
           <a:lstStyle/>
           <a:p>
             <a:r>
-              <a:rPr lang="en-US" smtClean="0"/>
+              <a:rPr lang="en-US"/>
               <a:t>Click to edit Master title style</a:t>
             </a:r>
-            <a:endParaRPr lang="en-US"/>
           </a:p>
         </p:txBody>
       </p:sp>
@@ -1897,7 +1897,7 @@
           <a:p>
             <a:fld id="{5BCAD085-E8A6-8845-BD4E-CB4CCA059FC4}" type="datetimeFigureOut">
               <a:rPr lang="en-US" smtClean="0"/>
-              <a:t>1/27/13</a:t>
+              <a:t>9/4/2026</a:t>
             </a:fld>
             <a:endParaRPr lang="en-US"/>
           </a:p>
@@ -1992,7 +1992,7 @@
           <a:p>
             <a:fld id="{5BCAD085-E8A6-8845-BD4E-CB4CCA059FC4}" type="datetimeFigureOut">
               <a:rPr lang="en-US" smtClean="0"/>
-              <a:t>1/27/13</a:t>
+              <a:t>9/4/2026</a:t>
             </a:fld>
             <a:endParaRPr lang="en-US"/>
           </a:p>
@@ -2095,10 +2095,9 @@
           </a:lstStyle>
           <a:p>
             <a:r>
-              <a:rPr lang="en-US" smtClean="0"/>
+              <a:rPr lang="en-US"/>
               <a:t>Click to edit Master title style</a:t>
             </a:r>
-            <a:endParaRPr lang="en-US"/>
           </a:p>
         </p:txBody>
       </p:sp>
@@ -2152,38 +2151,37 @@
           <a:p>
             <a:pPr lvl="0"/>
             <a:r>
-              <a:rPr lang="en-US" smtClean="0"/>
+              <a:rPr lang="en-US"/>
               <a:t>Click to edit Master text styles</a:t>
             </a:r>
           </a:p>
           <a:p>
             <a:pPr lvl="1"/>
             <a:r>
-              <a:rPr lang="en-US" smtClean="0"/>
+              <a:rPr lang="en-US"/>
               <a:t>Second level</a:t>
             </a:r>
           </a:p>
           <a:p>
             <a:pPr lvl="2"/>
             <a:r>
-              <a:rPr lang="en-US" smtClean="0"/>
+              <a:rPr lang="en-US"/>
               <a:t>Third level</a:t>
             </a:r>
           </a:p>
           <a:p>
             <a:pPr lvl="3"/>
             <a:r>
-              <a:rPr lang="en-US" smtClean="0"/>
+              <a:rPr lang="en-US"/>
               <a:t>Fourth level</a:t>
             </a:r>
           </a:p>
           <a:p>
             <a:pPr lvl="4"/>
             <a:r>
-              <a:rPr lang="en-US" smtClean="0"/>
+              <a:rPr lang="en-US"/>
               <a:t>Fifth level</a:t>
             </a:r>
-            <a:endParaRPr lang="en-US"/>
           </a:p>
         </p:txBody>
       </p:sp>
@@ -2246,7 +2244,7 @@
           <a:p>
             <a:pPr lvl="0"/>
             <a:r>
-              <a:rPr lang="en-US" smtClean="0"/>
+              <a:rPr lang="en-US"/>
               <a:t>Click to edit Master text styles</a:t>
             </a:r>
           </a:p>
@@ -2269,7 +2267,7 @@
           <a:p>
             <a:fld id="{5BCAD085-E8A6-8845-BD4E-CB4CCA059FC4}" type="datetimeFigureOut">
               <a:rPr lang="en-US" smtClean="0"/>
-              <a:t>1/27/13</a:t>
+              <a:t>9/4/2026</a:t>
             </a:fld>
             <a:endParaRPr lang="en-US"/>
           </a:p>
@@ -2372,10 +2370,9 @@
           </a:lstStyle>
           <a:p>
             <a:r>
-              <a:rPr lang="en-US" smtClean="0"/>
+              <a:rPr lang="en-US"/>
               <a:t>Click to edit Master title style</a:t>
             </a:r>
-            <a:endParaRPr lang="en-US"/>
           </a:p>
         </p:txBody>
       </p:sp>
@@ -2499,7 +2496,7 @@
           <a:p>
             <a:pPr lvl="0"/>
             <a:r>
-              <a:rPr lang="en-US" smtClean="0"/>
+              <a:rPr lang="en-US"/>
               <a:t>Click to edit Master text styles</a:t>
             </a:r>
           </a:p>
@@ -2522,7 +2519,7 @@
           <a:p>
             <a:fld id="{5BCAD085-E8A6-8845-BD4E-CB4CCA059FC4}" type="datetimeFigureOut">
               <a:rPr lang="en-US" smtClean="0"/>
-              <a:t>1/27/13</a:t>
+              <a:t>9/4/2026</a:t>
             </a:fld>
             <a:endParaRPr lang="en-US"/>
           </a:p>
@@ -2631,10 +2628,9 @@
           <a:lstStyle/>
           <a:p>
             <a:r>
-              <a:rPr lang="en-US" smtClean="0"/>
+              <a:rPr lang="en-US"/>
               <a:t>Click to edit Master title style</a:t>
             </a:r>
-            <a:endParaRPr lang="en-US"/>
           </a:p>
         </p:txBody>
       </p:sp>
@@ -2665,38 +2661,37 @@
           <a:p>
             <a:pPr lvl="0"/>
             <a:r>
-              <a:rPr lang="en-US" smtClean="0"/>
+              <a:rPr lang="en-US"/>
               <a:t>Click to edit Master text styles</a:t>
             </a:r>
           </a:p>
           <a:p>
             <a:pPr lvl="1"/>
             <a:r>
-              <a:rPr lang="en-US" smtClean="0"/>
+              <a:rPr lang="en-US"/>
               <a:t>Second level</a:t>
             </a:r>
           </a:p>
           <a:p>
             <a:pPr lvl="2"/>
             <a:r>
-              <a:rPr lang="en-US" smtClean="0"/>
+              <a:rPr lang="en-US"/>
               <a:t>Third level</a:t>
             </a:r>
           </a:p>
           <a:p>
             <a:pPr lvl="3"/>
             <a:r>
-              <a:rPr lang="en-US" smtClean="0"/>
+              <a:rPr lang="en-US"/>
               <a:t>Fourth level</a:t>
             </a:r>
           </a:p>
           <a:p>
             <a:pPr lvl="4"/>
             <a:r>
-              <a:rPr lang="en-US" smtClean="0"/>
+              <a:rPr lang="en-US"/>
               <a:t>Fifth level</a:t>
             </a:r>
-            <a:endParaRPr lang="en-US"/>
           </a:p>
         </p:txBody>
       </p:sp>
@@ -2735,7 +2730,7 @@
           <a:p>
             <a:fld id="{5BCAD085-E8A6-8845-BD4E-CB4CCA059FC4}" type="datetimeFigureOut">
               <a:rPr lang="en-US" smtClean="0"/>
-              <a:t>1/27/13</a:t>
+              <a:t>9/4/2026</a:t>
             </a:fld>
             <a:endParaRPr lang="en-US"/>
           </a:p>
@@ -3094,7 +3089,7 @@
 </file>
 
 <file path=ppt/slides/slide1.xml><?xml version="1.0" encoding="utf-8"?>
-<p:sld xmlns:a="http://schemas.openxmlformats.org/drawingml/2006/main" xmlns:p="http://schemas.openxmlformats.org/presentationml/2006/main" xmlns:r="http://schemas.openxmlformats.org/officeDocument/2006/relationships">
+<p:sld xmlns:a="http://schemas.openxmlformats.org/drawingml/2006/main" xmlns:r="http://schemas.openxmlformats.org/officeDocument/2006/relationships" xmlns:p="http://schemas.openxmlformats.org/presentationml/2006/main">
   <p:cSld>
     <p:spTree>
       <p:nvGrpSpPr>
@@ -3102,7 +3097,14 @@
         <p:cNvGrpSpPr/>
         <p:nvPr/>
       </p:nvGrpSpPr>
-      <p:grpSpPr/>
+      <p:grpSpPr>
+        <a:xfrm>
+          <a:off x="0" y="0"/>
+          <a:ext cx="0" cy="0"/>
+          <a:chOff x="0" y="0"/>
+          <a:chExt cx="0" cy="0"/>
+        </a:xfrm>
+      </p:grpSpPr>
       <p:sp>
         <p:nvSpPr>
           <p:cNvPr id="2" name="Rectangle 1"/>
@@ -3142,20 +3144,13 @@
           </a:fontRef>
         </p:style>
         <p:txBody>
-          <a:bodyPr rtlCol="0" anchor="ctr" wrap="square" lIns="25400" rIns="25400" tIns="12700" bIns="12700">
-            <a:noAutofit/>
-          </a:bodyPr>
-          <a:lstStyle/>
-          <a:p>
-            <a:pPr algn="ctr"/>
-            <a:r>
-              <a:rPr sz="1000" b="0">
-                <a:solidFill>
-                  <a:srgbClr val="2B2418"/>
-                </a:solidFill>
-              </a:rPr>
-              <a:t/>
-            </a:r>
+          <a:bodyPr wrap="square" lIns="25400" tIns="12700" rIns="25400" bIns="12700" rtlCol="0" anchor="ctr">
+            <a:noAutofit/>
+          </a:bodyPr>
+          <a:lstStyle/>
+          <a:p>
+            <a:pPr algn="ctr"/>
+            <a:endParaRPr/>
           </a:p>
         </p:txBody>
       </p:sp>
@@ -3231,7 +3226,7 @@
           </a:fontRef>
         </p:style>
         <p:txBody>
-          <a:bodyPr rtlCol="0" anchor="ctr" wrap="square" lIns="25400" rIns="25400" tIns="12700" bIns="12700">
+          <a:bodyPr wrap="square" lIns="25400" tIns="12700" rIns="25400" bIns="12700" rtlCol="0" anchor="ctr">
             <a:noAutofit/>
           </a:bodyPr>
           <a:lstStyle/>
@@ -3320,7 +3315,7 @@
           </a:fontRef>
         </p:style>
         <p:txBody>
-          <a:bodyPr rtlCol="0" anchor="ctr" wrap="square" lIns="25400" rIns="25400" tIns="12700" bIns="12700">
+          <a:bodyPr wrap="square" lIns="25400" tIns="12700" rIns="25400" bIns="12700" rtlCol="0" anchor="ctr">
             <a:noAutofit/>
           </a:bodyPr>
           <a:lstStyle/>
@@ -3409,7 +3404,7 @@
           </a:fontRef>
         </p:style>
         <p:txBody>
-          <a:bodyPr rtlCol="0" anchor="ctr" wrap="square" lIns="25400" rIns="25400" tIns="12700" bIns="12700">
+          <a:bodyPr wrap="square" lIns="25400" tIns="12700" rIns="25400" bIns="12700" rtlCol="0" anchor="ctr">
             <a:noAutofit/>
           </a:bodyPr>
           <a:lstStyle/>
@@ -3498,7 +3493,7 @@
           </a:fontRef>
         </p:style>
         <p:txBody>
-          <a:bodyPr rtlCol="0" anchor="ctr" wrap="square" lIns="25400" rIns="25400" tIns="12700" bIns="12700">
+          <a:bodyPr wrap="square" lIns="25400" tIns="12700" rIns="25400" bIns="12700" rtlCol="0" anchor="ctr">
             <a:noAutofit/>
           </a:bodyPr>
           <a:lstStyle/>
@@ -3587,7 +3582,7 @@
           </a:fontRef>
         </p:style>
         <p:txBody>
-          <a:bodyPr rtlCol="0" anchor="ctr" wrap="square" lIns="25400" rIns="25400" tIns="12700" bIns="12700">
+          <a:bodyPr wrap="square" lIns="25400" tIns="12700" rIns="25400" bIns="12700" rtlCol="0" anchor="ctr">
             <a:noAutofit/>
           </a:bodyPr>
           <a:lstStyle/>
@@ -3676,7 +3671,7 @@
           </a:fontRef>
         </p:style>
         <p:txBody>
-          <a:bodyPr rtlCol="0" anchor="ctr" wrap="square" lIns="25400" rIns="25400" tIns="12700" bIns="12700">
+          <a:bodyPr wrap="square" lIns="25400" tIns="12700" rIns="25400" bIns="12700" rtlCol="0" anchor="ctr">
             <a:noAutofit/>
           </a:bodyPr>
           <a:lstStyle/>
@@ -3765,7 +3760,7 @@
           </a:fontRef>
         </p:style>
         <p:txBody>
-          <a:bodyPr rtlCol="0" anchor="ctr" wrap="square" lIns="25400" rIns="25400" tIns="12700" bIns="12700">
+          <a:bodyPr wrap="square" lIns="25400" tIns="12700" rIns="25400" bIns="12700" rtlCol="0" anchor="ctr">
             <a:noAutofit/>
           </a:bodyPr>
           <a:lstStyle/>
@@ -3854,7 +3849,7 @@
           </a:fontRef>
         </p:style>
         <p:txBody>
-          <a:bodyPr rtlCol="0" anchor="ctr" wrap="square" lIns="25400" rIns="25400" tIns="12700" bIns="12700">
+          <a:bodyPr wrap="square" lIns="25400" tIns="12700" rIns="25400" bIns="12700" rtlCol="0" anchor="ctr">
             <a:noAutofit/>
           </a:bodyPr>
           <a:lstStyle/>
@@ -3943,7 +3938,7 @@
           </a:fontRef>
         </p:style>
         <p:txBody>
-          <a:bodyPr rtlCol="0" anchor="ctr" wrap="square" lIns="25400" rIns="25400" tIns="12700" bIns="12700">
+          <a:bodyPr wrap="square" lIns="25400" tIns="12700" rIns="25400" bIns="12700" rtlCol="0" anchor="ctr">
             <a:noAutofit/>
           </a:bodyPr>
           <a:lstStyle/>
@@ -4032,7 +4027,7 @@
           </a:fontRef>
         </p:style>
         <p:txBody>
-          <a:bodyPr rtlCol="0" anchor="ctr" wrap="square" lIns="25400" rIns="25400" tIns="12700" bIns="12700">
+          <a:bodyPr wrap="square" lIns="25400" tIns="12700" rIns="25400" bIns="12700" rtlCol="0" anchor="ctr">
             <a:noAutofit/>
           </a:bodyPr>
           <a:lstStyle/>
@@ -4121,7 +4116,7 @@
           </a:fontRef>
         </p:style>
         <p:txBody>
-          <a:bodyPr rtlCol="0" anchor="ctr" wrap="square" lIns="25400" rIns="25400" tIns="12700" bIns="12700">
+          <a:bodyPr wrap="square" lIns="25400" tIns="12700" rIns="25400" bIns="12700" rtlCol="0" anchor="ctr">
             <a:noAutofit/>
           </a:bodyPr>
           <a:lstStyle/>
@@ -4210,7 +4205,7 @@
           </a:fontRef>
         </p:style>
         <p:txBody>
-          <a:bodyPr rtlCol="0" anchor="ctr" wrap="square" lIns="25400" rIns="25400" tIns="12700" bIns="12700">
+          <a:bodyPr wrap="square" lIns="25400" tIns="12700" rIns="25400" bIns="12700" rtlCol="0" anchor="ctr">
             <a:noAutofit/>
           </a:bodyPr>
           <a:lstStyle/>
@@ -4299,7 +4294,7 @@
           </a:fontRef>
         </p:style>
         <p:txBody>
-          <a:bodyPr rtlCol="0" anchor="ctr" wrap="square" lIns="25400" rIns="25400" tIns="12700" bIns="12700">
+          <a:bodyPr wrap="square" lIns="25400" tIns="12700" rIns="25400" bIns="12700" rtlCol="0" anchor="ctr">
             <a:noAutofit/>
           </a:bodyPr>
           <a:lstStyle/>
@@ -4391,7 +4386,7 @@
 </file>
 
 <file path=ppt/slides/slide10.xml><?xml version="1.0" encoding="utf-8"?>
-<p:sld xmlns:a="http://schemas.openxmlformats.org/drawingml/2006/main" xmlns:p="http://schemas.openxmlformats.org/presentationml/2006/main" xmlns:r="http://schemas.openxmlformats.org/officeDocument/2006/relationships">
+<p:sld xmlns:a="http://schemas.openxmlformats.org/drawingml/2006/main" xmlns:r="http://schemas.openxmlformats.org/officeDocument/2006/relationships" xmlns:p="http://schemas.openxmlformats.org/presentationml/2006/main">
   <p:cSld>
     <p:spTree>
       <p:nvGrpSpPr>
@@ -4399,7 +4394,14 @@
         <p:cNvGrpSpPr/>
         <p:nvPr/>
       </p:nvGrpSpPr>
-      <p:grpSpPr/>
+      <p:grpSpPr>
+        <a:xfrm>
+          <a:off x="0" y="0"/>
+          <a:ext cx="0" cy="0"/>
+          <a:chOff x="0" y="0"/>
+          <a:chExt cx="0" cy="0"/>
+        </a:xfrm>
+      </p:grpSpPr>
       <p:sp>
         <p:nvSpPr>
           <p:cNvPr id="2" name="Rectangle 1"/>
@@ -4439,20 +4441,13 @@
           </a:fontRef>
         </p:style>
         <p:txBody>
-          <a:bodyPr rtlCol="0" anchor="ctr" wrap="square" lIns="25400" rIns="25400" tIns="12700" bIns="12700">
-            <a:noAutofit/>
-          </a:bodyPr>
-          <a:lstStyle/>
-          <a:p>
-            <a:pPr algn="ctr"/>
-            <a:r>
-              <a:rPr sz="1000" b="0">
-                <a:solidFill>
-                  <a:srgbClr val="2B2418"/>
-                </a:solidFill>
-              </a:rPr>
-              <a:t/>
-            </a:r>
+          <a:bodyPr wrap="square" lIns="25400" tIns="12700" rIns="25400" bIns="12700" rtlCol="0" anchor="ctr">
+            <a:noAutofit/>
+          </a:bodyPr>
+          <a:lstStyle/>
+          <a:p>
+            <a:pPr algn="ctr"/>
+            <a:endParaRPr/>
           </a:p>
         </p:txBody>
       </p:sp>
@@ -4536,7 +4531,7 @@
           </a:fontRef>
         </p:style>
         <p:txBody>
-          <a:bodyPr rtlCol="0" anchor="ctr" wrap="square" lIns="25400" rIns="25400" tIns="12700" bIns="12700">
+          <a:bodyPr wrap="square" lIns="25400" tIns="12700" rIns="25400" bIns="12700" rtlCol="0" anchor="ctr">
             <a:noAutofit/>
           </a:bodyPr>
           <a:lstStyle/>
@@ -4592,7 +4587,7 @@
           </a:fontRef>
         </p:style>
         <p:txBody>
-          <a:bodyPr rtlCol="0" anchor="ctr" wrap="square" lIns="25400" rIns="25400" tIns="12700" bIns="12700">
+          <a:bodyPr wrap="square" lIns="25400" tIns="12700" rIns="25400" bIns="12700" rtlCol="0" anchor="ctr">
             <a:noAutofit/>
           </a:bodyPr>
           <a:lstStyle/>
@@ -4648,7 +4643,7 @@
           </a:fontRef>
         </p:style>
         <p:txBody>
-          <a:bodyPr rtlCol="0" anchor="ctr" wrap="square" lIns="25400" rIns="25400" tIns="12700" bIns="12700">
+          <a:bodyPr wrap="square" lIns="25400" tIns="12700" rIns="25400" bIns="12700" rtlCol="0" anchor="ctr">
             <a:noAutofit/>
           </a:bodyPr>
           <a:lstStyle/>
@@ -4705,7 +4700,7 @@
           </a:fontRef>
         </p:style>
         <p:txBody>
-          <a:bodyPr rtlCol="0" anchor="ctr" wrap="square" lIns="25400" rIns="25400" tIns="12700" bIns="12700">
+          <a:bodyPr wrap="square" lIns="25400" tIns="12700" rIns="25400" bIns="12700" rtlCol="0" anchor="ctr">
             <a:noAutofit/>
           </a:bodyPr>
           <a:lstStyle/>
@@ -4761,7 +4756,7 @@
           </a:fontRef>
         </p:style>
         <p:txBody>
-          <a:bodyPr rtlCol="0" anchor="ctr" wrap="square" lIns="25400" rIns="25400" tIns="12700" bIns="12700">
+          <a:bodyPr wrap="square" lIns="25400" tIns="12700" rIns="25400" bIns="12700" rtlCol="0" anchor="ctr">
             <a:noAutofit/>
           </a:bodyPr>
           <a:lstStyle/>
@@ -4817,7 +4812,7 @@
           </a:fontRef>
         </p:style>
         <p:txBody>
-          <a:bodyPr rtlCol="0" anchor="ctr" wrap="square" lIns="25400" rIns="25400" tIns="12700" bIns="12700">
+          <a:bodyPr wrap="square" lIns="25400" tIns="12700" rIns="25400" bIns="12700" rtlCol="0" anchor="ctr">
             <a:noAutofit/>
           </a:bodyPr>
           <a:lstStyle/>
@@ -4873,7 +4868,7 @@
           </a:fontRef>
         </p:style>
         <p:txBody>
-          <a:bodyPr rtlCol="0" anchor="ctr" wrap="square" lIns="25400" rIns="25400" tIns="12700" bIns="12700">
+          <a:bodyPr wrap="square" lIns="25400" tIns="12700" rIns="25400" bIns="12700" rtlCol="0" anchor="ctr">
             <a:noAutofit/>
           </a:bodyPr>
           <a:lstStyle/>
@@ -4930,7 +4925,7 @@
           </a:fontRef>
         </p:style>
         <p:txBody>
-          <a:bodyPr rtlCol="0" anchor="ctr" wrap="square" lIns="25400" rIns="25400" tIns="12700" bIns="12700">
+          <a:bodyPr wrap="square" lIns="25400" tIns="12700" rIns="25400" bIns="12700" rtlCol="0" anchor="ctr">
             <a:noAutofit/>
           </a:bodyPr>
           <a:lstStyle/>
@@ -4987,7 +4982,7 @@
           </a:fontRef>
         </p:style>
         <p:txBody>
-          <a:bodyPr rtlCol="0" anchor="ctr" wrap="square" lIns="25400" rIns="25400" tIns="12700" bIns="12700">
+          <a:bodyPr wrap="square" lIns="25400" tIns="12700" rIns="25400" bIns="12700" rtlCol="0" anchor="ctr">
             <a:noAutofit/>
           </a:bodyPr>
           <a:lstStyle/>
@@ -5043,7 +5038,7 @@
           </a:fontRef>
         </p:style>
         <p:txBody>
-          <a:bodyPr rtlCol="0" anchor="ctr" wrap="square" lIns="25400" rIns="25400" tIns="12700" bIns="12700">
+          <a:bodyPr wrap="square" lIns="25400" tIns="12700" rIns="25400" bIns="12700" rtlCol="0" anchor="ctr">
             <a:noAutofit/>
           </a:bodyPr>
           <a:lstStyle/>
@@ -5099,7 +5094,7 @@
           </a:fontRef>
         </p:style>
         <p:txBody>
-          <a:bodyPr rtlCol="0" anchor="ctr" wrap="square" lIns="25400" rIns="25400" tIns="12700" bIns="12700">
+          <a:bodyPr wrap="square" lIns="25400" tIns="12700" rIns="25400" bIns="12700" rtlCol="0" anchor="ctr">
             <a:noAutofit/>
           </a:bodyPr>
           <a:lstStyle/>
@@ -5156,7 +5151,7 @@
           </a:fontRef>
         </p:style>
         <p:txBody>
-          <a:bodyPr rtlCol="0" anchor="ctr" wrap="square" lIns="25400" rIns="25400" tIns="12700" bIns="12700">
+          <a:bodyPr wrap="square" lIns="25400" tIns="12700" rIns="25400" bIns="12700" rtlCol="0" anchor="ctr">
             <a:noAutofit/>
           </a:bodyPr>
           <a:lstStyle/>
@@ -5212,7 +5207,7 @@
           </a:fontRef>
         </p:style>
         <p:txBody>
-          <a:bodyPr rtlCol="0" anchor="ctr" wrap="square" lIns="25400" rIns="25400" tIns="12700" bIns="12700">
+          <a:bodyPr wrap="square" lIns="25400" tIns="12700" rIns="25400" bIns="12700" rtlCol="0" anchor="ctr">
             <a:noAutofit/>
           </a:bodyPr>
           <a:lstStyle/>
@@ -5268,7 +5263,7 @@
           </a:fontRef>
         </p:style>
         <p:txBody>
-          <a:bodyPr rtlCol="0" anchor="ctr" wrap="square" lIns="25400" rIns="25400" tIns="12700" bIns="12700">
+          <a:bodyPr wrap="square" lIns="25400" tIns="12700" rIns="25400" bIns="12700" rtlCol="0" anchor="ctr">
             <a:noAutofit/>
           </a:bodyPr>
           <a:lstStyle/>
@@ -5324,7 +5319,7 @@
           </a:fontRef>
         </p:style>
         <p:txBody>
-          <a:bodyPr rtlCol="0" anchor="ctr" wrap="square" lIns="25400" rIns="25400" tIns="12700" bIns="12700">
+          <a:bodyPr wrap="square" lIns="25400" tIns="12700" rIns="25400" bIns="12700" rtlCol="0" anchor="ctr">
             <a:noAutofit/>
           </a:bodyPr>
           <a:lstStyle/>
@@ -5350,7 +5345,7 @@
 </file>
 
 <file path=ppt/slides/slide11.xml><?xml version="1.0" encoding="utf-8"?>
-<p:sld xmlns:a="http://schemas.openxmlformats.org/drawingml/2006/main" xmlns:p="http://schemas.openxmlformats.org/presentationml/2006/main" xmlns:r="http://schemas.openxmlformats.org/officeDocument/2006/relationships">
+<p:sld xmlns:a="http://schemas.openxmlformats.org/drawingml/2006/main" xmlns:r="http://schemas.openxmlformats.org/officeDocument/2006/relationships" xmlns:p="http://schemas.openxmlformats.org/presentationml/2006/main">
   <p:cSld>
     <p:spTree>
       <p:nvGrpSpPr>
@@ -5358,7 +5353,14 @@
         <p:cNvGrpSpPr/>
         <p:nvPr/>
       </p:nvGrpSpPr>
-      <p:grpSpPr/>
+      <p:grpSpPr>
+        <a:xfrm>
+          <a:off x="0" y="0"/>
+          <a:ext cx="0" cy="0"/>
+          <a:chOff x="0" y="0"/>
+          <a:chExt cx="0" cy="0"/>
+        </a:xfrm>
+      </p:grpSpPr>
       <p:sp>
         <p:nvSpPr>
           <p:cNvPr id="2" name="Rectangle 1"/>
@@ -5398,20 +5400,13 @@
           </a:fontRef>
         </p:style>
         <p:txBody>
-          <a:bodyPr rtlCol="0" anchor="ctr" wrap="square" lIns="25400" rIns="25400" tIns="12700" bIns="12700">
-            <a:noAutofit/>
-          </a:bodyPr>
-          <a:lstStyle/>
-          <a:p>
-            <a:pPr algn="ctr"/>
-            <a:r>
-              <a:rPr sz="1000" b="0">
-                <a:solidFill>
-                  <a:srgbClr val="2B2418"/>
-                </a:solidFill>
-              </a:rPr>
-              <a:t/>
-            </a:r>
+          <a:bodyPr wrap="square" lIns="25400" tIns="12700" rIns="25400" bIns="12700" rtlCol="0" anchor="ctr">
+            <a:noAutofit/>
+          </a:bodyPr>
+          <a:lstStyle/>
+          <a:p>
+            <a:pPr algn="ctr"/>
+            <a:endParaRPr/>
           </a:p>
         </p:txBody>
       </p:sp>
@@ -5495,7 +5490,7 @@
           </a:fontRef>
         </p:style>
         <p:txBody>
-          <a:bodyPr rtlCol="0" anchor="ctr" wrap="square" lIns="25400" rIns="25400" tIns="12700" bIns="12700">
+          <a:bodyPr wrap="square" lIns="25400" tIns="12700" rIns="25400" bIns="12700" rtlCol="0" anchor="ctr">
             <a:noAutofit/>
           </a:bodyPr>
           <a:lstStyle/>
@@ -5551,7 +5546,7 @@
           </a:fontRef>
         </p:style>
         <p:txBody>
-          <a:bodyPr rtlCol="0" anchor="ctr" wrap="square" lIns="25400" rIns="25400" tIns="12700" bIns="12700">
+          <a:bodyPr wrap="square" lIns="25400" tIns="12700" rIns="25400" bIns="12700" rtlCol="0" anchor="ctr">
             <a:noAutofit/>
           </a:bodyPr>
           <a:lstStyle/>
@@ -5607,7 +5602,7 @@
           </a:fontRef>
         </p:style>
         <p:txBody>
-          <a:bodyPr rtlCol="0" anchor="ctr" wrap="square" lIns="25400" rIns="25400" tIns="12700" bIns="12700">
+          <a:bodyPr wrap="square" lIns="25400" tIns="12700" rIns="25400" bIns="12700" rtlCol="0" anchor="ctr">
             <a:noAutofit/>
           </a:bodyPr>
           <a:lstStyle/>
@@ -5663,7 +5658,7 @@
           </a:fontRef>
         </p:style>
         <p:txBody>
-          <a:bodyPr rtlCol="0" anchor="ctr" wrap="square" lIns="25400" rIns="25400" tIns="12700" bIns="12700">
+          <a:bodyPr wrap="square" lIns="25400" tIns="12700" rIns="25400" bIns="12700" rtlCol="0" anchor="ctr">
             <a:noAutofit/>
           </a:bodyPr>
           <a:lstStyle/>
@@ -5719,7 +5714,7 @@
           </a:fontRef>
         </p:style>
         <p:txBody>
-          <a:bodyPr rtlCol="0" anchor="ctr" wrap="square" lIns="25400" rIns="25400" tIns="12700" bIns="12700">
+          <a:bodyPr wrap="square" lIns="25400" tIns="12700" rIns="25400" bIns="12700" rtlCol="0" anchor="ctr">
             <a:noAutofit/>
           </a:bodyPr>
           <a:lstStyle/>
@@ -5775,7 +5770,7 @@
           </a:fontRef>
         </p:style>
         <p:txBody>
-          <a:bodyPr rtlCol="0" anchor="ctr" wrap="square" lIns="25400" rIns="25400" tIns="12700" bIns="12700">
+          <a:bodyPr wrap="square" lIns="25400" tIns="12700" rIns="25400" bIns="12700" rtlCol="0" anchor="ctr">
             <a:noAutofit/>
           </a:bodyPr>
           <a:lstStyle/>
@@ -5831,7 +5826,7 @@
           </a:fontRef>
         </p:style>
         <p:txBody>
-          <a:bodyPr rtlCol="0" anchor="ctr" wrap="square" lIns="25400" rIns="25400" tIns="12700" bIns="12700">
+          <a:bodyPr wrap="square" lIns="25400" tIns="12700" rIns="25400" bIns="12700" rtlCol="0" anchor="ctr">
             <a:noAutofit/>
           </a:bodyPr>
           <a:lstStyle/>
@@ -5887,7 +5882,7 @@
           </a:fontRef>
         </p:style>
         <p:txBody>
-          <a:bodyPr rtlCol="0" anchor="ctr" wrap="square" lIns="25400" rIns="25400" tIns="12700" bIns="12700">
+          <a:bodyPr wrap="square" lIns="25400" tIns="12700" rIns="25400" bIns="12700" rtlCol="0" anchor="ctr">
             <a:noAutofit/>
           </a:bodyPr>
           <a:lstStyle/>
@@ -5943,7 +5938,7 @@
           </a:fontRef>
         </p:style>
         <p:txBody>
-          <a:bodyPr rtlCol="0" anchor="ctr" wrap="square" lIns="25400" rIns="25400" tIns="12700" bIns="12700">
+          <a:bodyPr wrap="square" lIns="25400" tIns="12700" rIns="25400" bIns="12700" rtlCol="0" anchor="ctr">
             <a:noAutofit/>
           </a:bodyPr>
           <a:lstStyle/>
@@ -5999,7 +5994,7 @@
           </a:fontRef>
         </p:style>
         <p:txBody>
-          <a:bodyPr rtlCol="0" anchor="ctr" wrap="square" lIns="25400" rIns="25400" tIns="12700" bIns="12700">
+          <a:bodyPr wrap="square" lIns="25400" tIns="12700" rIns="25400" bIns="12700" rtlCol="0" anchor="ctr">
             <a:noAutofit/>
           </a:bodyPr>
           <a:lstStyle/>
@@ -6055,7 +6050,7 @@
           </a:fontRef>
         </p:style>
         <p:txBody>
-          <a:bodyPr rtlCol="0" anchor="ctr" wrap="square" lIns="25400" rIns="25400" tIns="12700" bIns="12700">
+          <a:bodyPr wrap="square" lIns="25400" tIns="12700" rIns="25400" bIns="12700" rtlCol="0" anchor="ctr">
             <a:noAutofit/>
           </a:bodyPr>
           <a:lstStyle/>
@@ -6111,7 +6106,7 @@
           </a:fontRef>
         </p:style>
         <p:txBody>
-          <a:bodyPr rtlCol="0" anchor="ctr" wrap="square" lIns="25400" rIns="25400" tIns="12700" bIns="12700">
+          <a:bodyPr wrap="square" lIns="25400" tIns="12700" rIns="25400" bIns="12700" rtlCol="0" anchor="ctr">
             <a:noAutofit/>
           </a:bodyPr>
           <a:lstStyle/>
@@ -6167,7 +6162,7 @@
           </a:fontRef>
         </p:style>
         <p:txBody>
-          <a:bodyPr rtlCol="0" anchor="ctr" wrap="square" lIns="25400" rIns="25400" tIns="12700" bIns="12700">
+          <a:bodyPr wrap="square" lIns="25400" tIns="12700" rIns="25400" bIns="12700" rtlCol="0" anchor="ctr">
             <a:noAutofit/>
           </a:bodyPr>
           <a:lstStyle/>
@@ -6223,7 +6218,7 @@
           </a:fontRef>
         </p:style>
         <p:txBody>
-          <a:bodyPr rtlCol="0" anchor="ctr" wrap="square" lIns="25400" rIns="25400" tIns="12700" bIns="12700">
+          <a:bodyPr wrap="square" lIns="25400" tIns="12700" rIns="25400" bIns="12700" rtlCol="0" anchor="ctr">
             <a:noAutofit/>
           </a:bodyPr>
           <a:lstStyle/>
@@ -6279,7 +6274,7 @@
           </a:fontRef>
         </p:style>
         <p:txBody>
-          <a:bodyPr rtlCol="0" anchor="ctr" wrap="square" lIns="25400" rIns="25400" tIns="12700" bIns="12700">
+          <a:bodyPr wrap="square" lIns="25400" tIns="12700" rIns="25400" bIns="12700" rtlCol="0" anchor="ctr">
             <a:noAutofit/>
           </a:bodyPr>
           <a:lstStyle/>
@@ -6335,7 +6330,7 @@
           </a:fontRef>
         </p:style>
         <p:txBody>
-          <a:bodyPr rtlCol="0" anchor="ctr" wrap="square" lIns="25400" rIns="25400" tIns="12700" bIns="12700">
+          <a:bodyPr wrap="square" lIns="25400" tIns="12700" rIns="25400" bIns="12700" rtlCol="0" anchor="ctr">
             <a:noAutofit/>
           </a:bodyPr>
           <a:lstStyle/>
@@ -6391,7 +6386,7 @@
           </a:fontRef>
         </p:style>
         <p:txBody>
-          <a:bodyPr rtlCol="0" anchor="ctr" wrap="square" lIns="25400" rIns="25400" tIns="12700" bIns="12700">
+          <a:bodyPr wrap="square" lIns="25400" tIns="12700" rIns="25400" bIns="12700" rtlCol="0" anchor="ctr">
             <a:noAutofit/>
           </a:bodyPr>
           <a:lstStyle/>
@@ -6447,7 +6442,7 @@
           </a:fontRef>
         </p:style>
         <p:txBody>
-          <a:bodyPr rtlCol="0" anchor="ctr" wrap="square" lIns="25400" rIns="25400" tIns="12700" bIns="12700">
+          <a:bodyPr wrap="square" lIns="25400" tIns="12700" rIns="25400" bIns="12700" rtlCol="0" anchor="ctr">
             <a:noAutofit/>
           </a:bodyPr>
           <a:lstStyle/>
@@ -6503,7 +6498,7 @@
           </a:fontRef>
         </p:style>
         <p:txBody>
-          <a:bodyPr rtlCol="0" anchor="ctr" wrap="square" lIns="25400" rIns="25400" tIns="12700" bIns="12700">
+          <a:bodyPr wrap="square" lIns="25400" tIns="12700" rIns="25400" bIns="12700" rtlCol="0" anchor="ctr">
             <a:noAutofit/>
           </a:bodyPr>
           <a:lstStyle/>
@@ -6559,7 +6554,7 @@
           </a:fontRef>
         </p:style>
         <p:txBody>
-          <a:bodyPr rtlCol="0" anchor="ctr" wrap="square" lIns="25400" rIns="25400" tIns="12700" bIns="12700">
+          <a:bodyPr wrap="square" lIns="25400" tIns="12700" rIns="25400" bIns="12700" rtlCol="0" anchor="ctr">
             <a:noAutofit/>
           </a:bodyPr>
           <a:lstStyle/>
@@ -6615,7 +6610,7 @@
           </a:fontRef>
         </p:style>
         <p:txBody>
-          <a:bodyPr rtlCol="0" anchor="ctr" wrap="square" lIns="25400" rIns="25400" tIns="12700" bIns="12700">
+          <a:bodyPr wrap="square" lIns="25400" tIns="12700" rIns="25400" bIns="12700" rtlCol="0" anchor="ctr">
             <a:noAutofit/>
           </a:bodyPr>
           <a:lstStyle/>
@@ -6671,7 +6666,7 @@
           </a:fontRef>
         </p:style>
         <p:txBody>
-          <a:bodyPr rtlCol="0" anchor="ctr" wrap="square" lIns="25400" rIns="25400" tIns="12700" bIns="12700">
+          <a:bodyPr wrap="square" lIns="25400" tIns="12700" rIns="25400" bIns="12700" rtlCol="0" anchor="ctr">
             <a:noAutofit/>
           </a:bodyPr>
           <a:lstStyle/>
@@ -6727,7 +6722,7 @@
           </a:fontRef>
         </p:style>
         <p:txBody>
-          <a:bodyPr rtlCol="0" anchor="ctr" wrap="square" lIns="25400" rIns="25400" tIns="12700" bIns="12700">
+          <a:bodyPr wrap="square" lIns="25400" tIns="12700" rIns="25400" bIns="12700" rtlCol="0" anchor="ctr">
             <a:noAutofit/>
           </a:bodyPr>
           <a:lstStyle/>
@@ -6783,7 +6778,7 @@
           </a:fontRef>
         </p:style>
         <p:txBody>
-          <a:bodyPr rtlCol="0" anchor="ctr" wrap="square" lIns="25400" rIns="25400" tIns="12700" bIns="12700">
+          <a:bodyPr wrap="square" lIns="25400" tIns="12700" rIns="25400" bIns="12700" rtlCol="0" anchor="ctr">
             <a:noAutofit/>
           </a:bodyPr>
           <a:lstStyle/>
@@ -6839,7 +6834,7 @@
           </a:fontRef>
         </p:style>
         <p:txBody>
-          <a:bodyPr rtlCol="0" anchor="ctr" wrap="square" lIns="25400" rIns="25400" tIns="12700" bIns="12700">
+          <a:bodyPr wrap="square" lIns="25400" tIns="12700" rIns="25400" bIns="12700" rtlCol="0" anchor="ctr">
             <a:noAutofit/>
           </a:bodyPr>
           <a:lstStyle/>
@@ -6895,7 +6890,7 @@
           </a:fontRef>
         </p:style>
         <p:txBody>
-          <a:bodyPr rtlCol="0" anchor="ctr" wrap="square" lIns="25400" rIns="25400" tIns="12700" bIns="12700">
+          <a:bodyPr wrap="square" lIns="25400" tIns="12700" rIns="25400" bIns="12700" rtlCol="0" anchor="ctr">
             <a:noAutofit/>
           </a:bodyPr>
           <a:lstStyle/>
@@ -6951,7 +6946,7 @@
           </a:fontRef>
         </p:style>
         <p:txBody>
-          <a:bodyPr rtlCol="0" anchor="ctr" wrap="square" lIns="25400" rIns="25400" tIns="12700" bIns="12700">
+          <a:bodyPr wrap="square" lIns="25400" tIns="12700" rIns="25400" bIns="12700" rtlCol="0" anchor="ctr">
             <a:noAutofit/>
           </a:bodyPr>
           <a:lstStyle/>
@@ -7007,7 +7002,7 @@
           </a:fontRef>
         </p:style>
         <p:txBody>
-          <a:bodyPr rtlCol="0" anchor="ctr" wrap="square" lIns="25400" rIns="25400" tIns="12700" bIns="12700">
+          <a:bodyPr wrap="square" lIns="25400" tIns="12700" rIns="25400" bIns="12700" rtlCol="0" anchor="ctr">
             <a:noAutofit/>
           </a:bodyPr>
           <a:lstStyle/>
@@ -7063,7 +7058,7 @@
           </a:fontRef>
         </p:style>
         <p:txBody>
-          <a:bodyPr rtlCol="0" anchor="ctr" wrap="square" lIns="25400" rIns="25400" tIns="12700" bIns="12700">
+          <a:bodyPr wrap="square" lIns="25400" tIns="12700" rIns="25400" bIns="12700" rtlCol="0" anchor="ctr">
             <a:noAutofit/>
           </a:bodyPr>
           <a:lstStyle/>
@@ -7119,7 +7114,7 @@
           </a:fontRef>
         </p:style>
         <p:txBody>
-          <a:bodyPr rtlCol="0" anchor="ctr" wrap="square" lIns="25400" rIns="25400" tIns="12700" bIns="12700">
+          <a:bodyPr wrap="square" lIns="25400" tIns="12700" rIns="25400" bIns="12700" rtlCol="0" anchor="ctr">
             <a:noAutofit/>
           </a:bodyPr>
           <a:lstStyle/>
@@ -7175,7 +7170,7 @@
           </a:fontRef>
         </p:style>
         <p:txBody>
-          <a:bodyPr rtlCol="0" anchor="ctr" wrap="square" lIns="25400" rIns="25400" tIns="12700" bIns="12700">
+          <a:bodyPr wrap="square" lIns="25400" tIns="12700" rIns="25400" bIns="12700" rtlCol="0" anchor="ctr">
             <a:noAutofit/>
           </a:bodyPr>
           <a:lstStyle/>
@@ -7231,7 +7226,7 @@
           </a:fontRef>
         </p:style>
         <p:txBody>
-          <a:bodyPr rtlCol="0" anchor="ctr" wrap="square" lIns="25400" rIns="25400" tIns="12700" bIns="12700">
+          <a:bodyPr wrap="square" lIns="25400" tIns="12700" rIns="25400" bIns="12700" rtlCol="0" anchor="ctr">
             <a:noAutofit/>
           </a:bodyPr>
           <a:lstStyle/>
@@ -7287,7 +7282,7 @@
           </a:fontRef>
         </p:style>
         <p:txBody>
-          <a:bodyPr rtlCol="0" anchor="ctr" wrap="square" lIns="25400" rIns="25400" tIns="12700" bIns="12700">
+          <a:bodyPr wrap="square" lIns="25400" tIns="12700" rIns="25400" bIns="12700" rtlCol="0" anchor="ctr">
             <a:noAutofit/>
           </a:bodyPr>
           <a:lstStyle/>
@@ -7343,7 +7338,7 @@
           </a:fontRef>
         </p:style>
         <p:txBody>
-          <a:bodyPr rtlCol="0" anchor="ctr" wrap="square" lIns="25400" rIns="25400" tIns="12700" bIns="12700">
+          <a:bodyPr wrap="square" lIns="25400" tIns="12700" rIns="25400" bIns="12700" rtlCol="0" anchor="ctr">
             <a:noAutofit/>
           </a:bodyPr>
           <a:lstStyle/>
@@ -7399,7 +7394,7 @@
           </a:fontRef>
         </p:style>
         <p:txBody>
-          <a:bodyPr rtlCol="0" anchor="ctr" wrap="square" lIns="25400" rIns="25400" tIns="12700" bIns="12700">
+          <a:bodyPr wrap="square" lIns="25400" tIns="12700" rIns="25400" bIns="12700" rtlCol="0" anchor="ctr">
             <a:noAutofit/>
           </a:bodyPr>
           <a:lstStyle/>
@@ -7455,7 +7450,7 @@
           </a:fontRef>
         </p:style>
         <p:txBody>
-          <a:bodyPr rtlCol="0" anchor="ctr" wrap="square" lIns="25400" rIns="25400" tIns="12700" bIns="12700">
+          <a:bodyPr wrap="square" lIns="25400" tIns="12700" rIns="25400" bIns="12700" rtlCol="0" anchor="ctr">
             <a:noAutofit/>
           </a:bodyPr>
           <a:lstStyle/>
@@ -7511,7 +7506,7 @@
           </a:fontRef>
         </p:style>
         <p:txBody>
-          <a:bodyPr rtlCol="0" anchor="ctr" wrap="square" lIns="25400" rIns="25400" tIns="12700" bIns="12700">
+          <a:bodyPr wrap="square" lIns="25400" tIns="12700" rIns="25400" bIns="12700" rtlCol="0" anchor="ctr">
             <a:noAutofit/>
           </a:bodyPr>
           <a:lstStyle/>
@@ -7567,7 +7562,7 @@
           </a:fontRef>
         </p:style>
         <p:txBody>
-          <a:bodyPr rtlCol="0" anchor="ctr" wrap="square" lIns="25400" rIns="25400" tIns="12700" bIns="12700">
+          <a:bodyPr wrap="square" lIns="25400" tIns="12700" rIns="25400" bIns="12700" rtlCol="0" anchor="ctr">
             <a:noAutofit/>
           </a:bodyPr>
           <a:lstStyle/>
@@ -7623,7 +7618,7 @@
           </a:fontRef>
         </p:style>
         <p:txBody>
-          <a:bodyPr rtlCol="0" anchor="ctr" wrap="square" lIns="25400" rIns="25400" tIns="12700" bIns="12700">
+          <a:bodyPr wrap="square" lIns="25400" tIns="12700" rIns="25400" bIns="12700" rtlCol="0" anchor="ctr">
             <a:noAutofit/>
           </a:bodyPr>
           <a:lstStyle/>
@@ -7679,7 +7674,7 @@
           </a:fontRef>
         </p:style>
         <p:txBody>
-          <a:bodyPr rtlCol="0" anchor="ctr" wrap="square" lIns="25400" rIns="25400" tIns="12700" bIns="12700">
+          <a:bodyPr wrap="square" lIns="25400" tIns="12700" rIns="25400" bIns="12700" rtlCol="0" anchor="ctr">
             <a:noAutofit/>
           </a:bodyPr>
           <a:lstStyle/>
@@ -7705,7 +7700,7 @@
 </file>
 
 <file path=ppt/slides/slide12.xml><?xml version="1.0" encoding="utf-8"?>
-<p:sld xmlns:a="http://schemas.openxmlformats.org/drawingml/2006/main" xmlns:p="http://schemas.openxmlformats.org/presentationml/2006/main" xmlns:r="http://schemas.openxmlformats.org/officeDocument/2006/relationships">
+<p:sld xmlns:a="http://schemas.openxmlformats.org/drawingml/2006/main" xmlns:r="http://schemas.openxmlformats.org/officeDocument/2006/relationships" xmlns:p="http://schemas.openxmlformats.org/presentationml/2006/main">
   <p:cSld>
     <p:spTree>
       <p:nvGrpSpPr>
@@ -7713,7 +7708,14 @@
         <p:cNvGrpSpPr/>
         <p:nvPr/>
       </p:nvGrpSpPr>
-      <p:grpSpPr/>
+      <p:grpSpPr>
+        <a:xfrm>
+          <a:off x="0" y="0"/>
+          <a:ext cx="0" cy="0"/>
+          <a:chOff x="0" y="0"/>
+          <a:chExt cx="0" cy="0"/>
+        </a:xfrm>
+      </p:grpSpPr>
       <p:sp>
         <p:nvSpPr>
           <p:cNvPr id="2" name="Rectangle 1"/>
@@ -7753,20 +7755,13 @@
           </a:fontRef>
         </p:style>
         <p:txBody>
-          <a:bodyPr rtlCol="0" anchor="ctr" wrap="square" lIns="25400" rIns="25400" tIns="12700" bIns="12700">
-            <a:noAutofit/>
-          </a:bodyPr>
-          <a:lstStyle/>
-          <a:p>
-            <a:pPr algn="ctr"/>
-            <a:r>
-              <a:rPr sz="1000" b="0">
-                <a:solidFill>
-                  <a:srgbClr val="2B2418"/>
-                </a:solidFill>
-              </a:rPr>
-              <a:t/>
-            </a:r>
+          <a:bodyPr wrap="square" lIns="25400" tIns="12700" rIns="25400" bIns="12700" rtlCol="0" anchor="ctr">
+            <a:noAutofit/>
+          </a:bodyPr>
+          <a:lstStyle/>
+          <a:p>
+            <a:pPr algn="ctr"/>
+            <a:endParaRPr/>
           </a:p>
         </p:txBody>
       </p:sp>
@@ -7850,7 +7845,7 @@
           </a:fontRef>
         </p:style>
         <p:txBody>
-          <a:bodyPr rtlCol="0" anchor="ctr" wrap="square" lIns="25400" rIns="25400" tIns="12700" bIns="12700">
+          <a:bodyPr wrap="square" lIns="25400" tIns="12700" rIns="25400" bIns="12700" rtlCol="0" anchor="ctr">
             <a:noAutofit/>
           </a:bodyPr>
           <a:lstStyle/>
@@ -7906,7 +7901,7 @@
           </a:fontRef>
         </p:style>
         <p:txBody>
-          <a:bodyPr rtlCol="0" anchor="ctr" wrap="square" lIns="25400" rIns="25400" tIns="12700" bIns="12700">
+          <a:bodyPr wrap="square" lIns="25400" tIns="12700" rIns="25400" bIns="12700" rtlCol="0" anchor="ctr">
             <a:noAutofit/>
           </a:bodyPr>
           <a:lstStyle/>
@@ -7962,7 +7957,7 @@
           </a:fontRef>
         </p:style>
         <p:txBody>
-          <a:bodyPr rtlCol="0" anchor="ctr" wrap="square" lIns="25400" rIns="25400" tIns="12700" bIns="12700">
+          <a:bodyPr wrap="square" lIns="25400" tIns="12700" rIns="25400" bIns="12700" rtlCol="0" anchor="ctr">
             <a:noAutofit/>
           </a:bodyPr>
           <a:lstStyle/>
@@ -8018,7 +8013,7 @@
           </a:fontRef>
         </p:style>
         <p:txBody>
-          <a:bodyPr rtlCol="0" anchor="ctr" wrap="square" lIns="25400" rIns="25400" tIns="12700" bIns="12700">
+          <a:bodyPr wrap="square" lIns="25400" tIns="12700" rIns="25400" bIns="12700" rtlCol="0" anchor="ctr">
             <a:noAutofit/>
           </a:bodyPr>
           <a:lstStyle/>
@@ -8074,7 +8069,7 @@
           </a:fontRef>
         </p:style>
         <p:txBody>
-          <a:bodyPr rtlCol="0" anchor="ctr" wrap="square" lIns="25400" rIns="25400" tIns="12700" bIns="12700">
+          <a:bodyPr wrap="square" lIns="25400" tIns="12700" rIns="25400" bIns="12700" rtlCol="0" anchor="ctr">
             <a:noAutofit/>
           </a:bodyPr>
           <a:lstStyle/>
@@ -8130,7 +8125,7 @@
           </a:fontRef>
         </p:style>
         <p:txBody>
-          <a:bodyPr rtlCol="0" anchor="ctr" wrap="square" lIns="25400" rIns="25400" tIns="12700" bIns="12700">
+          <a:bodyPr wrap="square" lIns="25400" tIns="12700" rIns="25400" bIns="12700" rtlCol="0" anchor="ctr">
             <a:noAutofit/>
           </a:bodyPr>
           <a:lstStyle/>
@@ -8186,7 +8181,7 @@
           </a:fontRef>
         </p:style>
         <p:txBody>
-          <a:bodyPr rtlCol="0" anchor="ctr" wrap="square" lIns="25400" rIns="25400" tIns="12700" bIns="12700">
+          <a:bodyPr wrap="square" lIns="25400" tIns="12700" rIns="25400" bIns="12700" rtlCol="0" anchor="ctr">
             <a:noAutofit/>
           </a:bodyPr>
           <a:lstStyle/>
@@ -8242,7 +8237,7 @@
           </a:fontRef>
         </p:style>
         <p:txBody>
-          <a:bodyPr rtlCol="0" anchor="ctr" wrap="square" lIns="25400" rIns="25400" tIns="12700" bIns="12700">
+          <a:bodyPr wrap="square" lIns="25400" tIns="12700" rIns="25400" bIns="12700" rtlCol="0" anchor="ctr">
             <a:noAutofit/>
           </a:bodyPr>
           <a:lstStyle/>
@@ -8298,7 +8293,7 @@
           </a:fontRef>
         </p:style>
         <p:txBody>
-          <a:bodyPr rtlCol="0" anchor="ctr" wrap="square" lIns="25400" rIns="25400" tIns="12700" bIns="12700">
+          <a:bodyPr wrap="square" lIns="25400" tIns="12700" rIns="25400" bIns="12700" rtlCol="0" anchor="ctr">
             <a:noAutofit/>
           </a:bodyPr>
           <a:lstStyle/>
@@ -8354,7 +8349,7 @@
           </a:fontRef>
         </p:style>
         <p:txBody>
-          <a:bodyPr rtlCol="0" anchor="ctr" wrap="square" lIns="25400" rIns="25400" tIns="12700" bIns="12700">
+          <a:bodyPr wrap="square" lIns="25400" tIns="12700" rIns="25400" bIns="12700" rtlCol="0" anchor="ctr">
             <a:noAutofit/>
           </a:bodyPr>
           <a:lstStyle/>
@@ -8410,7 +8405,7 @@
           </a:fontRef>
         </p:style>
         <p:txBody>
-          <a:bodyPr rtlCol="0" anchor="ctr" wrap="square" lIns="25400" rIns="25400" tIns="12700" bIns="12700">
+          <a:bodyPr wrap="square" lIns="25400" tIns="12700" rIns="25400" bIns="12700" rtlCol="0" anchor="ctr">
             <a:noAutofit/>
           </a:bodyPr>
           <a:lstStyle/>
@@ -8466,7 +8461,7 @@
           </a:fontRef>
         </p:style>
         <p:txBody>
-          <a:bodyPr rtlCol="0" anchor="ctr" wrap="square" lIns="25400" rIns="25400" tIns="12700" bIns="12700">
+          <a:bodyPr wrap="square" lIns="25400" tIns="12700" rIns="25400" bIns="12700" rtlCol="0" anchor="ctr">
             <a:noAutofit/>
           </a:bodyPr>
           <a:lstStyle/>
@@ -8522,7 +8517,7 @@
           </a:fontRef>
         </p:style>
         <p:txBody>
-          <a:bodyPr rtlCol="0" anchor="ctr" wrap="square" lIns="25400" rIns="25400" tIns="12700" bIns="12700">
+          <a:bodyPr wrap="square" lIns="25400" tIns="12700" rIns="25400" bIns="12700" rtlCol="0" anchor="ctr">
             <a:noAutofit/>
           </a:bodyPr>
           <a:lstStyle/>
@@ -8548,7 +8543,7 @@
 </file>
 
 <file path=ppt/slides/slide13.xml><?xml version="1.0" encoding="utf-8"?>
-<p:sld xmlns:a="http://schemas.openxmlformats.org/drawingml/2006/main" xmlns:p="http://schemas.openxmlformats.org/presentationml/2006/main" xmlns:r="http://schemas.openxmlformats.org/officeDocument/2006/relationships">
+<p:sld xmlns:a="http://schemas.openxmlformats.org/drawingml/2006/main" xmlns:r="http://schemas.openxmlformats.org/officeDocument/2006/relationships" xmlns:p="http://schemas.openxmlformats.org/presentationml/2006/main">
   <p:cSld>
     <p:spTree>
       <p:nvGrpSpPr>
@@ -8556,7 +8551,14 @@
         <p:cNvGrpSpPr/>
         <p:nvPr/>
       </p:nvGrpSpPr>
-      <p:grpSpPr/>
+      <p:grpSpPr>
+        <a:xfrm>
+          <a:off x="0" y="0"/>
+          <a:ext cx="0" cy="0"/>
+          <a:chOff x="0" y="0"/>
+          <a:chExt cx="0" cy="0"/>
+        </a:xfrm>
+      </p:grpSpPr>
       <p:sp>
         <p:nvSpPr>
           <p:cNvPr id="2" name="Rectangle 1"/>
@@ -8596,20 +8598,13 @@
           </a:fontRef>
         </p:style>
         <p:txBody>
-          <a:bodyPr rtlCol="0" anchor="ctr" wrap="square" lIns="25400" rIns="25400" tIns="12700" bIns="12700">
-            <a:noAutofit/>
-          </a:bodyPr>
-          <a:lstStyle/>
-          <a:p>
-            <a:pPr algn="ctr"/>
-            <a:r>
-              <a:rPr sz="1000" b="0">
-                <a:solidFill>
-                  <a:srgbClr val="2B2418"/>
-                </a:solidFill>
-              </a:rPr>
-              <a:t/>
-            </a:r>
+          <a:bodyPr wrap="square" lIns="25400" tIns="12700" rIns="25400" bIns="12700" rtlCol="0" anchor="ctr">
+            <a:noAutofit/>
+          </a:bodyPr>
+          <a:lstStyle/>
+          <a:p>
+            <a:pPr algn="ctr"/>
+            <a:endParaRPr/>
           </a:p>
         </p:txBody>
       </p:sp>
@@ -8693,7 +8688,7 @@
           </a:fontRef>
         </p:style>
         <p:txBody>
-          <a:bodyPr rtlCol="0" anchor="ctr" wrap="square" lIns="25400" rIns="25400" tIns="12700" bIns="12700">
+          <a:bodyPr wrap="square" lIns="25400" tIns="12700" rIns="25400" bIns="12700" rtlCol="0" anchor="ctr">
             <a:noAutofit/>
           </a:bodyPr>
           <a:lstStyle/>
@@ -8749,7 +8744,7 @@
           </a:fontRef>
         </p:style>
         <p:txBody>
-          <a:bodyPr rtlCol="0" anchor="ctr" wrap="square" lIns="25400" rIns="25400" tIns="12700" bIns="12700">
+          <a:bodyPr wrap="square" lIns="25400" tIns="12700" rIns="25400" bIns="12700" rtlCol="0" anchor="ctr">
             <a:noAutofit/>
           </a:bodyPr>
           <a:lstStyle/>
@@ -8805,7 +8800,7 @@
           </a:fontRef>
         </p:style>
         <p:txBody>
-          <a:bodyPr rtlCol="0" anchor="ctr" wrap="square" lIns="25400" rIns="25400" tIns="12700" bIns="12700">
+          <a:bodyPr wrap="square" lIns="25400" tIns="12700" rIns="25400" bIns="12700" rtlCol="0" anchor="ctr">
             <a:noAutofit/>
           </a:bodyPr>
           <a:lstStyle/>
@@ -8861,7 +8856,7 @@
           </a:fontRef>
         </p:style>
         <p:txBody>
-          <a:bodyPr rtlCol="0" anchor="ctr" wrap="square" lIns="25400" rIns="25400" tIns="12700" bIns="12700">
+          <a:bodyPr wrap="square" lIns="25400" tIns="12700" rIns="25400" bIns="12700" rtlCol="0" anchor="ctr">
             <a:noAutofit/>
           </a:bodyPr>
           <a:lstStyle/>
@@ -8917,7 +8912,7 @@
           </a:fontRef>
         </p:style>
         <p:txBody>
-          <a:bodyPr rtlCol="0" anchor="ctr" wrap="square" lIns="25400" rIns="25400" tIns="12700" bIns="12700">
+          <a:bodyPr wrap="square" lIns="25400" tIns="12700" rIns="25400" bIns="12700" rtlCol="0" anchor="ctr">
             <a:noAutofit/>
           </a:bodyPr>
           <a:lstStyle/>
@@ -8973,7 +8968,7 @@
           </a:fontRef>
         </p:style>
         <p:txBody>
-          <a:bodyPr rtlCol="0" anchor="ctr" wrap="square" lIns="25400" rIns="25400" tIns="12700" bIns="12700">
+          <a:bodyPr wrap="square" lIns="25400" tIns="12700" rIns="25400" bIns="12700" rtlCol="0" anchor="ctr">
             <a:noAutofit/>
           </a:bodyPr>
           <a:lstStyle/>
@@ -9029,7 +9024,7 @@
           </a:fontRef>
         </p:style>
         <p:txBody>
-          <a:bodyPr rtlCol="0" anchor="ctr" wrap="square" lIns="25400" rIns="25400" tIns="12700" bIns="12700">
+          <a:bodyPr wrap="square" lIns="25400" tIns="12700" rIns="25400" bIns="12700" rtlCol="0" anchor="ctr">
             <a:noAutofit/>
           </a:bodyPr>
           <a:lstStyle/>
@@ -9085,7 +9080,7 @@
           </a:fontRef>
         </p:style>
         <p:txBody>
-          <a:bodyPr rtlCol="0" anchor="ctr" wrap="square" lIns="25400" rIns="25400" tIns="12700" bIns="12700">
+          <a:bodyPr wrap="square" lIns="25400" tIns="12700" rIns="25400" bIns="12700" rtlCol="0" anchor="ctr">
             <a:noAutofit/>
           </a:bodyPr>
           <a:lstStyle/>
@@ -9141,7 +9136,7 @@
           </a:fontRef>
         </p:style>
         <p:txBody>
-          <a:bodyPr rtlCol="0" anchor="ctr" wrap="square" lIns="25400" rIns="25400" tIns="12700" bIns="12700">
+          <a:bodyPr wrap="square" lIns="25400" tIns="12700" rIns="25400" bIns="12700" rtlCol="0" anchor="ctr">
             <a:noAutofit/>
           </a:bodyPr>
           <a:lstStyle/>
@@ -9197,7 +9192,7 @@
           </a:fontRef>
         </p:style>
         <p:txBody>
-          <a:bodyPr rtlCol="0" anchor="ctr" wrap="square" lIns="25400" rIns="25400" tIns="12700" bIns="12700">
+          <a:bodyPr wrap="square" lIns="25400" tIns="12700" rIns="25400" bIns="12700" rtlCol="0" anchor="ctr">
             <a:noAutofit/>
           </a:bodyPr>
           <a:lstStyle/>
@@ -9253,7 +9248,7 @@
           </a:fontRef>
         </p:style>
         <p:txBody>
-          <a:bodyPr rtlCol="0" anchor="ctr" wrap="square" lIns="25400" rIns="25400" tIns="12700" bIns="12700">
+          <a:bodyPr wrap="square" lIns="25400" tIns="12700" rIns="25400" bIns="12700" rtlCol="0" anchor="ctr">
             <a:noAutofit/>
           </a:bodyPr>
           <a:lstStyle/>
@@ -9309,7 +9304,7 @@
           </a:fontRef>
         </p:style>
         <p:txBody>
-          <a:bodyPr rtlCol="0" anchor="ctr" wrap="square" lIns="25400" rIns="25400" tIns="12700" bIns="12700">
+          <a:bodyPr wrap="square" lIns="25400" tIns="12700" rIns="25400" bIns="12700" rtlCol="0" anchor="ctr">
             <a:noAutofit/>
           </a:bodyPr>
           <a:lstStyle/>
@@ -9335,7 +9330,7 @@
 </file>
 
 <file path=ppt/slides/slide14.xml><?xml version="1.0" encoding="utf-8"?>
-<p:sld xmlns:a="http://schemas.openxmlformats.org/drawingml/2006/main" xmlns:p="http://schemas.openxmlformats.org/presentationml/2006/main" xmlns:r="http://schemas.openxmlformats.org/officeDocument/2006/relationships">
+<p:sld xmlns:a="http://schemas.openxmlformats.org/drawingml/2006/main" xmlns:r="http://schemas.openxmlformats.org/officeDocument/2006/relationships" xmlns:p="http://schemas.openxmlformats.org/presentationml/2006/main">
   <p:cSld>
     <p:spTree>
       <p:nvGrpSpPr>
@@ -9343,7 +9338,14 @@
         <p:cNvGrpSpPr/>
         <p:nvPr/>
       </p:nvGrpSpPr>
-      <p:grpSpPr/>
+      <p:grpSpPr>
+        <a:xfrm>
+          <a:off x="0" y="0"/>
+          <a:ext cx="0" cy="0"/>
+          <a:chOff x="0" y="0"/>
+          <a:chExt cx="0" cy="0"/>
+        </a:xfrm>
+      </p:grpSpPr>
       <p:sp>
         <p:nvSpPr>
           <p:cNvPr id="2" name="Rectangle 1"/>
@@ -9383,20 +9385,13 @@
           </a:fontRef>
         </p:style>
         <p:txBody>
-          <a:bodyPr rtlCol="0" anchor="ctr" wrap="square" lIns="25400" rIns="25400" tIns="12700" bIns="12700">
-            <a:noAutofit/>
-          </a:bodyPr>
-          <a:lstStyle/>
-          <a:p>
-            <a:pPr algn="ctr"/>
-            <a:r>
-              <a:rPr sz="1000" b="0">
-                <a:solidFill>
-                  <a:srgbClr val="2B2418"/>
-                </a:solidFill>
-              </a:rPr>
-              <a:t/>
-            </a:r>
+          <a:bodyPr wrap="square" lIns="25400" tIns="12700" rIns="25400" bIns="12700" rtlCol="0" anchor="ctr">
+            <a:noAutofit/>
+          </a:bodyPr>
+          <a:lstStyle/>
+          <a:p>
+            <a:pPr algn="ctr"/>
+            <a:endParaRPr/>
           </a:p>
         </p:txBody>
       </p:sp>
@@ -9480,7 +9475,7 @@
           </a:fontRef>
         </p:style>
         <p:txBody>
-          <a:bodyPr rtlCol="0" anchor="ctr" wrap="square" lIns="25400" rIns="25400" tIns="12700" bIns="12700">
+          <a:bodyPr wrap="square" lIns="25400" tIns="12700" rIns="25400" bIns="12700" rtlCol="0" anchor="ctr">
             <a:noAutofit/>
           </a:bodyPr>
           <a:lstStyle/>
@@ -9536,7 +9531,7 @@
           </a:fontRef>
         </p:style>
         <p:txBody>
-          <a:bodyPr rtlCol="0" anchor="ctr" wrap="square" lIns="25400" rIns="25400" tIns="12700" bIns="12700">
+          <a:bodyPr wrap="square" lIns="25400" tIns="12700" rIns="25400" bIns="12700" rtlCol="0" anchor="ctr">
             <a:noAutofit/>
           </a:bodyPr>
           <a:lstStyle/>
@@ -9592,7 +9587,7 @@
           </a:fontRef>
         </p:style>
         <p:txBody>
-          <a:bodyPr rtlCol="0" anchor="ctr" wrap="square" lIns="25400" rIns="25400" tIns="12700" bIns="12700">
+          <a:bodyPr wrap="square" lIns="25400" tIns="12700" rIns="25400" bIns="12700" rtlCol="0" anchor="ctr">
             <a:noAutofit/>
           </a:bodyPr>
           <a:lstStyle/>
@@ -9648,7 +9643,7 @@
           </a:fontRef>
         </p:style>
         <p:txBody>
-          <a:bodyPr rtlCol="0" anchor="ctr" wrap="square" lIns="25400" rIns="25400" tIns="12700" bIns="12700">
+          <a:bodyPr wrap="square" lIns="25400" tIns="12700" rIns="25400" bIns="12700" rtlCol="0" anchor="ctr">
             <a:noAutofit/>
           </a:bodyPr>
           <a:lstStyle/>
@@ -9705,7 +9700,7 @@
           </a:fontRef>
         </p:style>
         <p:txBody>
-          <a:bodyPr rtlCol="0" anchor="ctr" wrap="square" lIns="25400" rIns="25400" tIns="12700" bIns="12700">
+          <a:bodyPr wrap="square" lIns="25400" tIns="12700" rIns="25400" bIns="12700" rtlCol="0" anchor="ctr">
             <a:noAutofit/>
           </a:bodyPr>
           <a:lstStyle/>
@@ -9761,7 +9756,7 @@
           </a:fontRef>
         </p:style>
         <p:txBody>
-          <a:bodyPr rtlCol="0" anchor="ctr" wrap="square" lIns="25400" rIns="25400" tIns="12700" bIns="12700">
+          <a:bodyPr wrap="square" lIns="25400" tIns="12700" rIns="25400" bIns="12700" rtlCol="0" anchor="ctr">
             <a:noAutofit/>
           </a:bodyPr>
           <a:lstStyle/>
@@ -9818,7 +9813,7 @@
           </a:fontRef>
         </p:style>
         <p:txBody>
-          <a:bodyPr rtlCol="0" anchor="ctr" wrap="square" lIns="25400" rIns="25400" tIns="12700" bIns="12700">
+          <a:bodyPr wrap="square" lIns="25400" tIns="12700" rIns="25400" bIns="12700" rtlCol="0" anchor="ctr">
             <a:noAutofit/>
           </a:bodyPr>
           <a:lstStyle/>
@@ -9874,7 +9869,7 @@
           </a:fontRef>
         </p:style>
         <p:txBody>
-          <a:bodyPr rtlCol="0" anchor="ctr" wrap="square" lIns="25400" rIns="25400" tIns="12700" bIns="12700">
+          <a:bodyPr wrap="square" lIns="25400" tIns="12700" rIns="25400" bIns="12700" rtlCol="0" anchor="ctr">
             <a:noAutofit/>
           </a:bodyPr>
           <a:lstStyle/>
@@ -9931,7 +9926,7 @@
           </a:fontRef>
         </p:style>
         <p:txBody>
-          <a:bodyPr rtlCol="0" anchor="ctr" wrap="square" lIns="25400" rIns="25400" tIns="12700" bIns="12700">
+          <a:bodyPr wrap="square" lIns="25400" tIns="12700" rIns="25400" bIns="12700" rtlCol="0" anchor="ctr">
             <a:noAutofit/>
           </a:bodyPr>
           <a:lstStyle/>
@@ -9957,7 +9952,7 @@
 </file>
 
 <file path=ppt/slides/slide15.xml><?xml version="1.0" encoding="utf-8"?>
-<p:sld xmlns:a="http://schemas.openxmlformats.org/drawingml/2006/main" xmlns:p="http://schemas.openxmlformats.org/presentationml/2006/main" xmlns:r="http://schemas.openxmlformats.org/officeDocument/2006/relationships">
+<p:sld xmlns:a="http://schemas.openxmlformats.org/drawingml/2006/main" xmlns:r="http://schemas.openxmlformats.org/officeDocument/2006/relationships" xmlns:p="http://schemas.openxmlformats.org/presentationml/2006/main">
   <p:cSld>
     <p:spTree>
       <p:nvGrpSpPr>
@@ -9965,7 +9960,14 @@
         <p:cNvGrpSpPr/>
         <p:nvPr/>
       </p:nvGrpSpPr>
-      <p:grpSpPr/>
+      <p:grpSpPr>
+        <a:xfrm>
+          <a:off x="0" y="0"/>
+          <a:ext cx="0" cy="0"/>
+          <a:chOff x="0" y="0"/>
+          <a:chExt cx="0" cy="0"/>
+        </a:xfrm>
+      </p:grpSpPr>
       <p:sp>
         <p:nvSpPr>
           <p:cNvPr id="2" name="Rectangle 1"/>
@@ -10005,20 +10007,13 @@
           </a:fontRef>
         </p:style>
         <p:txBody>
-          <a:bodyPr rtlCol="0" anchor="ctr" wrap="square" lIns="25400" rIns="25400" tIns="12700" bIns="12700">
-            <a:noAutofit/>
-          </a:bodyPr>
-          <a:lstStyle/>
-          <a:p>
-            <a:pPr algn="ctr"/>
-            <a:r>
-              <a:rPr sz="1000" b="0">
-                <a:solidFill>
-                  <a:srgbClr val="2B2418"/>
-                </a:solidFill>
-              </a:rPr>
-              <a:t/>
-            </a:r>
+          <a:bodyPr wrap="square" lIns="25400" tIns="12700" rIns="25400" bIns="12700" rtlCol="0" anchor="ctr">
+            <a:noAutofit/>
+          </a:bodyPr>
+          <a:lstStyle/>
+          <a:p>
+            <a:pPr algn="ctr"/>
+            <a:endParaRPr/>
           </a:p>
         </p:txBody>
       </p:sp>
@@ -10102,7 +10097,7 @@
           </a:fontRef>
         </p:style>
         <p:txBody>
-          <a:bodyPr rtlCol="0" anchor="ctr" wrap="square" lIns="25400" rIns="25400" tIns="12700" bIns="12700">
+          <a:bodyPr wrap="square" lIns="25400" tIns="12700" rIns="25400" bIns="12700" rtlCol="0" anchor="ctr">
             <a:noAutofit/>
           </a:bodyPr>
           <a:lstStyle/>
@@ -10158,7 +10153,7 @@
           </a:fontRef>
         </p:style>
         <p:txBody>
-          <a:bodyPr rtlCol="0" anchor="ctr" wrap="square" lIns="25400" rIns="25400" tIns="12700" bIns="12700">
+          <a:bodyPr wrap="square" lIns="25400" tIns="12700" rIns="25400" bIns="12700" rtlCol="0" anchor="ctr">
             <a:noAutofit/>
           </a:bodyPr>
           <a:lstStyle/>
@@ -10214,7 +10209,7 @@
           </a:fontRef>
         </p:style>
         <p:txBody>
-          <a:bodyPr rtlCol="0" anchor="ctr" wrap="square" lIns="25400" rIns="25400" tIns="12700" bIns="12700">
+          <a:bodyPr wrap="square" lIns="25400" tIns="12700" rIns="25400" bIns="12700" rtlCol="0" anchor="ctr">
             <a:noAutofit/>
           </a:bodyPr>
           <a:lstStyle/>
@@ -10270,7 +10265,7 @@
           </a:fontRef>
         </p:style>
         <p:txBody>
-          <a:bodyPr rtlCol="0" anchor="ctr" wrap="square" lIns="25400" rIns="25400" tIns="12700" bIns="12700">
+          <a:bodyPr wrap="square" lIns="25400" tIns="12700" rIns="25400" bIns="12700" rtlCol="0" anchor="ctr">
             <a:noAutofit/>
           </a:bodyPr>
           <a:lstStyle/>
@@ -10326,7 +10321,7 @@
           </a:fontRef>
         </p:style>
         <p:txBody>
-          <a:bodyPr rtlCol="0" anchor="ctr" wrap="square" lIns="25400" rIns="25400" tIns="12700" bIns="12700">
+          <a:bodyPr wrap="square" lIns="25400" tIns="12700" rIns="25400" bIns="12700" rtlCol="0" anchor="ctr">
             <a:noAutofit/>
           </a:bodyPr>
           <a:lstStyle/>
@@ -10382,7 +10377,7 @@
           </a:fontRef>
         </p:style>
         <p:txBody>
-          <a:bodyPr rtlCol="0" anchor="ctr" wrap="square" lIns="25400" rIns="25400" tIns="12700" bIns="12700">
+          <a:bodyPr wrap="square" lIns="25400" tIns="12700" rIns="25400" bIns="12700" rtlCol="0" anchor="ctr">
             <a:noAutofit/>
           </a:bodyPr>
           <a:lstStyle/>
@@ -10438,7 +10433,7 @@
           </a:fontRef>
         </p:style>
         <p:txBody>
-          <a:bodyPr rtlCol="0" anchor="ctr" wrap="square" lIns="25400" rIns="25400" tIns="12700" bIns="12700">
+          <a:bodyPr wrap="square" lIns="25400" tIns="12700" rIns="25400" bIns="12700" rtlCol="0" anchor="ctr">
             <a:noAutofit/>
           </a:bodyPr>
           <a:lstStyle/>
@@ -10494,7 +10489,7 @@
           </a:fontRef>
         </p:style>
         <p:txBody>
-          <a:bodyPr rtlCol="0" anchor="ctr" wrap="square" lIns="25400" rIns="25400" tIns="12700" bIns="12700">
+          <a:bodyPr wrap="square" lIns="25400" tIns="12700" rIns="25400" bIns="12700" rtlCol="0" anchor="ctr">
             <a:noAutofit/>
           </a:bodyPr>
           <a:lstStyle/>
@@ -10550,7 +10545,7 @@
           </a:fontRef>
         </p:style>
         <p:txBody>
-          <a:bodyPr rtlCol="0" anchor="ctr" wrap="square" lIns="25400" rIns="25400" tIns="12700" bIns="12700">
+          <a:bodyPr wrap="square" lIns="25400" tIns="12700" rIns="25400" bIns="12700" rtlCol="0" anchor="ctr">
             <a:noAutofit/>
           </a:bodyPr>
           <a:lstStyle/>
@@ -10606,7 +10601,7 @@
           </a:fontRef>
         </p:style>
         <p:txBody>
-          <a:bodyPr rtlCol="0" anchor="ctr" wrap="square" lIns="25400" rIns="25400" tIns="12700" bIns="12700">
+          <a:bodyPr wrap="square" lIns="25400" tIns="12700" rIns="25400" bIns="12700" rtlCol="0" anchor="ctr">
             <a:noAutofit/>
           </a:bodyPr>
           <a:lstStyle/>
@@ -10662,7 +10657,7 @@
           </a:fontRef>
         </p:style>
         <p:txBody>
-          <a:bodyPr rtlCol="0" anchor="ctr" wrap="square" lIns="25400" rIns="25400" tIns="12700" bIns="12700">
+          <a:bodyPr wrap="square" lIns="25400" tIns="12700" rIns="25400" bIns="12700" rtlCol="0" anchor="ctr">
             <a:noAutofit/>
           </a:bodyPr>
           <a:lstStyle/>
@@ -10718,7 +10713,7 @@
           </a:fontRef>
         </p:style>
         <p:txBody>
-          <a:bodyPr rtlCol="0" anchor="ctr" wrap="square" lIns="25400" rIns="25400" tIns="12700" bIns="12700">
+          <a:bodyPr wrap="square" lIns="25400" tIns="12700" rIns="25400" bIns="12700" rtlCol="0" anchor="ctr">
             <a:noAutofit/>
           </a:bodyPr>
           <a:lstStyle/>
@@ -10774,7 +10769,7 @@
           </a:fontRef>
         </p:style>
         <p:txBody>
-          <a:bodyPr rtlCol="0" anchor="ctr" wrap="square" lIns="25400" rIns="25400" tIns="12700" bIns="12700">
+          <a:bodyPr wrap="square" lIns="25400" tIns="12700" rIns="25400" bIns="12700" rtlCol="0" anchor="ctr">
             <a:noAutofit/>
           </a:bodyPr>
           <a:lstStyle/>
@@ -10800,7 +10795,7 @@
 </file>
 
 <file path=ppt/slides/slide16.xml><?xml version="1.0" encoding="utf-8"?>
-<p:sld xmlns:a="http://schemas.openxmlformats.org/drawingml/2006/main" xmlns:p="http://schemas.openxmlformats.org/presentationml/2006/main" xmlns:r="http://schemas.openxmlformats.org/officeDocument/2006/relationships">
+<p:sld xmlns:a="http://schemas.openxmlformats.org/drawingml/2006/main" xmlns:r="http://schemas.openxmlformats.org/officeDocument/2006/relationships" xmlns:p="http://schemas.openxmlformats.org/presentationml/2006/main">
   <p:cSld>
     <p:spTree>
       <p:nvGrpSpPr>
@@ -10808,7 +10803,14 @@
         <p:cNvGrpSpPr/>
         <p:nvPr/>
       </p:nvGrpSpPr>
-      <p:grpSpPr/>
+      <p:grpSpPr>
+        <a:xfrm>
+          <a:off x="0" y="0"/>
+          <a:ext cx="0" cy="0"/>
+          <a:chOff x="0" y="0"/>
+          <a:chExt cx="0" cy="0"/>
+        </a:xfrm>
+      </p:grpSpPr>
       <p:sp>
         <p:nvSpPr>
           <p:cNvPr id="2" name="Rectangle 1"/>
@@ -10848,20 +10850,13 @@
           </a:fontRef>
         </p:style>
         <p:txBody>
-          <a:bodyPr rtlCol="0" anchor="ctr" wrap="square" lIns="25400" rIns="25400" tIns="12700" bIns="12700">
-            <a:noAutofit/>
-          </a:bodyPr>
-          <a:lstStyle/>
-          <a:p>
-            <a:pPr algn="ctr"/>
-            <a:r>
-              <a:rPr sz="1000" b="0">
-                <a:solidFill>
-                  <a:srgbClr val="2B2418"/>
-                </a:solidFill>
-              </a:rPr>
-              <a:t/>
-            </a:r>
+          <a:bodyPr wrap="square" lIns="25400" tIns="12700" rIns="25400" bIns="12700" rtlCol="0" anchor="ctr">
+            <a:noAutofit/>
+          </a:bodyPr>
+          <a:lstStyle/>
+          <a:p>
+            <a:pPr algn="ctr"/>
+            <a:endParaRPr/>
           </a:p>
         </p:txBody>
       </p:sp>
@@ -10945,7 +10940,7 @@
           </a:fontRef>
         </p:style>
         <p:txBody>
-          <a:bodyPr rtlCol="0" anchor="ctr" wrap="square" lIns="25400" rIns="25400" tIns="12700" bIns="12700">
+          <a:bodyPr wrap="square" lIns="25400" tIns="12700" rIns="25400" bIns="12700" rtlCol="0" anchor="ctr">
             <a:noAutofit/>
           </a:bodyPr>
           <a:lstStyle/>
@@ -11001,7 +10996,7 @@
           </a:fontRef>
         </p:style>
         <p:txBody>
-          <a:bodyPr rtlCol="0" anchor="ctr" wrap="square" lIns="25400" rIns="25400" tIns="12700" bIns="12700">
+          <a:bodyPr wrap="square" lIns="25400" tIns="12700" rIns="25400" bIns="12700" rtlCol="0" anchor="ctr">
             <a:noAutofit/>
           </a:bodyPr>
           <a:lstStyle/>
@@ -11057,7 +11052,7 @@
           </a:fontRef>
         </p:style>
         <p:txBody>
-          <a:bodyPr rtlCol="0" anchor="ctr" wrap="square" lIns="25400" rIns="25400" tIns="12700" bIns="12700">
+          <a:bodyPr wrap="square" lIns="25400" tIns="12700" rIns="25400" bIns="12700" rtlCol="0" anchor="ctr">
             <a:noAutofit/>
           </a:bodyPr>
           <a:lstStyle/>
@@ -11113,7 +11108,7 @@
           </a:fontRef>
         </p:style>
         <p:txBody>
-          <a:bodyPr rtlCol="0" anchor="ctr" wrap="square" lIns="25400" rIns="25400" tIns="12700" bIns="12700">
+          <a:bodyPr wrap="square" lIns="25400" tIns="12700" rIns="25400" bIns="12700" rtlCol="0" anchor="ctr">
             <a:noAutofit/>
           </a:bodyPr>
           <a:lstStyle/>
@@ -11169,7 +11164,7 @@
           </a:fontRef>
         </p:style>
         <p:txBody>
-          <a:bodyPr rtlCol="0" anchor="ctr" wrap="square" lIns="25400" rIns="25400" tIns="12700" bIns="12700">
+          <a:bodyPr wrap="square" lIns="25400" tIns="12700" rIns="25400" bIns="12700" rtlCol="0" anchor="ctr">
             <a:noAutofit/>
           </a:bodyPr>
           <a:lstStyle/>
@@ -11226,7 +11221,7 @@
           </a:fontRef>
         </p:style>
         <p:txBody>
-          <a:bodyPr rtlCol="0" anchor="ctr" wrap="square" lIns="25400" rIns="25400" tIns="12700" bIns="12700">
+          <a:bodyPr wrap="square" lIns="25400" tIns="12700" rIns="25400" bIns="12700" rtlCol="0" anchor="ctr">
             <a:noAutofit/>
           </a:bodyPr>
           <a:lstStyle/>
@@ -11283,7 +11278,7 @@
           </a:fontRef>
         </p:style>
         <p:txBody>
-          <a:bodyPr rtlCol="0" anchor="ctr" wrap="square" lIns="25400" rIns="25400" tIns="12700" bIns="12700">
+          <a:bodyPr wrap="square" lIns="25400" tIns="12700" rIns="25400" bIns="12700" rtlCol="0" anchor="ctr">
             <a:noAutofit/>
           </a:bodyPr>
           <a:lstStyle/>
@@ -11340,7 +11335,7 @@
           </a:fontRef>
         </p:style>
         <p:txBody>
-          <a:bodyPr rtlCol="0" anchor="ctr" wrap="square" lIns="25400" rIns="25400" tIns="12700" bIns="12700">
+          <a:bodyPr wrap="square" lIns="25400" tIns="12700" rIns="25400" bIns="12700" rtlCol="0" anchor="ctr">
             <a:noAutofit/>
           </a:bodyPr>
           <a:lstStyle/>
@@ -11397,7 +11392,7 @@
           </a:fontRef>
         </p:style>
         <p:txBody>
-          <a:bodyPr rtlCol="0" anchor="ctr" wrap="square" lIns="25400" rIns="25400" tIns="12700" bIns="12700">
+          <a:bodyPr wrap="square" lIns="25400" tIns="12700" rIns="25400" bIns="12700" rtlCol="0" anchor="ctr">
             <a:noAutofit/>
           </a:bodyPr>
           <a:lstStyle/>
@@ -11453,7 +11448,7 @@
           </a:fontRef>
         </p:style>
         <p:txBody>
-          <a:bodyPr rtlCol="0" anchor="ctr" wrap="square" lIns="25400" rIns="25400" tIns="12700" bIns="12700">
+          <a:bodyPr wrap="square" lIns="25400" tIns="12700" rIns="25400" bIns="12700" rtlCol="0" anchor="ctr">
             <a:noAutofit/>
           </a:bodyPr>
           <a:lstStyle/>
@@ -11509,7 +11504,7 @@
           </a:fontRef>
         </p:style>
         <p:txBody>
-          <a:bodyPr rtlCol="0" anchor="ctr" wrap="square" lIns="25400" rIns="25400" tIns="12700" bIns="12700">
+          <a:bodyPr wrap="square" lIns="25400" tIns="12700" rIns="25400" bIns="12700" rtlCol="0" anchor="ctr">
             <a:noAutofit/>
           </a:bodyPr>
           <a:lstStyle/>
@@ -11565,7 +11560,7 @@
           </a:fontRef>
         </p:style>
         <p:txBody>
-          <a:bodyPr rtlCol="0" anchor="ctr" wrap="square" lIns="25400" rIns="25400" tIns="12700" bIns="12700">
+          <a:bodyPr wrap="square" lIns="25400" tIns="12700" rIns="25400" bIns="12700" rtlCol="0" anchor="ctr">
             <a:noAutofit/>
           </a:bodyPr>
           <a:lstStyle/>
@@ -11621,7 +11616,7 @@
           </a:fontRef>
         </p:style>
         <p:txBody>
-          <a:bodyPr rtlCol="0" anchor="ctr" wrap="square" lIns="25400" rIns="25400" tIns="12700" bIns="12700">
+          <a:bodyPr wrap="square" lIns="25400" tIns="12700" rIns="25400" bIns="12700" rtlCol="0" anchor="ctr">
             <a:noAutofit/>
           </a:bodyPr>
           <a:lstStyle/>
@@ -11677,7 +11672,7 @@
           </a:fontRef>
         </p:style>
         <p:txBody>
-          <a:bodyPr rtlCol="0" anchor="ctr" wrap="square" lIns="25400" rIns="25400" tIns="12700" bIns="12700">
+          <a:bodyPr wrap="square" lIns="25400" tIns="12700" rIns="25400" bIns="12700" rtlCol="0" anchor="ctr">
             <a:noAutofit/>
           </a:bodyPr>
           <a:lstStyle/>
@@ -11733,7 +11728,7 @@
           </a:fontRef>
         </p:style>
         <p:txBody>
-          <a:bodyPr rtlCol="0" anchor="ctr" wrap="square" lIns="25400" rIns="25400" tIns="12700" bIns="12700">
+          <a:bodyPr wrap="square" lIns="25400" tIns="12700" rIns="25400" bIns="12700" rtlCol="0" anchor="ctr">
             <a:noAutofit/>
           </a:bodyPr>
           <a:lstStyle/>
@@ -11789,7 +11784,7 @@
           </a:fontRef>
         </p:style>
         <p:txBody>
-          <a:bodyPr rtlCol="0" anchor="ctr" wrap="square" lIns="25400" rIns="25400" tIns="12700" bIns="12700">
+          <a:bodyPr wrap="square" lIns="25400" tIns="12700" rIns="25400" bIns="12700" rtlCol="0" anchor="ctr">
             <a:noAutofit/>
           </a:bodyPr>
           <a:lstStyle/>
@@ -11845,7 +11840,7 @@
           </a:fontRef>
         </p:style>
         <p:txBody>
-          <a:bodyPr rtlCol="0" anchor="ctr" wrap="square" lIns="25400" rIns="25400" tIns="12700" bIns="12700">
+          <a:bodyPr wrap="square" lIns="25400" tIns="12700" rIns="25400" bIns="12700" rtlCol="0" anchor="ctr">
             <a:noAutofit/>
           </a:bodyPr>
           <a:lstStyle/>
@@ -11902,7 +11897,7 @@
           </a:fontRef>
         </p:style>
         <p:txBody>
-          <a:bodyPr rtlCol="0" anchor="ctr" wrap="square" lIns="25400" rIns="25400" tIns="12700" bIns="12700">
+          <a:bodyPr wrap="square" lIns="25400" tIns="12700" rIns="25400" bIns="12700" rtlCol="0" anchor="ctr">
             <a:noAutofit/>
           </a:bodyPr>
           <a:lstStyle/>
@@ -11959,7 +11954,7 @@
           </a:fontRef>
         </p:style>
         <p:txBody>
-          <a:bodyPr rtlCol="0" anchor="ctr" wrap="square" lIns="25400" rIns="25400" tIns="12700" bIns="12700">
+          <a:bodyPr wrap="square" lIns="25400" tIns="12700" rIns="25400" bIns="12700" rtlCol="0" anchor="ctr">
             <a:noAutofit/>
           </a:bodyPr>
           <a:lstStyle/>
@@ -12016,7 +12011,7 @@
           </a:fontRef>
         </p:style>
         <p:txBody>
-          <a:bodyPr rtlCol="0" anchor="ctr" wrap="square" lIns="25400" rIns="25400" tIns="12700" bIns="12700">
+          <a:bodyPr wrap="square" lIns="25400" tIns="12700" rIns="25400" bIns="12700" rtlCol="0" anchor="ctr">
             <a:noAutofit/>
           </a:bodyPr>
           <a:lstStyle/>
@@ -12073,7 +12068,7 @@
           </a:fontRef>
         </p:style>
         <p:txBody>
-          <a:bodyPr rtlCol="0" anchor="ctr" wrap="square" lIns="25400" rIns="25400" tIns="12700" bIns="12700">
+          <a:bodyPr wrap="square" lIns="25400" tIns="12700" rIns="25400" bIns="12700" rtlCol="0" anchor="ctr">
             <a:noAutofit/>
           </a:bodyPr>
           <a:lstStyle/>
@@ -12130,7 +12125,7 @@
           </a:fontRef>
         </p:style>
         <p:txBody>
-          <a:bodyPr rtlCol="0" anchor="ctr" wrap="square" lIns="25400" rIns="25400" tIns="12700" bIns="12700">
+          <a:bodyPr wrap="square" lIns="25400" tIns="12700" rIns="25400" bIns="12700" rtlCol="0" anchor="ctr">
             <a:noAutofit/>
           </a:bodyPr>
           <a:lstStyle/>
@@ -12187,7 +12182,7 @@
           </a:fontRef>
         </p:style>
         <p:txBody>
-          <a:bodyPr rtlCol="0" anchor="ctr" wrap="square" lIns="25400" rIns="25400" tIns="12700" bIns="12700">
+          <a:bodyPr wrap="square" lIns="25400" tIns="12700" rIns="25400" bIns="12700" rtlCol="0" anchor="ctr">
             <a:noAutofit/>
           </a:bodyPr>
           <a:lstStyle/>
@@ -12244,7 +12239,7 @@
           </a:fontRef>
         </p:style>
         <p:txBody>
-          <a:bodyPr rtlCol="0" anchor="ctr" wrap="square" lIns="25400" rIns="25400" tIns="12700" bIns="12700">
+          <a:bodyPr wrap="square" lIns="25400" tIns="12700" rIns="25400" bIns="12700" rtlCol="0" anchor="ctr">
             <a:noAutofit/>
           </a:bodyPr>
           <a:lstStyle/>
@@ -12300,7 +12295,7 @@
           </a:fontRef>
         </p:style>
         <p:txBody>
-          <a:bodyPr rtlCol="0" anchor="ctr" wrap="square" lIns="25400" rIns="25400" tIns="12700" bIns="12700">
+          <a:bodyPr wrap="square" lIns="25400" tIns="12700" rIns="25400" bIns="12700" rtlCol="0" anchor="ctr">
             <a:noAutofit/>
           </a:bodyPr>
           <a:lstStyle/>
@@ -12356,7 +12351,7 @@
           </a:fontRef>
         </p:style>
         <p:txBody>
-          <a:bodyPr rtlCol="0" anchor="ctr" wrap="square" lIns="25400" rIns="25400" tIns="12700" bIns="12700">
+          <a:bodyPr wrap="square" lIns="25400" tIns="12700" rIns="25400" bIns="12700" rtlCol="0" anchor="ctr">
             <a:noAutofit/>
           </a:bodyPr>
           <a:lstStyle/>
@@ -12412,7 +12407,7 @@
           </a:fontRef>
         </p:style>
         <p:txBody>
-          <a:bodyPr rtlCol="0" anchor="ctr" wrap="square" lIns="25400" rIns="25400" tIns="12700" bIns="12700">
+          <a:bodyPr wrap="square" lIns="25400" tIns="12700" rIns="25400" bIns="12700" rtlCol="0" anchor="ctr">
             <a:noAutofit/>
           </a:bodyPr>
           <a:lstStyle/>
@@ -12468,7 +12463,7 @@
           </a:fontRef>
         </p:style>
         <p:txBody>
-          <a:bodyPr rtlCol="0" anchor="ctr" wrap="square" lIns="25400" rIns="25400" tIns="12700" bIns="12700">
+          <a:bodyPr wrap="square" lIns="25400" tIns="12700" rIns="25400" bIns="12700" rtlCol="0" anchor="ctr">
             <a:noAutofit/>
           </a:bodyPr>
           <a:lstStyle/>
@@ -12524,7 +12519,7 @@
           </a:fontRef>
         </p:style>
         <p:txBody>
-          <a:bodyPr rtlCol="0" anchor="ctr" wrap="square" lIns="25400" rIns="25400" tIns="12700" bIns="12700">
+          <a:bodyPr wrap="square" lIns="25400" tIns="12700" rIns="25400" bIns="12700" rtlCol="0" anchor="ctr">
             <a:noAutofit/>
           </a:bodyPr>
           <a:lstStyle/>
@@ -12581,7 +12576,7 @@
           </a:fontRef>
         </p:style>
         <p:txBody>
-          <a:bodyPr rtlCol="0" anchor="ctr" wrap="square" lIns="25400" rIns="25400" tIns="12700" bIns="12700">
+          <a:bodyPr wrap="square" lIns="25400" tIns="12700" rIns="25400" bIns="12700" rtlCol="0" anchor="ctr">
             <a:noAutofit/>
           </a:bodyPr>
           <a:lstStyle/>
@@ -12637,7 +12632,7 @@
           </a:fontRef>
         </p:style>
         <p:txBody>
-          <a:bodyPr rtlCol="0" anchor="ctr" wrap="square" lIns="25400" rIns="25400" tIns="12700" bIns="12700">
+          <a:bodyPr wrap="square" lIns="25400" tIns="12700" rIns="25400" bIns="12700" rtlCol="0" anchor="ctr">
             <a:noAutofit/>
           </a:bodyPr>
           <a:lstStyle/>
@@ -12693,7 +12688,7 @@
           </a:fontRef>
         </p:style>
         <p:txBody>
-          <a:bodyPr rtlCol="0" anchor="ctr" wrap="square" lIns="25400" rIns="25400" tIns="12700" bIns="12700">
+          <a:bodyPr wrap="square" lIns="25400" tIns="12700" rIns="25400" bIns="12700" rtlCol="0" anchor="ctr">
             <a:noAutofit/>
           </a:bodyPr>
           <a:lstStyle/>
@@ -12719,7 +12714,7 @@
 </file>
 
 <file path=ppt/slides/slide2.xml><?xml version="1.0" encoding="utf-8"?>
-<p:sld xmlns:a="http://schemas.openxmlformats.org/drawingml/2006/main" xmlns:p="http://schemas.openxmlformats.org/presentationml/2006/main" xmlns:r="http://schemas.openxmlformats.org/officeDocument/2006/relationships">
+<p:sld xmlns:a="http://schemas.openxmlformats.org/drawingml/2006/main" xmlns:r="http://schemas.openxmlformats.org/officeDocument/2006/relationships" xmlns:p="http://schemas.openxmlformats.org/presentationml/2006/main">
   <p:cSld>
     <p:spTree>
       <p:nvGrpSpPr>
@@ -12727,7 +12722,14 @@
         <p:cNvGrpSpPr/>
         <p:nvPr/>
       </p:nvGrpSpPr>
-      <p:grpSpPr/>
+      <p:grpSpPr>
+        <a:xfrm>
+          <a:off x="0" y="0"/>
+          <a:ext cx="0" cy="0"/>
+          <a:chOff x="0" y="0"/>
+          <a:chExt cx="0" cy="0"/>
+        </a:xfrm>
+      </p:grpSpPr>
       <p:sp>
         <p:nvSpPr>
           <p:cNvPr id="2" name="Rectangle 1"/>
@@ -12767,20 +12769,13 @@
           </a:fontRef>
         </p:style>
         <p:txBody>
-          <a:bodyPr rtlCol="0" anchor="ctr" wrap="square" lIns="25400" rIns="25400" tIns="12700" bIns="12700">
-            <a:noAutofit/>
-          </a:bodyPr>
-          <a:lstStyle/>
-          <a:p>
-            <a:pPr algn="ctr"/>
-            <a:r>
-              <a:rPr sz="1000" b="0">
-                <a:solidFill>
-                  <a:srgbClr val="2B2418"/>
-                </a:solidFill>
-              </a:rPr>
-              <a:t/>
-            </a:r>
+          <a:bodyPr wrap="square" lIns="25400" tIns="12700" rIns="25400" bIns="12700" rtlCol="0" anchor="ctr">
+            <a:noAutofit/>
+          </a:bodyPr>
+          <a:lstStyle/>
+          <a:p>
+            <a:pPr algn="ctr"/>
+            <a:endParaRPr/>
           </a:p>
         </p:txBody>
       </p:sp>
@@ -12864,7 +12859,7 @@
           </a:fontRef>
         </p:style>
         <p:txBody>
-          <a:bodyPr rtlCol="0" anchor="ctr" wrap="square" lIns="25400" rIns="25400" tIns="12700" bIns="12700">
+          <a:bodyPr wrap="square" lIns="25400" tIns="12700" rIns="25400" bIns="12700" rtlCol="0" anchor="ctr">
             <a:noAutofit/>
           </a:bodyPr>
           <a:lstStyle/>
@@ -12920,7 +12915,7 @@
           </a:fontRef>
         </p:style>
         <p:txBody>
-          <a:bodyPr rtlCol="0" anchor="ctr" wrap="square" lIns="25400" rIns="25400" tIns="12700" bIns="12700">
+          <a:bodyPr wrap="square" lIns="25400" tIns="12700" rIns="25400" bIns="12700" rtlCol="0" anchor="ctr">
             <a:noAutofit/>
           </a:bodyPr>
           <a:lstStyle/>
@@ -12976,7 +12971,7 @@
           </a:fontRef>
         </p:style>
         <p:txBody>
-          <a:bodyPr rtlCol="0" anchor="ctr" wrap="square" lIns="25400" rIns="25400" tIns="12700" bIns="12700">
+          <a:bodyPr wrap="square" lIns="25400" tIns="12700" rIns="25400" bIns="12700" rtlCol="0" anchor="ctr">
             <a:noAutofit/>
           </a:bodyPr>
           <a:lstStyle/>
@@ -13032,7 +13027,7 @@
           </a:fontRef>
         </p:style>
         <p:txBody>
-          <a:bodyPr rtlCol="0" anchor="ctr" wrap="square" lIns="25400" rIns="25400" tIns="12700" bIns="12700">
+          <a:bodyPr wrap="square" lIns="25400" tIns="12700" rIns="25400" bIns="12700" rtlCol="0" anchor="ctr">
             <a:noAutofit/>
           </a:bodyPr>
           <a:lstStyle/>
@@ -13088,7 +13083,7 @@
           </a:fontRef>
         </p:style>
         <p:txBody>
-          <a:bodyPr rtlCol="0" anchor="ctr" wrap="square" lIns="25400" rIns="25400" tIns="12700" bIns="12700">
+          <a:bodyPr wrap="square" lIns="25400" tIns="12700" rIns="25400" bIns="12700" rtlCol="0" anchor="ctr">
             <a:noAutofit/>
           </a:bodyPr>
           <a:lstStyle/>
@@ -13144,7 +13139,7 @@
           </a:fontRef>
         </p:style>
         <p:txBody>
-          <a:bodyPr rtlCol="0" anchor="ctr" wrap="square" lIns="25400" rIns="25400" tIns="12700" bIns="12700">
+          <a:bodyPr wrap="square" lIns="25400" tIns="12700" rIns="25400" bIns="12700" rtlCol="0" anchor="ctr">
             <a:noAutofit/>
           </a:bodyPr>
           <a:lstStyle/>
@@ -13200,7 +13195,7 @@
           </a:fontRef>
         </p:style>
         <p:txBody>
-          <a:bodyPr rtlCol="0" anchor="ctr" wrap="square" lIns="25400" rIns="25400" tIns="12700" bIns="12700">
+          <a:bodyPr wrap="square" lIns="25400" tIns="12700" rIns="25400" bIns="12700" rtlCol="0" anchor="ctr">
             <a:noAutofit/>
           </a:bodyPr>
           <a:lstStyle/>
@@ -13256,7 +13251,7 @@
           </a:fontRef>
         </p:style>
         <p:txBody>
-          <a:bodyPr rtlCol="0" anchor="ctr" wrap="square" lIns="25400" rIns="25400" tIns="12700" bIns="12700">
+          <a:bodyPr wrap="square" lIns="25400" tIns="12700" rIns="25400" bIns="12700" rtlCol="0" anchor="ctr">
             <a:noAutofit/>
           </a:bodyPr>
           <a:lstStyle/>
@@ -13312,7 +13307,7 @@
           </a:fontRef>
         </p:style>
         <p:txBody>
-          <a:bodyPr rtlCol="0" anchor="ctr" wrap="square" lIns="25400" rIns="25400" tIns="12700" bIns="12700">
+          <a:bodyPr wrap="square" lIns="25400" tIns="12700" rIns="25400" bIns="12700" rtlCol="0" anchor="ctr">
             <a:noAutofit/>
           </a:bodyPr>
           <a:lstStyle/>
@@ -13368,7 +13363,7 @@
           </a:fontRef>
         </p:style>
         <p:txBody>
-          <a:bodyPr rtlCol="0" anchor="ctr" wrap="square" lIns="25400" rIns="25400" tIns="12700" bIns="12700">
+          <a:bodyPr wrap="square" lIns="25400" tIns="12700" rIns="25400" bIns="12700" rtlCol="0" anchor="ctr">
             <a:noAutofit/>
           </a:bodyPr>
           <a:lstStyle/>
@@ -13424,7 +13419,7 @@
           </a:fontRef>
         </p:style>
         <p:txBody>
-          <a:bodyPr rtlCol="0" anchor="ctr" wrap="square" lIns="25400" rIns="25400" tIns="12700" bIns="12700">
+          <a:bodyPr wrap="square" lIns="25400" tIns="12700" rIns="25400" bIns="12700" rtlCol="0" anchor="ctr">
             <a:noAutofit/>
           </a:bodyPr>
           <a:lstStyle/>
@@ -13480,7 +13475,7 @@
           </a:fontRef>
         </p:style>
         <p:txBody>
-          <a:bodyPr rtlCol="0" anchor="ctr" wrap="square" lIns="25400" rIns="25400" tIns="12700" bIns="12700">
+          <a:bodyPr wrap="square" lIns="25400" tIns="12700" rIns="25400" bIns="12700" rtlCol="0" anchor="ctr">
             <a:noAutofit/>
           </a:bodyPr>
           <a:lstStyle/>
@@ -13536,7 +13531,7 @@
           </a:fontRef>
         </p:style>
         <p:txBody>
-          <a:bodyPr rtlCol="0" anchor="ctr" wrap="square" lIns="25400" rIns="25400" tIns="12700" bIns="12700">
+          <a:bodyPr wrap="square" lIns="25400" tIns="12700" rIns="25400" bIns="12700" rtlCol="0" anchor="ctr">
             <a:noAutofit/>
           </a:bodyPr>
           <a:lstStyle/>
@@ -13592,7 +13587,7 @@
           </a:fontRef>
         </p:style>
         <p:txBody>
-          <a:bodyPr rtlCol="0" anchor="ctr" wrap="square" lIns="25400" rIns="25400" tIns="12700" bIns="12700">
+          <a:bodyPr wrap="square" lIns="25400" tIns="12700" rIns="25400" bIns="12700" rtlCol="0" anchor="ctr">
             <a:noAutofit/>
           </a:bodyPr>
           <a:lstStyle/>
@@ -13648,7 +13643,7 @@
           </a:fontRef>
         </p:style>
         <p:txBody>
-          <a:bodyPr rtlCol="0" anchor="ctr" wrap="square" lIns="25400" rIns="25400" tIns="12700" bIns="12700">
+          <a:bodyPr wrap="square" lIns="25400" tIns="12700" rIns="25400" bIns="12700" rtlCol="0" anchor="ctr">
             <a:noAutofit/>
           </a:bodyPr>
           <a:lstStyle/>
@@ -13704,7 +13699,7 @@
           </a:fontRef>
         </p:style>
         <p:txBody>
-          <a:bodyPr rtlCol="0" anchor="ctr" wrap="square" lIns="25400" rIns="25400" tIns="12700" bIns="12700">
+          <a:bodyPr wrap="square" lIns="25400" tIns="12700" rIns="25400" bIns="12700" rtlCol="0" anchor="ctr">
             <a:noAutofit/>
           </a:bodyPr>
           <a:lstStyle/>
@@ -13760,7 +13755,7 @@
           </a:fontRef>
         </p:style>
         <p:txBody>
-          <a:bodyPr rtlCol="0" anchor="ctr" wrap="square" lIns="25400" rIns="25400" tIns="12700" bIns="12700">
+          <a:bodyPr wrap="square" lIns="25400" tIns="12700" rIns="25400" bIns="12700" rtlCol="0" anchor="ctr">
             <a:noAutofit/>
           </a:bodyPr>
           <a:lstStyle/>
@@ -13816,7 +13811,7 @@
           </a:fontRef>
         </p:style>
         <p:txBody>
-          <a:bodyPr rtlCol="0" anchor="ctr" wrap="square" lIns="25400" rIns="25400" tIns="12700" bIns="12700">
+          <a:bodyPr wrap="square" lIns="25400" tIns="12700" rIns="25400" bIns="12700" rtlCol="0" anchor="ctr">
             <a:noAutofit/>
           </a:bodyPr>
           <a:lstStyle/>
@@ -13872,7 +13867,7 @@
           </a:fontRef>
         </p:style>
         <p:txBody>
-          <a:bodyPr rtlCol="0" anchor="ctr" wrap="square" lIns="25400" rIns="25400" tIns="12700" bIns="12700">
+          <a:bodyPr wrap="square" lIns="25400" tIns="12700" rIns="25400" bIns="12700" rtlCol="0" anchor="ctr">
             <a:noAutofit/>
           </a:bodyPr>
           <a:lstStyle/>
@@ -13928,7 +13923,7 @@
           </a:fontRef>
         </p:style>
         <p:txBody>
-          <a:bodyPr rtlCol="0" anchor="ctr" wrap="square" lIns="25400" rIns="25400" tIns="12700" bIns="12700">
+          <a:bodyPr wrap="square" lIns="25400" tIns="12700" rIns="25400" bIns="12700" rtlCol="0" anchor="ctr">
             <a:noAutofit/>
           </a:bodyPr>
           <a:lstStyle/>
@@ -13984,7 +13979,7 @@
           </a:fontRef>
         </p:style>
         <p:txBody>
-          <a:bodyPr rtlCol="0" anchor="ctr" wrap="square" lIns="25400" rIns="25400" tIns="12700" bIns="12700">
+          <a:bodyPr wrap="square" lIns="25400" tIns="12700" rIns="25400" bIns="12700" rtlCol="0" anchor="ctr">
             <a:noAutofit/>
           </a:bodyPr>
           <a:lstStyle/>
@@ -14040,7 +14035,7 @@
           </a:fontRef>
         </p:style>
         <p:txBody>
-          <a:bodyPr rtlCol="0" anchor="ctr" wrap="square" lIns="25400" rIns="25400" tIns="12700" bIns="12700">
+          <a:bodyPr wrap="square" lIns="25400" tIns="12700" rIns="25400" bIns="12700" rtlCol="0" anchor="ctr">
             <a:noAutofit/>
           </a:bodyPr>
           <a:lstStyle/>
@@ -14096,7 +14091,7 @@
           </a:fontRef>
         </p:style>
         <p:txBody>
-          <a:bodyPr rtlCol="0" anchor="ctr" wrap="square" lIns="25400" rIns="25400" tIns="12700" bIns="12700">
+          <a:bodyPr wrap="square" lIns="25400" tIns="12700" rIns="25400" bIns="12700" rtlCol="0" anchor="ctr">
             <a:noAutofit/>
           </a:bodyPr>
           <a:lstStyle/>
@@ -14152,7 +14147,7 @@
           </a:fontRef>
         </p:style>
         <p:txBody>
-          <a:bodyPr rtlCol="0" anchor="ctr" wrap="square" lIns="25400" rIns="25400" tIns="12700" bIns="12700">
+          <a:bodyPr wrap="square" lIns="25400" tIns="12700" rIns="25400" bIns="12700" rtlCol="0" anchor="ctr">
             <a:noAutofit/>
           </a:bodyPr>
           <a:lstStyle/>
@@ -14208,7 +14203,7 @@
           </a:fontRef>
         </p:style>
         <p:txBody>
-          <a:bodyPr rtlCol="0" anchor="ctr" wrap="square" lIns="25400" rIns="25400" tIns="12700" bIns="12700">
+          <a:bodyPr wrap="square" lIns="25400" tIns="12700" rIns="25400" bIns="12700" rtlCol="0" anchor="ctr">
             <a:noAutofit/>
           </a:bodyPr>
           <a:lstStyle/>
@@ -14264,7 +14259,7 @@
           </a:fontRef>
         </p:style>
         <p:txBody>
-          <a:bodyPr rtlCol="0" anchor="ctr" wrap="square" lIns="25400" rIns="25400" tIns="12700" bIns="12700">
+          <a:bodyPr wrap="square" lIns="25400" tIns="12700" rIns="25400" bIns="12700" rtlCol="0" anchor="ctr">
             <a:noAutofit/>
           </a:bodyPr>
           <a:lstStyle/>
@@ -14320,7 +14315,7 @@
           </a:fontRef>
         </p:style>
         <p:txBody>
-          <a:bodyPr rtlCol="0" anchor="ctr" wrap="square" lIns="25400" rIns="25400" tIns="12700" bIns="12700">
+          <a:bodyPr wrap="square" lIns="25400" tIns="12700" rIns="25400" bIns="12700" rtlCol="0" anchor="ctr">
             <a:noAutofit/>
           </a:bodyPr>
           <a:lstStyle/>
@@ -14376,7 +14371,7 @@
           </a:fontRef>
         </p:style>
         <p:txBody>
-          <a:bodyPr rtlCol="0" anchor="ctr" wrap="square" lIns="25400" rIns="25400" tIns="12700" bIns="12700">
+          <a:bodyPr wrap="square" lIns="25400" tIns="12700" rIns="25400" bIns="12700" rtlCol="0" anchor="ctr">
             <a:noAutofit/>
           </a:bodyPr>
           <a:lstStyle/>
@@ -14432,7 +14427,7 @@
           </a:fontRef>
         </p:style>
         <p:txBody>
-          <a:bodyPr rtlCol="0" anchor="ctr" wrap="square" lIns="25400" rIns="25400" tIns="12700" bIns="12700">
+          <a:bodyPr wrap="square" lIns="25400" tIns="12700" rIns="25400" bIns="12700" rtlCol="0" anchor="ctr">
             <a:noAutofit/>
           </a:bodyPr>
           <a:lstStyle/>
@@ -14488,7 +14483,7 @@
           </a:fontRef>
         </p:style>
         <p:txBody>
-          <a:bodyPr rtlCol="0" anchor="ctr" wrap="square" lIns="25400" rIns="25400" tIns="12700" bIns="12700">
+          <a:bodyPr wrap="square" lIns="25400" tIns="12700" rIns="25400" bIns="12700" rtlCol="0" anchor="ctr">
             <a:noAutofit/>
           </a:bodyPr>
           <a:lstStyle/>
@@ -14544,7 +14539,7 @@
           </a:fontRef>
         </p:style>
         <p:txBody>
-          <a:bodyPr rtlCol="0" anchor="ctr" wrap="square" lIns="25400" rIns="25400" tIns="12700" bIns="12700">
+          <a:bodyPr wrap="square" lIns="25400" tIns="12700" rIns="25400" bIns="12700" rtlCol="0" anchor="ctr">
             <a:noAutofit/>
           </a:bodyPr>
           <a:lstStyle/>
@@ -14600,7 +14595,7 @@
           </a:fontRef>
         </p:style>
         <p:txBody>
-          <a:bodyPr rtlCol="0" anchor="ctr" wrap="square" lIns="25400" rIns="25400" tIns="12700" bIns="12700">
+          <a:bodyPr wrap="square" lIns="25400" tIns="12700" rIns="25400" bIns="12700" rtlCol="0" anchor="ctr">
             <a:noAutofit/>
           </a:bodyPr>
           <a:lstStyle/>
@@ -14656,7 +14651,7 @@
           </a:fontRef>
         </p:style>
         <p:txBody>
-          <a:bodyPr rtlCol="0" anchor="ctr" wrap="square" lIns="25400" rIns="25400" tIns="12700" bIns="12700">
+          <a:bodyPr wrap="square" lIns="25400" tIns="12700" rIns="25400" bIns="12700" rtlCol="0" anchor="ctr">
             <a:noAutofit/>
           </a:bodyPr>
           <a:lstStyle/>
@@ -14712,7 +14707,7 @@
           </a:fontRef>
         </p:style>
         <p:txBody>
-          <a:bodyPr rtlCol="0" anchor="ctr" wrap="square" lIns="25400" rIns="25400" tIns="12700" bIns="12700">
+          <a:bodyPr wrap="square" lIns="25400" tIns="12700" rIns="25400" bIns="12700" rtlCol="0" anchor="ctr">
             <a:noAutofit/>
           </a:bodyPr>
           <a:lstStyle/>
@@ -14768,7 +14763,7 @@
           </a:fontRef>
         </p:style>
         <p:txBody>
-          <a:bodyPr rtlCol="0" anchor="ctr" wrap="square" lIns="25400" rIns="25400" tIns="12700" bIns="12700">
+          <a:bodyPr wrap="square" lIns="25400" tIns="12700" rIns="25400" bIns="12700" rtlCol="0" anchor="ctr">
             <a:noAutofit/>
           </a:bodyPr>
           <a:lstStyle/>
@@ -14824,7 +14819,7 @@
           </a:fontRef>
         </p:style>
         <p:txBody>
-          <a:bodyPr rtlCol="0" anchor="ctr" wrap="square" lIns="25400" rIns="25400" tIns="12700" bIns="12700">
+          <a:bodyPr wrap="square" lIns="25400" tIns="12700" rIns="25400" bIns="12700" rtlCol="0" anchor="ctr">
             <a:noAutofit/>
           </a:bodyPr>
           <a:lstStyle/>
@@ -14880,7 +14875,7 @@
           </a:fontRef>
         </p:style>
         <p:txBody>
-          <a:bodyPr rtlCol="0" anchor="ctr" wrap="square" lIns="25400" rIns="25400" tIns="12700" bIns="12700">
+          <a:bodyPr wrap="square" lIns="25400" tIns="12700" rIns="25400" bIns="12700" rtlCol="0" anchor="ctr">
             <a:noAutofit/>
           </a:bodyPr>
           <a:lstStyle/>
@@ -14936,7 +14931,7 @@
           </a:fontRef>
         </p:style>
         <p:txBody>
-          <a:bodyPr rtlCol="0" anchor="ctr" wrap="square" lIns="25400" rIns="25400" tIns="12700" bIns="12700">
+          <a:bodyPr wrap="square" lIns="25400" tIns="12700" rIns="25400" bIns="12700" rtlCol="0" anchor="ctr">
             <a:noAutofit/>
           </a:bodyPr>
           <a:lstStyle/>
@@ -14992,7 +14987,7 @@
           </a:fontRef>
         </p:style>
         <p:txBody>
-          <a:bodyPr rtlCol="0" anchor="ctr" wrap="square" lIns="25400" rIns="25400" tIns="12700" bIns="12700">
+          <a:bodyPr wrap="square" lIns="25400" tIns="12700" rIns="25400" bIns="12700" rtlCol="0" anchor="ctr">
             <a:noAutofit/>
           </a:bodyPr>
           <a:lstStyle/>
@@ -15048,7 +15043,7 @@
           </a:fontRef>
         </p:style>
         <p:txBody>
-          <a:bodyPr rtlCol="0" anchor="ctr" wrap="square" lIns="25400" rIns="25400" tIns="12700" bIns="12700">
+          <a:bodyPr wrap="square" lIns="25400" tIns="12700" rIns="25400" bIns="12700" rtlCol="0" anchor="ctr">
             <a:noAutofit/>
           </a:bodyPr>
           <a:lstStyle/>
@@ -15104,7 +15099,7 @@
           </a:fontRef>
         </p:style>
         <p:txBody>
-          <a:bodyPr rtlCol="0" anchor="ctr" wrap="square" lIns="25400" rIns="25400" tIns="12700" bIns="12700">
+          <a:bodyPr wrap="square" lIns="25400" tIns="12700" rIns="25400" bIns="12700" rtlCol="0" anchor="ctr">
             <a:noAutofit/>
           </a:bodyPr>
           <a:lstStyle/>
@@ -15160,7 +15155,7 @@
           </a:fontRef>
         </p:style>
         <p:txBody>
-          <a:bodyPr rtlCol="0" anchor="ctr" wrap="square" lIns="25400" rIns="25400" tIns="12700" bIns="12700">
+          <a:bodyPr wrap="square" lIns="25400" tIns="12700" rIns="25400" bIns="12700" rtlCol="0" anchor="ctr">
             <a:noAutofit/>
           </a:bodyPr>
           <a:lstStyle/>
@@ -15216,7 +15211,7 @@
           </a:fontRef>
         </p:style>
         <p:txBody>
-          <a:bodyPr rtlCol="0" anchor="ctr" wrap="square" lIns="25400" rIns="25400" tIns="12700" bIns="12700">
+          <a:bodyPr wrap="square" lIns="25400" tIns="12700" rIns="25400" bIns="12700" rtlCol="0" anchor="ctr">
             <a:noAutofit/>
           </a:bodyPr>
           <a:lstStyle/>
@@ -15272,7 +15267,7 @@
           </a:fontRef>
         </p:style>
         <p:txBody>
-          <a:bodyPr rtlCol="0" anchor="ctr" wrap="square" lIns="25400" rIns="25400" tIns="12700" bIns="12700">
+          <a:bodyPr wrap="square" lIns="25400" tIns="12700" rIns="25400" bIns="12700" rtlCol="0" anchor="ctr">
             <a:noAutofit/>
           </a:bodyPr>
           <a:lstStyle/>
@@ -15328,7 +15323,7 @@
           </a:fontRef>
         </p:style>
         <p:txBody>
-          <a:bodyPr rtlCol="0" anchor="ctr" wrap="square" lIns="25400" rIns="25400" tIns="12700" bIns="12700">
+          <a:bodyPr wrap="square" lIns="25400" tIns="12700" rIns="25400" bIns="12700" rtlCol="0" anchor="ctr">
             <a:noAutofit/>
           </a:bodyPr>
           <a:lstStyle/>
@@ -15384,7 +15379,7 @@
           </a:fontRef>
         </p:style>
         <p:txBody>
-          <a:bodyPr rtlCol="0" anchor="ctr" wrap="square" lIns="25400" rIns="25400" tIns="12700" bIns="12700">
+          <a:bodyPr wrap="square" lIns="25400" tIns="12700" rIns="25400" bIns="12700" rtlCol="0" anchor="ctr">
             <a:noAutofit/>
           </a:bodyPr>
           <a:lstStyle/>
@@ -15440,7 +15435,7 @@
           </a:fontRef>
         </p:style>
         <p:txBody>
-          <a:bodyPr rtlCol="0" anchor="ctr" wrap="square" lIns="25400" rIns="25400" tIns="12700" bIns="12700">
+          <a:bodyPr wrap="square" lIns="25400" tIns="12700" rIns="25400" bIns="12700" rtlCol="0" anchor="ctr">
             <a:noAutofit/>
           </a:bodyPr>
           <a:lstStyle/>
@@ -15496,7 +15491,7 @@
           </a:fontRef>
         </p:style>
         <p:txBody>
-          <a:bodyPr rtlCol="0" anchor="ctr" wrap="square" lIns="25400" rIns="25400" tIns="12700" bIns="12700">
+          <a:bodyPr wrap="square" lIns="25400" tIns="12700" rIns="25400" bIns="12700" rtlCol="0" anchor="ctr">
             <a:noAutofit/>
           </a:bodyPr>
           <a:lstStyle/>
@@ -15552,7 +15547,7 @@
           </a:fontRef>
         </p:style>
         <p:txBody>
-          <a:bodyPr rtlCol="0" anchor="ctr" wrap="square" lIns="25400" rIns="25400" tIns="12700" bIns="12700">
+          <a:bodyPr wrap="square" lIns="25400" tIns="12700" rIns="25400" bIns="12700" rtlCol="0" anchor="ctr">
             <a:noAutofit/>
           </a:bodyPr>
           <a:lstStyle/>
@@ -15608,7 +15603,7 @@
           </a:fontRef>
         </p:style>
         <p:txBody>
-          <a:bodyPr rtlCol="0" anchor="ctr" wrap="square" lIns="25400" rIns="25400" tIns="12700" bIns="12700">
+          <a:bodyPr wrap="square" lIns="25400" tIns="12700" rIns="25400" bIns="12700" rtlCol="0" anchor="ctr">
             <a:noAutofit/>
           </a:bodyPr>
           <a:lstStyle/>
@@ -15664,7 +15659,7 @@
           </a:fontRef>
         </p:style>
         <p:txBody>
-          <a:bodyPr rtlCol="0" anchor="ctr" wrap="square" lIns="25400" rIns="25400" tIns="12700" bIns="12700">
+          <a:bodyPr wrap="square" lIns="25400" tIns="12700" rIns="25400" bIns="12700" rtlCol="0" anchor="ctr">
             <a:noAutofit/>
           </a:bodyPr>
           <a:lstStyle/>
@@ -15720,7 +15715,7 @@
           </a:fontRef>
         </p:style>
         <p:txBody>
-          <a:bodyPr rtlCol="0" anchor="ctr" wrap="square" lIns="25400" rIns="25400" tIns="12700" bIns="12700">
+          <a:bodyPr wrap="square" lIns="25400" tIns="12700" rIns="25400" bIns="12700" rtlCol="0" anchor="ctr">
             <a:noAutofit/>
           </a:bodyPr>
           <a:lstStyle/>
@@ -15776,7 +15771,7 @@
           </a:fontRef>
         </p:style>
         <p:txBody>
-          <a:bodyPr rtlCol="0" anchor="ctr" wrap="square" lIns="25400" rIns="25400" tIns="12700" bIns="12700">
+          <a:bodyPr wrap="square" lIns="25400" tIns="12700" rIns="25400" bIns="12700" rtlCol="0" anchor="ctr">
             <a:noAutofit/>
           </a:bodyPr>
           <a:lstStyle/>
@@ -15832,7 +15827,7 @@
           </a:fontRef>
         </p:style>
         <p:txBody>
-          <a:bodyPr rtlCol="0" anchor="ctr" wrap="square" lIns="25400" rIns="25400" tIns="12700" bIns="12700">
+          <a:bodyPr wrap="square" lIns="25400" tIns="12700" rIns="25400" bIns="12700" rtlCol="0" anchor="ctr">
             <a:noAutofit/>
           </a:bodyPr>
           <a:lstStyle/>
@@ -15845,6 +15840,68 @@
                 </a:solidFill>
               </a:rPr>
               <a:t>T4 · 5000+</a:t>
+            </a:r>
+          </a:p>
+        </p:txBody>
+      </p:sp>
+      <p:sp>
+        <p:nvSpPr>
+          <p:cNvPr id="59" name="Rounded Rectangle 36">
+            <a:extLst>
+              <a:ext uri="{FF2B5EF4-FFF2-40B4-BE49-F238E27FC236}">
+                <a16:creationId xmlns:a16="http://schemas.microsoft.com/office/drawing/2014/main" id="{1C286448-7722-9543-80D1-EAA30B90B251}"/>
+              </a:ext>
+            </a:extLst>
+          </p:cNvPr>
+          <p:cNvSpPr/>
+          <p:nvPr/>
+        </p:nvSpPr>
+        <p:spPr>
+          <a:xfrm>
+            <a:off x="3547984" y="1099395"/>
+            <a:ext cx="743285" cy="274320"/>
+          </a:xfrm>
+          <a:prstGeom prst="roundRect">
+            <a:avLst/>
+          </a:prstGeom>
+          <a:solidFill>
+            <a:srgbClr val="7FCFC3"/>
+          </a:solidFill>
+          <a:ln w="9525">
+            <a:solidFill>
+              <a:srgbClr val="B98A4E"/>
+            </a:solidFill>
+          </a:ln>
+          <a:effectLst/>
+        </p:spPr>
+        <p:style>
+          <a:lnRef idx="1">
+            <a:schemeClr val="accent1"/>
+          </a:lnRef>
+          <a:fillRef idx="3">
+            <a:schemeClr val="accent1"/>
+          </a:fillRef>
+          <a:effectRef idx="2">
+            <a:schemeClr val="accent1"/>
+          </a:effectRef>
+          <a:fontRef idx="minor">
+            <a:schemeClr val="lt1"/>
+          </a:fontRef>
+        </p:style>
+        <p:txBody>
+          <a:bodyPr wrap="square" lIns="25400" tIns="12700" rIns="25400" bIns="12700" rtlCol="0" anchor="ctr">
+            <a:noAutofit/>
+          </a:bodyPr>
+          <a:lstStyle/>
+          <a:p>
+            <a:pPr algn="ctr"/>
+            <a:r>
+              <a:rPr sz="800" b="0">
+                <a:solidFill>
+                  <a:srgbClr val="2B2418"/>
+                </a:solidFill>
+              </a:rPr>
+              <a:t>tree sowing</a:t>
             </a:r>
           </a:p>
         </p:txBody>
@@ -15858,7 +15915,7 @@
 </file>
 
 <file path=ppt/slides/slide3.xml><?xml version="1.0" encoding="utf-8"?>
-<p:sld xmlns:a="http://schemas.openxmlformats.org/drawingml/2006/main" xmlns:p="http://schemas.openxmlformats.org/presentationml/2006/main" xmlns:r="http://schemas.openxmlformats.org/officeDocument/2006/relationships">
+<p:sld xmlns:a="http://schemas.openxmlformats.org/drawingml/2006/main" xmlns:r="http://schemas.openxmlformats.org/officeDocument/2006/relationships" xmlns:p="http://schemas.openxmlformats.org/presentationml/2006/main">
   <p:cSld>
     <p:spTree>
       <p:nvGrpSpPr>
@@ -15866,7 +15923,14 @@
         <p:cNvGrpSpPr/>
         <p:nvPr/>
       </p:nvGrpSpPr>
-      <p:grpSpPr/>
+      <p:grpSpPr>
+        <a:xfrm>
+          <a:off x="0" y="0"/>
+          <a:ext cx="0" cy="0"/>
+          <a:chOff x="0" y="0"/>
+          <a:chExt cx="0" cy="0"/>
+        </a:xfrm>
+      </p:grpSpPr>
       <p:sp>
         <p:nvSpPr>
           <p:cNvPr id="2" name="Rectangle 1"/>
@@ -15906,20 +15970,13 @@
           </a:fontRef>
         </p:style>
         <p:txBody>
-          <a:bodyPr rtlCol="0" anchor="ctr" wrap="square" lIns="25400" rIns="25400" tIns="12700" bIns="12700">
-            <a:noAutofit/>
-          </a:bodyPr>
-          <a:lstStyle/>
-          <a:p>
-            <a:pPr algn="ctr"/>
-            <a:r>
-              <a:rPr sz="1000" b="0">
-                <a:solidFill>
-                  <a:srgbClr val="2B2418"/>
-                </a:solidFill>
-              </a:rPr>
-              <a:t/>
-            </a:r>
+          <a:bodyPr wrap="square" lIns="25400" tIns="12700" rIns="25400" bIns="12700" rtlCol="0" anchor="ctr">
+            <a:noAutofit/>
+          </a:bodyPr>
+          <a:lstStyle/>
+          <a:p>
+            <a:pPr algn="ctr"/>
+            <a:endParaRPr/>
           </a:p>
         </p:txBody>
       </p:sp>
@@ -16003,7 +16060,7 @@
           </a:fontRef>
         </p:style>
         <p:txBody>
-          <a:bodyPr rtlCol="0" anchor="ctr" wrap="square" lIns="25400" rIns="25400" tIns="12700" bIns="12700">
+          <a:bodyPr wrap="square" lIns="25400" tIns="12700" rIns="25400" bIns="12700" rtlCol="0" anchor="ctr">
             <a:noAutofit/>
           </a:bodyPr>
           <a:lstStyle/>
@@ -16059,7 +16116,7 @@
           </a:fontRef>
         </p:style>
         <p:txBody>
-          <a:bodyPr rtlCol="0" anchor="ctr" wrap="square" lIns="25400" rIns="25400" tIns="12700" bIns="12700">
+          <a:bodyPr wrap="square" lIns="25400" tIns="12700" rIns="25400" bIns="12700" rtlCol="0" anchor="ctr">
             <a:noAutofit/>
           </a:bodyPr>
           <a:lstStyle/>
@@ -16115,7 +16172,7 @@
           </a:fontRef>
         </p:style>
         <p:txBody>
-          <a:bodyPr rtlCol="0" anchor="ctr" wrap="square" lIns="25400" rIns="25400" tIns="12700" bIns="12700">
+          <a:bodyPr wrap="square" lIns="25400" tIns="12700" rIns="25400" bIns="12700" rtlCol="0" anchor="ctr">
             <a:noAutofit/>
           </a:bodyPr>
           <a:lstStyle/>
@@ -16171,7 +16228,7 @@
           </a:fontRef>
         </p:style>
         <p:txBody>
-          <a:bodyPr rtlCol="0" anchor="ctr" wrap="square" lIns="25400" rIns="25400" tIns="12700" bIns="12700">
+          <a:bodyPr wrap="square" lIns="25400" tIns="12700" rIns="25400" bIns="12700" rtlCol="0" anchor="ctr">
             <a:noAutofit/>
           </a:bodyPr>
           <a:lstStyle/>
@@ -16227,7 +16284,7 @@
           </a:fontRef>
         </p:style>
         <p:txBody>
-          <a:bodyPr rtlCol="0" anchor="ctr" wrap="square" lIns="25400" rIns="25400" tIns="12700" bIns="12700">
+          <a:bodyPr wrap="square" lIns="25400" tIns="12700" rIns="25400" bIns="12700" rtlCol="0" anchor="ctr">
             <a:noAutofit/>
           </a:bodyPr>
           <a:lstStyle/>
@@ -16283,7 +16340,7 @@
           </a:fontRef>
         </p:style>
         <p:txBody>
-          <a:bodyPr rtlCol="0" anchor="ctr" wrap="square" lIns="25400" rIns="25400" tIns="12700" bIns="12700">
+          <a:bodyPr wrap="square" lIns="25400" tIns="12700" rIns="25400" bIns="12700" rtlCol="0" anchor="ctr">
             <a:noAutofit/>
           </a:bodyPr>
           <a:lstStyle/>
@@ -16339,7 +16396,7 @@
           </a:fontRef>
         </p:style>
         <p:txBody>
-          <a:bodyPr rtlCol="0" anchor="ctr" wrap="square" lIns="25400" rIns="25400" tIns="12700" bIns="12700">
+          <a:bodyPr wrap="square" lIns="25400" tIns="12700" rIns="25400" bIns="12700" rtlCol="0" anchor="ctr">
             <a:noAutofit/>
           </a:bodyPr>
           <a:lstStyle/>
@@ -16395,7 +16452,7 @@
           </a:fontRef>
         </p:style>
         <p:txBody>
-          <a:bodyPr rtlCol="0" anchor="ctr" wrap="square" lIns="25400" rIns="25400" tIns="12700" bIns="12700">
+          <a:bodyPr wrap="square" lIns="25400" tIns="12700" rIns="25400" bIns="12700" rtlCol="0" anchor="ctr">
             <a:noAutofit/>
           </a:bodyPr>
           <a:lstStyle/>
@@ -16451,7 +16508,7 @@
           </a:fontRef>
         </p:style>
         <p:txBody>
-          <a:bodyPr rtlCol="0" anchor="ctr" wrap="square" lIns="25400" rIns="25400" tIns="12700" bIns="12700">
+          <a:bodyPr wrap="square" lIns="25400" tIns="12700" rIns="25400" bIns="12700" rtlCol="0" anchor="ctr">
             <a:noAutofit/>
           </a:bodyPr>
           <a:lstStyle/>
@@ -16507,7 +16564,7 @@
           </a:fontRef>
         </p:style>
         <p:txBody>
-          <a:bodyPr rtlCol="0" anchor="ctr" wrap="square" lIns="25400" rIns="25400" tIns="12700" bIns="12700">
+          <a:bodyPr wrap="square" lIns="25400" tIns="12700" rIns="25400" bIns="12700" rtlCol="0" anchor="ctr">
             <a:noAutofit/>
           </a:bodyPr>
           <a:lstStyle/>
@@ -16563,7 +16620,7 @@
           </a:fontRef>
         </p:style>
         <p:txBody>
-          <a:bodyPr rtlCol="0" anchor="ctr" wrap="square" lIns="25400" rIns="25400" tIns="12700" bIns="12700">
+          <a:bodyPr wrap="square" lIns="25400" tIns="12700" rIns="25400" bIns="12700" rtlCol="0" anchor="ctr">
             <a:noAutofit/>
           </a:bodyPr>
           <a:lstStyle/>
@@ -16619,7 +16676,7 @@
           </a:fontRef>
         </p:style>
         <p:txBody>
-          <a:bodyPr rtlCol="0" anchor="ctr" wrap="square" lIns="25400" rIns="25400" tIns="12700" bIns="12700">
+          <a:bodyPr wrap="square" lIns="25400" tIns="12700" rIns="25400" bIns="12700" rtlCol="0" anchor="ctr">
             <a:noAutofit/>
           </a:bodyPr>
           <a:lstStyle/>
@@ -16675,7 +16732,7 @@
           </a:fontRef>
         </p:style>
         <p:txBody>
-          <a:bodyPr rtlCol="0" anchor="ctr" wrap="square" lIns="25400" rIns="25400" tIns="12700" bIns="12700">
+          <a:bodyPr wrap="square" lIns="25400" tIns="12700" rIns="25400" bIns="12700" rtlCol="0" anchor="ctr">
             <a:noAutofit/>
           </a:bodyPr>
           <a:lstStyle/>
@@ -16731,7 +16788,7 @@
           </a:fontRef>
         </p:style>
         <p:txBody>
-          <a:bodyPr rtlCol="0" anchor="ctr" wrap="square" lIns="25400" rIns="25400" tIns="12700" bIns="12700">
+          <a:bodyPr wrap="square" lIns="25400" tIns="12700" rIns="25400" bIns="12700" rtlCol="0" anchor="ctr">
             <a:noAutofit/>
           </a:bodyPr>
           <a:lstStyle/>
@@ -16756,7 +16813,7 @@
         </p:nvSpPr>
         <p:spPr>
           <a:xfrm>
-            <a:off x="2504175" y="992124"/>
+            <a:off x="5751635" y="2567895"/>
             <a:ext cx="743285" cy="274320"/>
           </a:xfrm>
           <a:prstGeom prst="roundRect">
@@ -16788,7 +16845,7 @@
           </a:fontRef>
         </p:style>
         <p:txBody>
-          <a:bodyPr rtlCol="0" anchor="ctr" wrap="square" lIns="25400" rIns="25400" tIns="12700" bIns="12700">
+          <a:bodyPr wrap="square" lIns="25400" tIns="12700" rIns="25400" bIns="12700" rtlCol="0" anchor="ctr">
             <a:noAutofit/>
           </a:bodyPr>
           <a:lstStyle/>
@@ -16845,7 +16902,7 @@
           </a:fontRef>
         </p:style>
         <p:txBody>
-          <a:bodyPr rtlCol="0" anchor="ctr" wrap="square" lIns="25400" rIns="25400" tIns="12700" bIns="12700">
+          <a:bodyPr wrap="square" lIns="25400" tIns="12700" rIns="25400" bIns="12700" rtlCol="0" anchor="ctr">
             <a:noAutofit/>
           </a:bodyPr>
           <a:lstStyle/>
@@ -16902,7 +16959,7 @@
           </a:fontRef>
         </p:style>
         <p:txBody>
-          <a:bodyPr rtlCol="0" anchor="ctr" wrap="square" lIns="25400" rIns="25400" tIns="12700" bIns="12700">
+          <a:bodyPr wrap="square" lIns="25400" tIns="12700" rIns="25400" bIns="12700" rtlCol="0" anchor="ctr">
             <a:noAutofit/>
           </a:bodyPr>
           <a:lstStyle/>
@@ -16958,7 +17015,7 @@
           </a:fontRef>
         </p:style>
         <p:txBody>
-          <a:bodyPr rtlCol="0" anchor="ctr" wrap="square" lIns="25400" rIns="25400" tIns="12700" bIns="12700">
+          <a:bodyPr wrap="square" lIns="25400" tIns="12700" rIns="25400" bIns="12700" rtlCol="0" anchor="ctr">
             <a:noAutofit/>
           </a:bodyPr>
           <a:lstStyle/>
@@ -16983,7 +17040,7 @@
         </p:nvSpPr>
         <p:spPr>
           <a:xfrm>
-            <a:off x="2504175" y="2253996"/>
+            <a:off x="4898621" y="2378157"/>
             <a:ext cx="743285" cy="274320"/>
           </a:xfrm>
           <a:prstGeom prst="roundRect">
@@ -17015,7 +17072,7 @@
           </a:fontRef>
         </p:style>
         <p:txBody>
-          <a:bodyPr rtlCol="0" anchor="ctr" wrap="square" lIns="25400" rIns="25400" tIns="12700" bIns="12700">
+          <a:bodyPr wrap="square" lIns="25400" tIns="12700" rIns="25400" bIns="12700" rtlCol="0" anchor="ctr">
             <a:noAutofit/>
           </a:bodyPr>
           <a:lstStyle/>
@@ -17072,7 +17129,7 @@
           </a:fontRef>
         </p:style>
         <p:txBody>
-          <a:bodyPr rtlCol="0" anchor="ctr" wrap="square" lIns="25400" rIns="25400" tIns="12700" bIns="12700">
+          <a:bodyPr wrap="square" lIns="25400" tIns="12700" rIns="25400" bIns="12700" rtlCol="0" anchor="ctr">
             <a:noAutofit/>
           </a:bodyPr>
           <a:lstStyle/>
@@ -17129,7 +17186,7 @@
           </a:fontRef>
         </p:style>
         <p:txBody>
-          <a:bodyPr rtlCol="0" anchor="ctr" wrap="square" lIns="25400" rIns="25400" tIns="12700" bIns="12700">
+          <a:bodyPr wrap="square" lIns="25400" tIns="12700" rIns="25400" bIns="12700" rtlCol="0" anchor="ctr">
             <a:noAutofit/>
           </a:bodyPr>
           <a:lstStyle/>
@@ -17186,7 +17243,7 @@
           </a:fontRef>
         </p:style>
         <p:txBody>
-          <a:bodyPr rtlCol="0" anchor="ctr" wrap="square" lIns="25400" rIns="25400" tIns="12700" bIns="12700">
+          <a:bodyPr wrap="square" lIns="25400" tIns="12700" rIns="25400" bIns="12700" rtlCol="0" anchor="ctr">
             <a:noAutofit/>
           </a:bodyPr>
           <a:lstStyle/>
@@ -17243,7 +17300,7 @@
           </a:fontRef>
         </p:style>
         <p:txBody>
-          <a:bodyPr rtlCol="0" anchor="ctr" wrap="square" lIns="25400" rIns="25400" tIns="12700" bIns="12700">
+          <a:bodyPr wrap="square" lIns="25400" tIns="12700" rIns="25400" bIns="12700" rtlCol="0" anchor="ctr">
             <a:noAutofit/>
           </a:bodyPr>
           <a:lstStyle/>
@@ -17300,7 +17357,7 @@
           </a:fontRef>
         </p:style>
         <p:txBody>
-          <a:bodyPr rtlCol="0" anchor="ctr" wrap="square" lIns="25400" rIns="25400" tIns="12700" bIns="12700">
+          <a:bodyPr wrap="square" lIns="25400" tIns="12700" rIns="25400" bIns="12700" rtlCol="0" anchor="ctr">
             <a:noAutofit/>
           </a:bodyPr>
           <a:lstStyle/>
@@ -17325,7 +17382,7 @@
         </p:nvSpPr>
         <p:spPr>
           <a:xfrm>
-            <a:off x="2504175" y="4146804"/>
+            <a:off x="5751635" y="1319022"/>
             <a:ext cx="743285" cy="274320"/>
           </a:xfrm>
           <a:prstGeom prst="roundRect">
@@ -17357,7 +17414,7 @@
           </a:fontRef>
         </p:style>
         <p:txBody>
-          <a:bodyPr rtlCol="0" anchor="ctr" wrap="square" lIns="25400" rIns="25400" tIns="12700" bIns="12700">
+          <a:bodyPr wrap="square" lIns="25400" tIns="12700" rIns="25400" bIns="12700" rtlCol="0" anchor="ctr">
             <a:noAutofit/>
           </a:bodyPr>
           <a:lstStyle/>
@@ -17382,7 +17439,7 @@
         </p:nvSpPr>
         <p:spPr>
           <a:xfrm>
-            <a:off x="2504175" y="4462272"/>
+            <a:off x="5751635" y="2906974"/>
             <a:ext cx="743285" cy="274320"/>
           </a:xfrm>
           <a:prstGeom prst="roundRect">
@@ -17413,7 +17470,7 @@
           </a:fontRef>
         </p:style>
         <p:txBody>
-          <a:bodyPr rtlCol="0" anchor="ctr" wrap="square" lIns="25400" rIns="25400" tIns="12700" bIns="12700">
+          <a:bodyPr wrap="square" lIns="25400" tIns="12700" rIns="25400" bIns="12700" rtlCol="0" anchor="ctr">
             <a:noAutofit/>
           </a:bodyPr>
           <a:lstStyle/>
@@ -17438,7 +17495,7 @@
         </p:nvSpPr>
         <p:spPr>
           <a:xfrm>
-            <a:off x="2504175" y="4777740"/>
+            <a:off x="5751635" y="1623060"/>
             <a:ext cx="743285" cy="274320"/>
           </a:xfrm>
           <a:prstGeom prst="roundRect">
@@ -17469,7 +17526,7 @@
           </a:fontRef>
         </p:style>
         <p:txBody>
-          <a:bodyPr rtlCol="0" anchor="ctr" wrap="square" lIns="25400" rIns="25400" tIns="12700" bIns="12700">
+          <a:bodyPr wrap="square" lIns="25400" tIns="12700" rIns="25400" bIns="12700" rtlCol="0" anchor="ctr">
             <a:noAutofit/>
           </a:bodyPr>
           <a:lstStyle/>
@@ -17494,7 +17551,7 @@
         </p:nvSpPr>
         <p:spPr>
           <a:xfrm>
-            <a:off x="2504175" y="5093208"/>
+            <a:off x="3302324" y="2569464"/>
             <a:ext cx="743285" cy="274320"/>
           </a:xfrm>
           <a:prstGeom prst="roundRect">
@@ -17525,7 +17582,7 @@
           </a:fontRef>
         </p:style>
         <p:txBody>
-          <a:bodyPr rtlCol="0" anchor="ctr" wrap="square" lIns="25400" rIns="25400" tIns="12700" bIns="12700">
+          <a:bodyPr wrap="square" lIns="25400" tIns="12700" rIns="25400" bIns="12700" rtlCol="0" anchor="ctr">
             <a:noAutofit/>
           </a:bodyPr>
           <a:lstStyle/>
@@ -17550,7 +17607,7 @@
         </p:nvSpPr>
         <p:spPr>
           <a:xfrm>
-            <a:off x="2504175" y="5408676"/>
+            <a:off x="5751634" y="1925529"/>
             <a:ext cx="743285" cy="274320"/>
           </a:xfrm>
           <a:prstGeom prst="roundRect">
@@ -17581,7 +17638,7 @@
           </a:fontRef>
         </p:style>
         <p:txBody>
-          <a:bodyPr rtlCol="0" anchor="ctr" wrap="square" lIns="25400" rIns="25400" tIns="12700" bIns="12700">
+          <a:bodyPr wrap="square" lIns="25400" tIns="12700" rIns="25400" bIns="12700" rtlCol="0" anchor="ctr">
             <a:noAutofit/>
           </a:bodyPr>
           <a:lstStyle/>
@@ -17606,7 +17663,7 @@
         </p:nvSpPr>
         <p:spPr>
           <a:xfrm>
-            <a:off x="2504175" y="5724144"/>
+            <a:off x="3302324" y="3200400"/>
             <a:ext cx="743285" cy="274320"/>
           </a:xfrm>
           <a:prstGeom prst="roundRect">
@@ -17637,7 +17694,7 @@
           </a:fontRef>
         </p:style>
         <p:txBody>
-          <a:bodyPr rtlCol="0" anchor="ctr" wrap="square" lIns="25400" rIns="25400" tIns="12700" bIns="12700">
+          <a:bodyPr wrap="square" lIns="25400" tIns="12700" rIns="25400" bIns="12700" rtlCol="0" anchor="ctr">
             <a:noAutofit/>
           </a:bodyPr>
           <a:lstStyle/>
@@ -17662,7 +17719,7 @@
         </p:nvSpPr>
         <p:spPr>
           <a:xfrm>
-            <a:off x="2504175" y="6039612"/>
+            <a:off x="3302324" y="3515868"/>
             <a:ext cx="743285" cy="274320"/>
           </a:xfrm>
           <a:prstGeom prst="roundRect">
@@ -17693,7 +17750,7 @@
           </a:fontRef>
         </p:style>
         <p:txBody>
-          <a:bodyPr rtlCol="0" anchor="ctr" wrap="square" lIns="25400" rIns="25400" tIns="12700" bIns="12700">
+          <a:bodyPr wrap="square" lIns="25400" tIns="12700" rIns="25400" bIns="12700" rtlCol="0" anchor="ctr">
             <a:noAutofit/>
           </a:bodyPr>
           <a:lstStyle/>
@@ -17718,7 +17775,7 @@
         </p:nvSpPr>
         <p:spPr>
           <a:xfrm>
-            <a:off x="2504175" y="6355080"/>
+            <a:off x="5751635" y="992124"/>
             <a:ext cx="743285" cy="274320"/>
           </a:xfrm>
           <a:prstGeom prst="roundRect">
@@ -17749,7 +17806,7 @@
           </a:fontRef>
         </p:style>
         <p:txBody>
-          <a:bodyPr rtlCol="0" anchor="ctr" wrap="square" lIns="25400" rIns="25400" tIns="12700" bIns="12700">
+          <a:bodyPr wrap="square" lIns="25400" tIns="12700" rIns="25400" bIns="12700" rtlCol="0" anchor="ctr">
             <a:noAutofit/>
           </a:bodyPr>
           <a:lstStyle/>
@@ -17805,7 +17862,7 @@
           </a:fontRef>
         </p:style>
         <p:txBody>
-          <a:bodyPr rtlCol="0" anchor="ctr" wrap="square" lIns="25400" rIns="25400" tIns="12700" bIns="12700">
+          <a:bodyPr wrap="square" lIns="25400" tIns="12700" rIns="25400" bIns="12700" rtlCol="0" anchor="ctr">
             <a:noAutofit/>
           </a:bodyPr>
           <a:lstStyle/>
@@ -17824,20 +17881,20 @@
       </p:sp>
       <p:sp>
         <p:nvSpPr>
-          <p:cNvPr id="37" name="Rounded Rectangle 36"/>
-          <p:cNvSpPr/>
-          <p:nvPr/>
-        </p:nvSpPr>
-        <p:spPr>
-          <a:xfrm>
-            <a:off x="3302324" y="1307592"/>
-            <a:ext cx="743285" cy="274320"/>
-          </a:xfrm>
-          <a:prstGeom prst="roundRect">
-            <a:avLst/>
-          </a:prstGeom>
-          <a:solidFill>
-            <a:srgbClr val="7FCFC3"/>
+          <p:cNvPr id="38" name="Rounded Rectangle 37"/>
+          <p:cNvSpPr/>
+          <p:nvPr/>
+        </p:nvSpPr>
+        <p:spPr>
+          <a:xfrm>
+            <a:off x="3302324" y="1623060"/>
+            <a:ext cx="743285" cy="274320"/>
+          </a:xfrm>
+          <a:prstGeom prst="roundRect">
+            <a:avLst/>
+          </a:prstGeom>
+          <a:solidFill>
+            <a:srgbClr val="C7A3D6"/>
           </a:solidFill>
           <a:ln w="9525">
             <a:solidFill>
@@ -17861,63 +17918,7 @@
           </a:fontRef>
         </p:style>
         <p:txBody>
-          <a:bodyPr rtlCol="0" anchor="ctr" wrap="square" lIns="25400" rIns="25400" tIns="12700" bIns="12700">
-            <a:noAutofit/>
-          </a:bodyPr>
-          <a:lstStyle/>
-          <a:p>
-            <a:pPr algn="ctr"/>
-            <a:r>
-              <a:rPr sz="800" b="0">
-                <a:solidFill>
-                  <a:srgbClr val="2B2418"/>
-                </a:solidFill>
-              </a:rPr>
-              <a:t>tree sowing</a:t>
-            </a:r>
-          </a:p>
-        </p:txBody>
-      </p:sp>
-      <p:sp>
-        <p:nvSpPr>
-          <p:cNvPr id="38" name="Rounded Rectangle 37"/>
-          <p:cNvSpPr/>
-          <p:nvPr/>
-        </p:nvSpPr>
-        <p:spPr>
-          <a:xfrm>
-            <a:off x="3302324" y="1623060"/>
-            <a:ext cx="743285" cy="274320"/>
-          </a:xfrm>
-          <a:prstGeom prst="roundRect">
-            <a:avLst/>
-          </a:prstGeom>
-          <a:solidFill>
-            <a:srgbClr val="C7A3D6"/>
-          </a:solidFill>
-          <a:ln w="9525">
-            <a:solidFill>
-              <a:srgbClr val="B98A4E"/>
-            </a:solidFill>
-          </a:ln>
-          <a:effectLst/>
-        </p:spPr>
-        <p:style>
-          <a:lnRef idx="1">
-            <a:schemeClr val="accent1"/>
-          </a:lnRef>
-          <a:fillRef idx="3">
-            <a:schemeClr val="accent1"/>
-          </a:fillRef>
-          <a:effectRef idx="2">
-            <a:schemeClr val="accent1"/>
-          </a:effectRef>
-          <a:fontRef idx="minor">
-            <a:schemeClr val="lt1"/>
-          </a:fontRef>
-        </p:style>
-        <p:txBody>
-          <a:bodyPr rtlCol="0" anchor="ctr" wrap="square" lIns="25400" rIns="25400" tIns="12700" bIns="12700">
+          <a:bodyPr wrap="square" lIns="25400" tIns="12700" rIns="25400" bIns="12700" rtlCol="0" anchor="ctr">
             <a:noAutofit/>
           </a:bodyPr>
           <a:lstStyle/>
@@ -17973,7 +17974,7 @@
           </a:fontRef>
         </p:style>
         <p:txBody>
-          <a:bodyPr rtlCol="0" anchor="ctr" wrap="square" lIns="25400" rIns="25400" tIns="12700" bIns="12700">
+          <a:bodyPr wrap="square" lIns="25400" tIns="12700" rIns="25400" bIns="12700" rtlCol="0" anchor="ctr">
             <a:noAutofit/>
           </a:bodyPr>
           <a:lstStyle/>
@@ -18030,7 +18031,7 @@
           </a:fontRef>
         </p:style>
         <p:txBody>
-          <a:bodyPr rtlCol="0" anchor="ctr" wrap="square" lIns="25400" rIns="25400" tIns="12700" bIns="12700">
+          <a:bodyPr wrap="square" lIns="25400" tIns="12700" rIns="25400" bIns="12700" rtlCol="0" anchor="ctr">
             <a:noAutofit/>
           </a:bodyPr>
           <a:lstStyle/>
@@ -18087,7 +18088,7 @@
           </a:fontRef>
         </p:style>
         <p:txBody>
-          <a:bodyPr rtlCol="0" anchor="ctr" wrap="square" lIns="25400" rIns="25400" tIns="12700" bIns="12700">
+          <a:bodyPr wrap="square" lIns="25400" tIns="12700" rIns="25400" bIns="12700" rtlCol="0" anchor="ctr">
             <a:noAutofit/>
           </a:bodyPr>
           <a:lstStyle/>
@@ -18144,7 +18145,7 @@
           </a:fontRef>
         </p:style>
         <p:txBody>
-          <a:bodyPr rtlCol="0" anchor="ctr" wrap="square" lIns="25400" rIns="25400" tIns="12700" bIns="12700">
+          <a:bodyPr wrap="square" lIns="25400" tIns="12700" rIns="25400" bIns="12700" rtlCol="0" anchor="ctr">
             <a:noAutofit/>
           </a:bodyPr>
           <a:lstStyle/>
@@ -18201,7 +18202,7 @@
           </a:fontRef>
         </p:style>
         <p:txBody>
-          <a:bodyPr rtlCol="0" anchor="ctr" wrap="square" lIns="25400" rIns="25400" tIns="12700" bIns="12700">
+          <a:bodyPr wrap="square" lIns="25400" tIns="12700" rIns="25400" bIns="12700" rtlCol="0" anchor="ctr">
             <a:noAutofit/>
           </a:bodyPr>
           <a:lstStyle/>
@@ -18226,7 +18227,7 @@
         </p:nvSpPr>
         <p:spPr>
           <a:xfrm>
-            <a:off x="4898622" y="2253996"/>
+            <a:off x="8283267" y="978374"/>
             <a:ext cx="743285" cy="274320"/>
           </a:xfrm>
           <a:prstGeom prst="roundRect">
@@ -18258,7 +18259,7 @@
           </a:fontRef>
         </p:style>
         <p:txBody>
-          <a:bodyPr rtlCol="0" anchor="ctr" wrap="square" lIns="25400" rIns="25400" tIns="12700" bIns="12700">
+          <a:bodyPr wrap="square" lIns="25400" tIns="12700" rIns="25400" bIns="12700" rtlCol="0" anchor="ctr">
             <a:noAutofit/>
           </a:bodyPr>
           <a:lstStyle/>
@@ -18283,7 +18284,7 @@
         </p:nvSpPr>
         <p:spPr>
           <a:xfrm>
-            <a:off x="4898622" y="2569464"/>
+            <a:off x="7293069" y="2353898"/>
             <a:ext cx="743285" cy="274320"/>
           </a:xfrm>
           <a:prstGeom prst="roundRect">
@@ -18315,7 +18316,7 @@
           </a:fontRef>
         </p:style>
         <p:txBody>
-          <a:bodyPr rtlCol="0" anchor="ctr" wrap="square" lIns="25400" rIns="25400" tIns="12700" bIns="12700">
+          <a:bodyPr wrap="square" lIns="25400" tIns="12700" rIns="25400" bIns="12700" rtlCol="0" anchor="ctr">
             <a:noAutofit/>
           </a:bodyPr>
           <a:lstStyle/>
@@ -18372,7 +18373,7 @@
           </a:fontRef>
         </p:style>
         <p:txBody>
-          <a:bodyPr rtlCol="0" anchor="ctr" wrap="square" lIns="25400" rIns="25400" tIns="12700" bIns="12700">
+          <a:bodyPr wrap="square" lIns="25400" tIns="12700" rIns="25400" bIns="12700" rtlCol="0" anchor="ctr">
             <a:noAutofit/>
           </a:bodyPr>
           <a:lstStyle/>
@@ -18429,7 +18430,7 @@
           </a:fontRef>
         </p:style>
         <p:txBody>
-          <a:bodyPr rtlCol="0" anchor="ctr" wrap="square" lIns="25400" rIns="25400" tIns="12700" bIns="12700">
+          <a:bodyPr wrap="square" lIns="25400" tIns="12700" rIns="25400" bIns="12700" rtlCol="0" anchor="ctr">
             <a:noAutofit/>
           </a:bodyPr>
           <a:lstStyle/>
@@ -18486,7 +18487,7 @@
           </a:fontRef>
         </p:style>
         <p:txBody>
-          <a:bodyPr rtlCol="0" anchor="ctr" wrap="square" lIns="25400" rIns="25400" tIns="12700" bIns="12700">
+          <a:bodyPr wrap="square" lIns="25400" tIns="12700" rIns="25400" bIns="12700" rtlCol="0" anchor="ctr">
             <a:noAutofit/>
           </a:bodyPr>
           <a:lstStyle/>
@@ -18543,7 +18544,7 @@
           </a:fontRef>
         </p:style>
         <p:txBody>
-          <a:bodyPr rtlCol="0" anchor="ctr" wrap="square" lIns="25400" rIns="25400" tIns="12700" bIns="12700">
+          <a:bodyPr wrap="square" lIns="25400" tIns="12700" rIns="25400" bIns="12700" rtlCol="0" anchor="ctr">
             <a:noAutofit/>
           </a:bodyPr>
           <a:lstStyle/>
@@ -18568,7 +18569,7 @@
         </p:nvSpPr>
         <p:spPr>
           <a:xfrm>
-            <a:off x="4898622" y="4146804"/>
+            <a:off x="7293069" y="1623060"/>
             <a:ext cx="743285" cy="274320"/>
           </a:xfrm>
           <a:prstGeom prst="roundRect">
@@ -18600,7 +18601,7 @@
           </a:fontRef>
         </p:style>
         <p:txBody>
-          <a:bodyPr rtlCol="0" anchor="ctr" wrap="square" lIns="25400" rIns="25400" tIns="12700" bIns="12700">
+          <a:bodyPr wrap="square" lIns="25400" tIns="12700" rIns="25400" bIns="12700" rtlCol="0" anchor="ctr">
             <a:noAutofit/>
           </a:bodyPr>
           <a:lstStyle/>
@@ -18625,7 +18626,7 @@
         </p:nvSpPr>
         <p:spPr>
           <a:xfrm>
-            <a:off x="4898622" y="4462272"/>
+            <a:off x="7293069" y="1991106"/>
             <a:ext cx="743285" cy="274320"/>
           </a:xfrm>
           <a:prstGeom prst="roundRect">
@@ -18656,7 +18657,7 @@
           </a:fontRef>
         </p:style>
         <p:txBody>
-          <a:bodyPr rtlCol="0" anchor="ctr" wrap="square" lIns="25400" rIns="25400" tIns="12700" bIns="12700">
+          <a:bodyPr wrap="square" lIns="25400" tIns="12700" rIns="25400" bIns="12700" rtlCol="0" anchor="ctr">
             <a:noAutofit/>
           </a:bodyPr>
           <a:lstStyle/>
@@ -18712,7 +18713,7 @@
           </a:fontRef>
         </p:style>
         <p:txBody>
-          <a:bodyPr rtlCol="0" anchor="ctr" wrap="square" lIns="25400" rIns="25400" tIns="12700" bIns="12700">
+          <a:bodyPr wrap="square" lIns="25400" tIns="12700" rIns="25400" bIns="12700" rtlCol="0" anchor="ctr">
             <a:noAutofit/>
           </a:bodyPr>
           <a:lstStyle/>
@@ -18769,7 +18770,7 @@
           </a:fontRef>
         </p:style>
         <p:txBody>
-          <a:bodyPr rtlCol="0" anchor="ctr" wrap="square" lIns="25400" rIns="25400" tIns="12700" bIns="12700">
+          <a:bodyPr wrap="square" lIns="25400" tIns="12700" rIns="25400" bIns="12700" rtlCol="0" anchor="ctr">
             <a:noAutofit/>
           </a:bodyPr>
           <a:lstStyle/>
@@ -18794,7 +18795,7 @@
         </p:nvSpPr>
         <p:spPr>
           <a:xfrm>
-            <a:off x="7293069" y="1307592"/>
+            <a:off x="5751635" y="2240997"/>
             <a:ext cx="743285" cy="274320"/>
           </a:xfrm>
           <a:prstGeom prst="roundRect">
@@ -18826,7 +18827,7 @@
           </a:fontRef>
         </p:style>
         <p:txBody>
-          <a:bodyPr rtlCol="0" anchor="ctr" wrap="square" lIns="25400" rIns="25400" tIns="12700" bIns="12700">
+          <a:bodyPr wrap="square" lIns="25400" tIns="12700" rIns="25400" bIns="12700" rtlCol="0" anchor="ctr">
             <a:noAutofit/>
           </a:bodyPr>
           <a:lstStyle/>
@@ -18882,7 +18883,7 @@
           </a:fontRef>
         </p:style>
         <p:txBody>
-          <a:bodyPr rtlCol="0" anchor="ctr" wrap="square" lIns="25400" rIns="25400" tIns="12700" bIns="12700">
+          <a:bodyPr wrap="square" lIns="25400" tIns="12700" rIns="25400" bIns="12700" rtlCol="0" anchor="ctr">
             <a:noAutofit/>
           </a:bodyPr>
           <a:lstStyle/>
@@ -18908,7 +18909,7 @@
 </file>
 
 <file path=ppt/slides/slide4.xml><?xml version="1.0" encoding="utf-8"?>
-<p:sld xmlns:a="http://schemas.openxmlformats.org/drawingml/2006/main" xmlns:p="http://schemas.openxmlformats.org/presentationml/2006/main" xmlns:r="http://schemas.openxmlformats.org/officeDocument/2006/relationships">
+<p:sld xmlns:a="http://schemas.openxmlformats.org/drawingml/2006/main" xmlns:r="http://schemas.openxmlformats.org/officeDocument/2006/relationships" xmlns:p="http://schemas.openxmlformats.org/presentationml/2006/main">
   <p:cSld>
     <p:spTree>
       <p:nvGrpSpPr>
@@ -18916,7 +18917,14 @@
         <p:cNvGrpSpPr/>
         <p:nvPr/>
       </p:nvGrpSpPr>
-      <p:grpSpPr/>
+      <p:grpSpPr>
+        <a:xfrm>
+          <a:off x="0" y="0"/>
+          <a:ext cx="0" cy="0"/>
+          <a:chOff x="0" y="0"/>
+          <a:chExt cx="0" cy="0"/>
+        </a:xfrm>
+      </p:grpSpPr>
       <p:sp>
         <p:nvSpPr>
           <p:cNvPr id="2" name="Rectangle 1"/>
@@ -18956,20 +18964,13 @@
           </a:fontRef>
         </p:style>
         <p:txBody>
-          <a:bodyPr rtlCol="0" anchor="ctr" wrap="square" lIns="25400" rIns="25400" tIns="12700" bIns="12700">
-            <a:noAutofit/>
-          </a:bodyPr>
-          <a:lstStyle/>
-          <a:p>
-            <a:pPr algn="ctr"/>
-            <a:r>
-              <a:rPr sz="1000" b="0">
-                <a:solidFill>
-                  <a:srgbClr val="2B2418"/>
-                </a:solidFill>
-              </a:rPr>
-              <a:t/>
-            </a:r>
+          <a:bodyPr wrap="square" lIns="25400" tIns="12700" rIns="25400" bIns="12700" rtlCol="0" anchor="ctr">
+            <a:noAutofit/>
+          </a:bodyPr>
+          <a:lstStyle/>
+          <a:p>
+            <a:pPr algn="ctr"/>
+            <a:endParaRPr/>
           </a:p>
         </p:txBody>
       </p:sp>
@@ -19053,7 +19054,7 @@
           </a:fontRef>
         </p:style>
         <p:txBody>
-          <a:bodyPr rtlCol="0" anchor="ctr" wrap="square" lIns="25400" rIns="25400" tIns="12700" bIns="12700">
+          <a:bodyPr wrap="square" lIns="25400" tIns="12700" rIns="25400" bIns="12700" rtlCol="0" anchor="ctr">
             <a:noAutofit/>
           </a:bodyPr>
           <a:lstStyle/>
@@ -19109,7 +19110,7 @@
           </a:fontRef>
         </p:style>
         <p:txBody>
-          <a:bodyPr rtlCol="0" anchor="ctr" wrap="square" lIns="25400" rIns="25400" tIns="12700" bIns="12700">
+          <a:bodyPr wrap="square" lIns="25400" tIns="12700" rIns="25400" bIns="12700" rtlCol="0" anchor="ctr">
             <a:noAutofit/>
           </a:bodyPr>
           <a:lstStyle/>
@@ -19165,7 +19166,7 @@
           </a:fontRef>
         </p:style>
         <p:txBody>
-          <a:bodyPr rtlCol="0" anchor="ctr" wrap="square" lIns="25400" rIns="25400" tIns="12700" bIns="12700">
+          <a:bodyPr wrap="square" lIns="25400" tIns="12700" rIns="25400" bIns="12700" rtlCol="0" anchor="ctr">
             <a:noAutofit/>
           </a:bodyPr>
           <a:lstStyle/>
@@ -19221,7 +19222,7 @@
           </a:fontRef>
         </p:style>
         <p:txBody>
-          <a:bodyPr rtlCol="0" anchor="ctr" wrap="square" lIns="25400" rIns="25400" tIns="12700" bIns="12700">
+          <a:bodyPr wrap="square" lIns="25400" tIns="12700" rIns="25400" bIns="12700" rtlCol="0" anchor="ctr">
             <a:noAutofit/>
           </a:bodyPr>
           <a:lstStyle/>
@@ -19277,7 +19278,7 @@
           </a:fontRef>
         </p:style>
         <p:txBody>
-          <a:bodyPr rtlCol="0" anchor="ctr" wrap="square" lIns="25400" rIns="25400" tIns="12700" bIns="12700">
+          <a:bodyPr wrap="square" lIns="25400" tIns="12700" rIns="25400" bIns="12700" rtlCol="0" anchor="ctr">
             <a:noAutofit/>
           </a:bodyPr>
           <a:lstStyle/>
@@ -19333,7 +19334,7 @@
           </a:fontRef>
         </p:style>
         <p:txBody>
-          <a:bodyPr rtlCol="0" anchor="ctr" wrap="square" lIns="25400" rIns="25400" tIns="12700" bIns="12700">
+          <a:bodyPr wrap="square" lIns="25400" tIns="12700" rIns="25400" bIns="12700" rtlCol="0" anchor="ctr">
             <a:noAutofit/>
           </a:bodyPr>
           <a:lstStyle/>
@@ -19389,7 +19390,7 @@
           </a:fontRef>
         </p:style>
         <p:txBody>
-          <a:bodyPr rtlCol="0" anchor="ctr" wrap="square" lIns="25400" rIns="25400" tIns="12700" bIns="12700">
+          <a:bodyPr wrap="square" lIns="25400" tIns="12700" rIns="25400" bIns="12700" rtlCol="0" anchor="ctr">
             <a:noAutofit/>
           </a:bodyPr>
           <a:lstStyle/>
@@ -19445,7 +19446,7 @@
           </a:fontRef>
         </p:style>
         <p:txBody>
-          <a:bodyPr rtlCol="0" anchor="ctr" wrap="square" lIns="25400" rIns="25400" tIns="12700" bIns="12700">
+          <a:bodyPr wrap="square" lIns="25400" tIns="12700" rIns="25400" bIns="12700" rtlCol="0" anchor="ctr">
             <a:noAutofit/>
           </a:bodyPr>
           <a:lstStyle/>
@@ -19501,7 +19502,7 @@
           </a:fontRef>
         </p:style>
         <p:txBody>
-          <a:bodyPr rtlCol="0" anchor="ctr" wrap="square" lIns="25400" rIns="25400" tIns="12700" bIns="12700">
+          <a:bodyPr wrap="square" lIns="25400" tIns="12700" rIns="25400" bIns="12700" rtlCol="0" anchor="ctr">
             <a:noAutofit/>
           </a:bodyPr>
           <a:lstStyle/>
@@ -19557,7 +19558,7 @@
           </a:fontRef>
         </p:style>
         <p:txBody>
-          <a:bodyPr rtlCol="0" anchor="ctr" wrap="square" lIns="25400" rIns="25400" tIns="12700" bIns="12700">
+          <a:bodyPr wrap="square" lIns="25400" tIns="12700" rIns="25400" bIns="12700" rtlCol="0" anchor="ctr">
             <a:noAutofit/>
           </a:bodyPr>
           <a:lstStyle/>
@@ -19613,7 +19614,7 @@
           </a:fontRef>
         </p:style>
         <p:txBody>
-          <a:bodyPr rtlCol="0" anchor="ctr" wrap="square" lIns="25400" rIns="25400" tIns="12700" bIns="12700">
+          <a:bodyPr wrap="square" lIns="25400" tIns="12700" rIns="25400" bIns="12700" rtlCol="0" anchor="ctr">
             <a:noAutofit/>
           </a:bodyPr>
           <a:lstStyle/>
@@ -19669,7 +19670,7 @@
           </a:fontRef>
         </p:style>
         <p:txBody>
-          <a:bodyPr rtlCol="0" anchor="ctr" wrap="square" lIns="25400" rIns="25400" tIns="12700" bIns="12700">
+          <a:bodyPr wrap="square" lIns="25400" tIns="12700" rIns="25400" bIns="12700" rtlCol="0" anchor="ctr">
             <a:noAutofit/>
           </a:bodyPr>
           <a:lstStyle/>
@@ -19725,7 +19726,7 @@
           </a:fontRef>
         </p:style>
         <p:txBody>
-          <a:bodyPr rtlCol="0" anchor="ctr" wrap="square" lIns="25400" rIns="25400" tIns="12700" bIns="12700">
+          <a:bodyPr wrap="square" lIns="25400" tIns="12700" rIns="25400" bIns="12700" rtlCol="0" anchor="ctr">
             <a:noAutofit/>
           </a:bodyPr>
           <a:lstStyle/>
@@ -19781,7 +19782,7 @@
           </a:fontRef>
         </p:style>
         <p:txBody>
-          <a:bodyPr rtlCol="0" anchor="ctr" wrap="square" lIns="25400" rIns="25400" tIns="12700" bIns="12700">
+          <a:bodyPr wrap="square" lIns="25400" tIns="12700" rIns="25400" bIns="12700" rtlCol="0" anchor="ctr">
             <a:noAutofit/>
           </a:bodyPr>
           <a:lstStyle/>
@@ -19837,7 +19838,7 @@
           </a:fontRef>
         </p:style>
         <p:txBody>
-          <a:bodyPr rtlCol="0" anchor="ctr" wrap="square" lIns="25400" rIns="25400" tIns="12700" bIns="12700">
+          <a:bodyPr wrap="square" lIns="25400" tIns="12700" rIns="25400" bIns="12700" rtlCol="0" anchor="ctr">
             <a:noAutofit/>
           </a:bodyPr>
           <a:lstStyle/>
@@ -19893,7 +19894,7 @@
           </a:fontRef>
         </p:style>
         <p:txBody>
-          <a:bodyPr rtlCol="0" anchor="ctr" wrap="square" lIns="25400" rIns="25400" tIns="12700" bIns="12700">
+          <a:bodyPr wrap="square" lIns="25400" tIns="12700" rIns="25400" bIns="12700" rtlCol="0" anchor="ctr">
             <a:noAutofit/>
           </a:bodyPr>
           <a:lstStyle/>
@@ -19949,7 +19950,7 @@
           </a:fontRef>
         </p:style>
         <p:txBody>
-          <a:bodyPr rtlCol="0" anchor="ctr" wrap="square" lIns="25400" rIns="25400" tIns="12700" bIns="12700">
+          <a:bodyPr wrap="square" lIns="25400" tIns="12700" rIns="25400" bIns="12700" rtlCol="0" anchor="ctr">
             <a:noAutofit/>
           </a:bodyPr>
           <a:lstStyle/>
@@ -20005,7 +20006,7 @@
           </a:fontRef>
         </p:style>
         <p:txBody>
-          <a:bodyPr rtlCol="0" anchor="ctr" wrap="square" lIns="25400" rIns="25400" tIns="12700" bIns="12700">
+          <a:bodyPr wrap="square" lIns="25400" tIns="12700" rIns="25400" bIns="12700" rtlCol="0" anchor="ctr">
             <a:noAutofit/>
           </a:bodyPr>
           <a:lstStyle/>
@@ -20061,7 +20062,7 @@
           </a:fontRef>
         </p:style>
         <p:txBody>
-          <a:bodyPr rtlCol="0" anchor="ctr" wrap="square" lIns="25400" rIns="25400" tIns="12700" bIns="12700">
+          <a:bodyPr wrap="square" lIns="25400" tIns="12700" rIns="25400" bIns="12700" rtlCol="0" anchor="ctr">
             <a:noAutofit/>
           </a:bodyPr>
           <a:lstStyle/>
@@ -20117,7 +20118,7 @@
           </a:fontRef>
         </p:style>
         <p:txBody>
-          <a:bodyPr rtlCol="0" anchor="ctr" wrap="square" lIns="25400" rIns="25400" tIns="12700" bIns="12700">
+          <a:bodyPr wrap="square" lIns="25400" tIns="12700" rIns="25400" bIns="12700" rtlCol="0" anchor="ctr">
             <a:noAutofit/>
           </a:bodyPr>
           <a:lstStyle/>
@@ -20173,7 +20174,7 @@
           </a:fontRef>
         </p:style>
         <p:txBody>
-          <a:bodyPr rtlCol="0" anchor="ctr" wrap="square" lIns="25400" rIns="25400" tIns="12700" bIns="12700">
+          <a:bodyPr wrap="square" lIns="25400" tIns="12700" rIns="25400" bIns="12700" rtlCol="0" anchor="ctr">
             <a:noAutofit/>
           </a:bodyPr>
           <a:lstStyle/>
@@ -20229,7 +20230,7 @@
           </a:fontRef>
         </p:style>
         <p:txBody>
-          <a:bodyPr rtlCol="0" anchor="ctr" wrap="square" lIns="25400" rIns="25400" tIns="12700" bIns="12700">
+          <a:bodyPr wrap="square" lIns="25400" tIns="12700" rIns="25400" bIns="12700" rtlCol="0" anchor="ctr">
             <a:noAutofit/>
           </a:bodyPr>
           <a:lstStyle/>
@@ -20285,7 +20286,7 @@
           </a:fontRef>
         </p:style>
         <p:txBody>
-          <a:bodyPr rtlCol="0" anchor="ctr" wrap="square" lIns="25400" rIns="25400" tIns="12700" bIns="12700">
+          <a:bodyPr wrap="square" lIns="25400" tIns="12700" rIns="25400" bIns="12700" rtlCol="0" anchor="ctr">
             <a:noAutofit/>
           </a:bodyPr>
           <a:lstStyle/>
@@ -20341,7 +20342,7 @@
           </a:fontRef>
         </p:style>
         <p:txBody>
-          <a:bodyPr rtlCol="0" anchor="ctr" wrap="square" lIns="25400" rIns="25400" tIns="12700" bIns="12700">
+          <a:bodyPr wrap="square" lIns="25400" tIns="12700" rIns="25400" bIns="12700" rtlCol="0" anchor="ctr">
             <a:noAutofit/>
           </a:bodyPr>
           <a:lstStyle/>
@@ -20397,7 +20398,7 @@
           </a:fontRef>
         </p:style>
         <p:txBody>
-          <a:bodyPr rtlCol="0" anchor="ctr" wrap="square" lIns="25400" rIns="25400" tIns="12700" bIns="12700">
+          <a:bodyPr wrap="square" lIns="25400" tIns="12700" rIns="25400" bIns="12700" rtlCol="0" anchor="ctr">
             <a:noAutofit/>
           </a:bodyPr>
           <a:lstStyle/>
@@ -20453,7 +20454,7 @@
           </a:fontRef>
         </p:style>
         <p:txBody>
-          <a:bodyPr rtlCol="0" anchor="ctr" wrap="square" lIns="25400" rIns="25400" tIns="12700" bIns="12700">
+          <a:bodyPr wrap="square" lIns="25400" tIns="12700" rIns="25400" bIns="12700" rtlCol="0" anchor="ctr">
             <a:noAutofit/>
           </a:bodyPr>
           <a:lstStyle/>
@@ -20509,7 +20510,7 @@
           </a:fontRef>
         </p:style>
         <p:txBody>
-          <a:bodyPr rtlCol="0" anchor="ctr" wrap="square" lIns="25400" rIns="25400" tIns="12700" bIns="12700">
+          <a:bodyPr wrap="square" lIns="25400" tIns="12700" rIns="25400" bIns="12700" rtlCol="0" anchor="ctr">
             <a:noAutofit/>
           </a:bodyPr>
           <a:lstStyle/>
@@ -20565,7 +20566,7 @@
           </a:fontRef>
         </p:style>
         <p:txBody>
-          <a:bodyPr rtlCol="0" anchor="ctr" wrap="square" lIns="25400" rIns="25400" tIns="12700" bIns="12700">
+          <a:bodyPr wrap="square" lIns="25400" tIns="12700" rIns="25400" bIns="12700" rtlCol="0" anchor="ctr">
             <a:noAutofit/>
           </a:bodyPr>
           <a:lstStyle/>
@@ -20621,7 +20622,7 @@
           </a:fontRef>
         </p:style>
         <p:txBody>
-          <a:bodyPr rtlCol="0" anchor="ctr" wrap="square" lIns="25400" rIns="25400" tIns="12700" bIns="12700">
+          <a:bodyPr wrap="square" lIns="25400" tIns="12700" rIns="25400" bIns="12700" rtlCol="0" anchor="ctr">
             <a:noAutofit/>
           </a:bodyPr>
           <a:lstStyle/>
@@ -20677,7 +20678,7 @@
           </a:fontRef>
         </p:style>
         <p:txBody>
-          <a:bodyPr rtlCol="0" anchor="ctr" wrap="square" lIns="25400" rIns="25400" tIns="12700" bIns="12700">
+          <a:bodyPr wrap="square" lIns="25400" tIns="12700" rIns="25400" bIns="12700" rtlCol="0" anchor="ctr">
             <a:noAutofit/>
           </a:bodyPr>
           <a:lstStyle/>
@@ -20733,7 +20734,7 @@
           </a:fontRef>
         </p:style>
         <p:txBody>
-          <a:bodyPr rtlCol="0" anchor="ctr" wrap="square" lIns="25400" rIns="25400" tIns="12700" bIns="12700">
+          <a:bodyPr wrap="square" lIns="25400" tIns="12700" rIns="25400" bIns="12700" rtlCol="0" anchor="ctr">
             <a:noAutofit/>
           </a:bodyPr>
           <a:lstStyle/>
@@ -20789,7 +20790,7 @@
           </a:fontRef>
         </p:style>
         <p:txBody>
-          <a:bodyPr rtlCol="0" anchor="ctr" wrap="square" lIns="25400" rIns="25400" tIns="12700" bIns="12700">
+          <a:bodyPr wrap="square" lIns="25400" tIns="12700" rIns="25400" bIns="12700" rtlCol="0" anchor="ctr">
             <a:noAutofit/>
           </a:bodyPr>
           <a:lstStyle/>
@@ -20845,7 +20846,7 @@
           </a:fontRef>
         </p:style>
         <p:txBody>
-          <a:bodyPr rtlCol="0" anchor="ctr" wrap="square" lIns="25400" rIns="25400" tIns="12700" bIns="12700">
+          <a:bodyPr wrap="square" lIns="25400" tIns="12700" rIns="25400" bIns="12700" rtlCol="0" anchor="ctr">
             <a:noAutofit/>
           </a:bodyPr>
           <a:lstStyle/>
@@ -20901,7 +20902,7 @@
           </a:fontRef>
         </p:style>
         <p:txBody>
-          <a:bodyPr rtlCol="0" anchor="ctr" wrap="square" lIns="25400" rIns="25400" tIns="12700" bIns="12700">
+          <a:bodyPr wrap="square" lIns="25400" tIns="12700" rIns="25400" bIns="12700" rtlCol="0" anchor="ctr">
             <a:noAutofit/>
           </a:bodyPr>
           <a:lstStyle/>
@@ -20957,7 +20958,7 @@
           </a:fontRef>
         </p:style>
         <p:txBody>
-          <a:bodyPr rtlCol="0" anchor="ctr" wrap="square" lIns="25400" rIns="25400" tIns="12700" bIns="12700">
+          <a:bodyPr wrap="square" lIns="25400" tIns="12700" rIns="25400" bIns="12700" rtlCol="0" anchor="ctr">
             <a:noAutofit/>
           </a:bodyPr>
           <a:lstStyle/>
@@ -21013,7 +21014,7 @@
           </a:fontRef>
         </p:style>
         <p:txBody>
-          <a:bodyPr rtlCol="0" anchor="ctr" wrap="square" lIns="25400" rIns="25400" tIns="12700" bIns="12700">
+          <a:bodyPr wrap="square" lIns="25400" tIns="12700" rIns="25400" bIns="12700" rtlCol="0" anchor="ctr">
             <a:noAutofit/>
           </a:bodyPr>
           <a:lstStyle/>
@@ -21069,7 +21070,7 @@
           </a:fontRef>
         </p:style>
         <p:txBody>
-          <a:bodyPr rtlCol="0" anchor="ctr" wrap="square" lIns="25400" rIns="25400" tIns="12700" bIns="12700">
+          <a:bodyPr wrap="square" lIns="25400" tIns="12700" rIns="25400" bIns="12700" rtlCol="0" anchor="ctr">
             <a:noAutofit/>
           </a:bodyPr>
           <a:lstStyle/>
@@ -21125,7 +21126,7 @@
           </a:fontRef>
         </p:style>
         <p:txBody>
-          <a:bodyPr rtlCol="0" anchor="ctr" wrap="square" lIns="25400" rIns="25400" tIns="12700" bIns="12700">
+          <a:bodyPr wrap="square" lIns="25400" tIns="12700" rIns="25400" bIns="12700" rtlCol="0" anchor="ctr">
             <a:noAutofit/>
           </a:bodyPr>
           <a:lstStyle/>
@@ -21181,7 +21182,7 @@
           </a:fontRef>
         </p:style>
         <p:txBody>
-          <a:bodyPr rtlCol="0" anchor="ctr" wrap="square" lIns="25400" rIns="25400" tIns="12700" bIns="12700">
+          <a:bodyPr wrap="square" lIns="25400" tIns="12700" rIns="25400" bIns="12700" rtlCol="0" anchor="ctr">
             <a:noAutofit/>
           </a:bodyPr>
           <a:lstStyle/>
@@ -21237,7 +21238,7 @@
           </a:fontRef>
         </p:style>
         <p:txBody>
-          <a:bodyPr rtlCol="0" anchor="ctr" wrap="square" lIns="25400" rIns="25400" tIns="12700" bIns="12700">
+          <a:bodyPr wrap="square" lIns="25400" tIns="12700" rIns="25400" bIns="12700" rtlCol="0" anchor="ctr">
             <a:noAutofit/>
           </a:bodyPr>
           <a:lstStyle/>
@@ -21293,7 +21294,7 @@
           </a:fontRef>
         </p:style>
         <p:txBody>
-          <a:bodyPr rtlCol="0" anchor="ctr" wrap="square" lIns="25400" rIns="25400" tIns="12700" bIns="12700">
+          <a:bodyPr wrap="square" lIns="25400" tIns="12700" rIns="25400" bIns="12700" rtlCol="0" anchor="ctr">
             <a:noAutofit/>
           </a:bodyPr>
           <a:lstStyle/>
@@ -21349,7 +21350,7 @@
           </a:fontRef>
         </p:style>
         <p:txBody>
-          <a:bodyPr rtlCol="0" anchor="ctr" wrap="square" lIns="25400" rIns="25400" tIns="12700" bIns="12700">
+          <a:bodyPr wrap="square" lIns="25400" tIns="12700" rIns="25400" bIns="12700" rtlCol="0" anchor="ctr">
             <a:noAutofit/>
           </a:bodyPr>
           <a:lstStyle/>
@@ -21405,7 +21406,7 @@
           </a:fontRef>
         </p:style>
         <p:txBody>
-          <a:bodyPr rtlCol="0" anchor="ctr" wrap="square" lIns="25400" rIns="25400" tIns="12700" bIns="12700">
+          <a:bodyPr wrap="square" lIns="25400" tIns="12700" rIns="25400" bIns="12700" rtlCol="0" anchor="ctr">
             <a:noAutofit/>
           </a:bodyPr>
           <a:lstStyle/>
@@ -21461,7 +21462,7 @@
           </a:fontRef>
         </p:style>
         <p:txBody>
-          <a:bodyPr rtlCol="0" anchor="ctr" wrap="square" lIns="25400" rIns="25400" tIns="12700" bIns="12700">
+          <a:bodyPr wrap="square" lIns="25400" tIns="12700" rIns="25400" bIns="12700" rtlCol="0" anchor="ctr">
             <a:noAutofit/>
           </a:bodyPr>
           <a:lstStyle/>
@@ -21517,7 +21518,7 @@
           </a:fontRef>
         </p:style>
         <p:txBody>
-          <a:bodyPr rtlCol="0" anchor="ctr" wrap="square" lIns="25400" rIns="25400" tIns="12700" bIns="12700">
+          <a:bodyPr wrap="square" lIns="25400" tIns="12700" rIns="25400" bIns="12700" rtlCol="0" anchor="ctr">
             <a:noAutofit/>
           </a:bodyPr>
           <a:lstStyle/>
@@ -21573,7 +21574,7 @@
           </a:fontRef>
         </p:style>
         <p:txBody>
-          <a:bodyPr rtlCol="0" anchor="ctr" wrap="square" lIns="25400" rIns="25400" tIns="12700" bIns="12700">
+          <a:bodyPr wrap="square" lIns="25400" tIns="12700" rIns="25400" bIns="12700" rtlCol="0" anchor="ctr">
             <a:noAutofit/>
           </a:bodyPr>
           <a:lstStyle/>
@@ -21629,7 +21630,7 @@
           </a:fontRef>
         </p:style>
         <p:txBody>
-          <a:bodyPr rtlCol="0" anchor="ctr" wrap="square" lIns="25400" rIns="25400" tIns="12700" bIns="12700">
+          <a:bodyPr wrap="square" lIns="25400" tIns="12700" rIns="25400" bIns="12700" rtlCol="0" anchor="ctr">
             <a:noAutofit/>
           </a:bodyPr>
           <a:lstStyle/>
@@ -21685,7 +21686,7 @@
           </a:fontRef>
         </p:style>
         <p:txBody>
-          <a:bodyPr rtlCol="0" anchor="ctr" wrap="square" lIns="25400" rIns="25400" tIns="12700" bIns="12700">
+          <a:bodyPr wrap="square" lIns="25400" tIns="12700" rIns="25400" bIns="12700" rtlCol="0" anchor="ctr">
             <a:noAutofit/>
           </a:bodyPr>
           <a:lstStyle/>
@@ -21741,7 +21742,7 @@
           </a:fontRef>
         </p:style>
         <p:txBody>
-          <a:bodyPr rtlCol="0" anchor="ctr" wrap="square" lIns="25400" rIns="25400" tIns="12700" bIns="12700">
+          <a:bodyPr wrap="square" lIns="25400" tIns="12700" rIns="25400" bIns="12700" rtlCol="0" anchor="ctr">
             <a:noAutofit/>
           </a:bodyPr>
           <a:lstStyle/>
@@ -21797,7 +21798,7 @@
           </a:fontRef>
         </p:style>
         <p:txBody>
-          <a:bodyPr rtlCol="0" anchor="ctr" wrap="square" lIns="25400" rIns="25400" tIns="12700" bIns="12700">
+          <a:bodyPr wrap="square" lIns="25400" tIns="12700" rIns="25400" bIns="12700" rtlCol="0" anchor="ctr">
             <a:noAutofit/>
           </a:bodyPr>
           <a:lstStyle/>
@@ -21853,7 +21854,7 @@
           </a:fontRef>
         </p:style>
         <p:txBody>
-          <a:bodyPr rtlCol="0" anchor="ctr" wrap="square" lIns="25400" rIns="25400" tIns="12700" bIns="12700">
+          <a:bodyPr wrap="square" lIns="25400" tIns="12700" rIns="25400" bIns="12700" rtlCol="0" anchor="ctr">
             <a:noAutofit/>
           </a:bodyPr>
           <a:lstStyle/>
@@ -21909,7 +21910,7 @@
           </a:fontRef>
         </p:style>
         <p:txBody>
-          <a:bodyPr rtlCol="0" anchor="ctr" wrap="square" lIns="25400" rIns="25400" tIns="12700" bIns="12700">
+          <a:bodyPr wrap="square" lIns="25400" tIns="12700" rIns="25400" bIns="12700" rtlCol="0" anchor="ctr">
             <a:noAutofit/>
           </a:bodyPr>
           <a:lstStyle/>
@@ -21965,7 +21966,7 @@
           </a:fontRef>
         </p:style>
         <p:txBody>
-          <a:bodyPr rtlCol="0" anchor="ctr" wrap="square" lIns="25400" rIns="25400" tIns="12700" bIns="12700">
+          <a:bodyPr wrap="square" lIns="25400" tIns="12700" rIns="25400" bIns="12700" rtlCol="0" anchor="ctr">
             <a:noAutofit/>
           </a:bodyPr>
           <a:lstStyle/>
@@ -22021,7 +22022,7 @@
           </a:fontRef>
         </p:style>
         <p:txBody>
-          <a:bodyPr rtlCol="0" anchor="ctr" wrap="square" lIns="25400" rIns="25400" tIns="12700" bIns="12700">
+          <a:bodyPr wrap="square" lIns="25400" tIns="12700" rIns="25400" bIns="12700" rtlCol="0" anchor="ctr">
             <a:noAutofit/>
           </a:bodyPr>
           <a:lstStyle/>
@@ -22077,7 +22078,7 @@
           </a:fontRef>
         </p:style>
         <p:txBody>
-          <a:bodyPr rtlCol="0" anchor="ctr" wrap="square" lIns="25400" rIns="25400" tIns="12700" bIns="12700">
+          <a:bodyPr wrap="square" lIns="25400" tIns="12700" rIns="25400" bIns="12700" rtlCol="0" anchor="ctr">
             <a:noAutofit/>
           </a:bodyPr>
           <a:lstStyle/>
@@ -22133,7 +22134,7 @@
           </a:fontRef>
         </p:style>
         <p:txBody>
-          <a:bodyPr rtlCol="0" anchor="ctr" wrap="square" lIns="25400" rIns="25400" tIns="12700" bIns="12700">
+          <a:bodyPr wrap="square" lIns="25400" tIns="12700" rIns="25400" bIns="12700" rtlCol="0" anchor="ctr">
             <a:noAutofit/>
           </a:bodyPr>
           <a:lstStyle/>
@@ -22189,7 +22190,7 @@
           </a:fontRef>
         </p:style>
         <p:txBody>
-          <a:bodyPr rtlCol="0" anchor="ctr" wrap="square" lIns="25400" rIns="25400" tIns="12700" bIns="12700">
+          <a:bodyPr wrap="square" lIns="25400" tIns="12700" rIns="25400" bIns="12700" rtlCol="0" anchor="ctr">
             <a:noAutofit/>
           </a:bodyPr>
           <a:lstStyle/>
@@ -22215,7 +22216,7 @@
 </file>
 
 <file path=ppt/slides/slide5.xml><?xml version="1.0" encoding="utf-8"?>
-<p:sld xmlns:a="http://schemas.openxmlformats.org/drawingml/2006/main" xmlns:p="http://schemas.openxmlformats.org/presentationml/2006/main" xmlns:r="http://schemas.openxmlformats.org/officeDocument/2006/relationships">
+<p:sld xmlns:a="http://schemas.openxmlformats.org/drawingml/2006/main" xmlns:r="http://schemas.openxmlformats.org/officeDocument/2006/relationships" xmlns:p="http://schemas.openxmlformats.org/presentationml/2006/main">
   <p:cSld>
     <p:spTree>
       <p:nvGrpSpPr>
@@ -22223,7 +22224,14 @@
         <p:cNvGrpSpPr/>
         <p:nvPr/>
       </p:nvGrpSpPr>
-      <p:grpSpPr/>
+      <p:grpSpPr>
+        <a:xfrm>
+          <a:off x="0" y="0"/>
+          <a:ext cx="0" cy="0"/>
+          <a:chOff x="0" y="0"/>
+          <a:chExt cx="0" cy="0"/>
+        </a:xfrm>
+      </p:grpSpPr>
       <p:sp>
         <p:nvSpPr>
           <p:cNvPr id="2" name="Rectangle 1"/>
@@ -22263,20 +22271,13 @@
           </a:fontRef>
         </p:style>
         <p:txBody>
-          <a:bodyPr rtlCol="0" anchor="ctr" wrap="square" lIns="25400" rIns="25400" tIns="12700" bIns="12700">
-            <a:noAutofit/>
-          </a:bodyPr>
-          <a:lstStyle/>
-          <a:p>
-            <a:pPr algn="ctr"/>
-            <a:r>
-              <a:rPr sz="1000" b="0">
-                <a:solidFill>
-                  <a:srgbClr val="2B2418"/>
-                </a:solidFill>
-              </a:rPr>
-              <a:t/>
-            </a:r>
+          <a:bodyPr wrap="square" lIns="25400" tIns="12700" rIns="25400" bIns="12700" rtlCol="0" anchor="ctr">
+            <a:noAutofit/>
+          </a:bodyPr>
+          <a:lstStyle/>
+          <a:p>
+            <a:pPr algn="ctr"/>
+            <a:endParaRPr/>
           </a:p>
         </p:txBody>
       </p:sp>
@@ -22360,7 +22361,7 @@
           </a:fontRef>
         </p:style>
         <p:txBody>
-          <a:bodyPr rtlCol="0" anchor="ctr" wrap="square" lIns="25400" rIns="25400" tIns="12700" bIns="12700">
+          <a:bodyPr wrap="square" lIns="25400" tIns="12700" rIns="25400" bIns="12700" rtlCol="0" anchor="ctr">
             <a:noAutofit/>
           </a:bodyPr>
           <a:lstStyle/>
@@ -22416,7 +22417,7 @@
           </a:fontRef>
         </p:style>
         <p:txBody>
-          <a:bodyPr rtlCol="0" anchor="ctr" wrap="square" lIns="25400" rIns="25400" tIns="12700" bIns="12700">
+          <a:bodyPr wrap="square" lIns="25400" tIns="12700" rIns="25400" bIns="12700" rtlCol="0" anchor="ctr">
             <a:noAutofit/>
           </a:bodyPr>
           <a:lstStyle/>
@@ -22472,7 +22473,7 @@
           </a:fontRef>
         </p:style>
         <p:txBody>
-          <a:bodyPr rtlCol="0" anchor="ctr" wrap="square" lIns="25400" rIns="25400" tIns="12700" bIns="12700">
+          <a:bodyPr wrap="square" lIns="25400" tIns="12700" rIns="25400" bIns="12700" rtlCol="0" anchor="ctr">
             <a:noAutofit/>
           </a:bodyPr>
           <a:lstStyle/>
@@ -22528,7 +22529,7 @@
           </a:fontRef>
         </p:style>
         <p:txBody>
-          <a:bodyPr rtlCol="0" anchor="ctr" wrap="square" lIns="25400" rIns="25400" tIns="12700" bIns="12700">
+          <a:bodyPr wrap="square" lIns="25400" tIns="12700" rIns="25400" bIns="12700" rtlCol="0" anchor="ctr">
             <a:noAutofit/>
           </a:bodyPr>
           <a:lstStyle/>
@@ -22584,7 +22585,7 @@
           </a:fontRef>
         </p:style>
         <p:txBody>
-          <a:bodyPr rtlCol="0" anchor="ctr" wrap="square" lIns="25400" rIns="25400" tIns="12700" bIns="12700">
+          <a:bodyPr wrap="square" lIns="25400" tIns="12700" rIns="25400" bIns="12700" rtlCol="0" anchor="ctr">
             <a:noAutofit/>
           </a:bodyPr>
           <a:lstStyle/>
@@ -22640,7 +22641,7 @@
           </a:fontRef>
         </p:style>
         <p:txBody>
-          <a:bodyPr rtlCol="0" anchor="ctr" wrap="square" lIns="25400" rIns="25400" tIns="12700" bIns="12700">
+          <a:bodyPr wrap="square" lIns="25400" tIns="12700" rIns="25400" bIns="12700" rtlCol="0" anchor="ctr">
             <a:noAutofit/>
           </a:bodyPr>
           <a:lstStyle/>
@@ -22696,7 +22697,7 @@
           </a:fontRef>
         </p:style>
         <p:txBody>
-          <a:bodyPr rtlCol="0" anchor="ctr" wrap="square" lIns="25400" rIns="25400" tIns="12700" bIns="12700">
+          <a:bodyPr wrap="square" lIns="25400" tIns="12700" rIns="25400" bIns="12700" rtlCol="0" anchor="ctr">
             <a:noAutofit/>
           </a:bodyPr>
           <a:lstStyle/>
@@ -22752,7 +22753,7 @@
           </a:fontRef>
         </p:style>
         <p:txBody>
-          <a:bodyPr rtlCol="0" anchor="ctr" wrap="square" lIns="25400" rIns="25400" tIns="12700" bIns="12700">
+          <a:bodyPr wrap="square" lIns="25400" tIns="12700" rIns="25400" bIns="12700" rtlCol="0" anchor="ctr">
             <a:noAutofit/>
           </a:bodyPr>
           <a:lstStyle/>
@@ -22808,7 +22809,7 @@
           </a:fontRef>
         </p:style>
         <p:txBody>
-          <a:bodyPr rtlCol="0" anchor="ctr" wrap="square" lIns="25400" rIns="25400" tIns="12700" bIns="12700">
+          <a:bodyPr wrap="square" lIns="25400" tIns="12700" rIns="25400" bIns="12700" rtlCol="0" anchor="ctr">
             <a:noAutofit/>
           </a:bodyPr>
           <a:lstStyle/>
@@ -22864,7 +22865,7 @@
           </a:fontRef>
         </p:style>
         <p:txBody>
-          <a:bodyPr rtlCol="0" anchor="ctr" wrap="square" lIns="25400" rIns="25400" tIns="12700" bIns="12700">
+          <a:bodyPr wrap="square" lIns="25400" tIns="12700" rIns="25400" bIns="12700" rtlCol="0" anchor="ctr">
             <a:noAutofit/>
           </a:bodyPr>
           <a:lstStyle/>
@@ -22920,7 +22921,7 @@
           </a:fontRef>
         </p:style>
         <p:txBody>
-          <a:bodyPr rtlCol="0" anchor="ctr" wrap="square" lIns="25400" rIns="25400" tIns="12700" bIns="12700">
+          <a:bodyPr wrap="square" lIns="25400" tIns="12700" rIns="25400" bIns="12700" rtlCol="0" anchor="ctr">
             <a:noAutofit/>
           </a:bodyPr>
           <a:lstStyle/>
@@ -22976,7 +22977,7 @@
           </a:fontRef>
         </p:style>
         <p:txBody>
-          <a:bodyPr rtlCol="0" anchor="ctr" wrap="square" lIns="25400" rIns="25400" tIns="12700" bIns="12700">
+          <a:bodyPr wrap="square" lIns="25400" tIns="12700" rIns="25400" bIns="12700" rtlCol="0" anchor="ctr">
             <a:noAutofit/>
           </a:bodyPr>
           <a:lstStyle/>
@@ -23032,7 +23033,7 @@
           </a:fontRef>
         </p:style>
         <p:txBody>
-          <a:bodyPr rtlCol="0" anchor="ctr" wrap="square" lIns="25400" rIns="25400" tIns="12700" bIns="12700">
+          <a:bodyPr wrap="square" lIns="25400" tIns="12700" rIns="25400" bIns="12700" rtlCol="0" anchor="ctr">
             <a:noAutofit/>
           </a:bodyPr>
           <a:lstStyle/>
@@ -23088,7 +23089,7 @@
           </a:fontRef>
         </p:style>
         <p:txBody>
-          <a:bodyPr rtlCol="0" anchor="ctr" wrap="square" lIns="25400" rIns="25400" tIns="12700" bIns="12700">
+          <a:bodyPr wrap="square" lIns="25400" tIns="12700" rIns="25400" bIns="12700" rtlCol="0" anchor="ctr">
             <a:noAutofit/>
           </a:bodyPr>
           <a:lstStyle/>
@@ -23144,7 +23145,7 @@
           </a:fontRef>
         </p:style>
         <p:txBody>
-          <a:bodyPr rtlCol="0" anchor="ctr" wrap="square" lIns="25400" rIns="25400" tIns="12700" bIns="12700">
+          <a:bodyPr wrap="square" lIns="25400" tIns="12700" rIns="25400" bIns="12700" rtlCol="0" anchor="ctr">
             <a:noAutofit/>
           </a:bodyPr>
           <a:lstStyle/>
@@ -23200,7 +23201,7 @@
           </a:fontRef>
         </p:style>
         <p:txBody>
-          <a:bodyPr rtlCol="0" anchor="ctr" wrap="square" lIns="25400" rIns="25400" tIns="12700" bIns="12700">
+          <a:bodyPr wrap="square" lIns="25400" tIns="12700" rIns="25400" bIns="12700" rtlCol="0" anchor="ctr">
             <a:noAutofit/>
           </a:bodyPr>
           <a:lstStyle/>
@@ -23256,7 +23257,7 @@
           </a:fontRef>
         </p:style>
         <p:txBody>
-          <a:bodyPr rtlCol="0" anchor="ctr" wrap="square" lIns="25400" rIns="25400" tIns="12700" bIns="12700">
+          <a:bodyPr wrap="square" lIns="25400" tIns="12700" rIns="25400" bIns="12700" rtlCol="0" anchor="ctr">
             <a:noAutofit/>
           </a:bodyPr>
           <a:lstStyle/>
@@ -23312,7 +23313,7 @@
           </a:fontRef>
         </p:style>
         <p:txBody>
-          <a:bodyPr rtlCol="0" anchor="ctr" wrap="square" lIns="25400" rIns="25400" tIns="12700" bIns="12700">
+          <a:bodyPr wrap="square" lIns="25400" tIns="12700" rIns="25400" bIns="12700" rtlCol="0" anchor="ctr">
             <a:noAutofit/>
           </a:bodyPr>
           <a:lstStyle/>
@@ -23368,7 +23369,7 @@
           </a:fontRef>
         </p:style>
         <p:txBody>
-          <a:bodyPr rtlCol="0" anchor="ctr" wrap="square" lIns="25400" rIns="25400" tIns="12700" bIns="12700">
+          <a:bodyPr wrap="square" lIns="25400" tIns="12700" rIns="25400" bIns="12700" rtlCol="0" anchor="ctr">
             <a:noAutofit/>
           </a:bodyPr>
           <a:lstStyle/>
@@ -23424,7 +23425,7 @@
           </a:fontRef>
         </p:style>
         <p:txBody>
-          <a:bodyPr rtlCol="0" anchor="ctr" wrap="square" lIns="25400" rIns="25400" tIns="12700" bIns="12700">
+          <a:bodyPr wrap="square" lIns="25400" tIns="12700" rIns="25400" bIns="12700" rtlCol="0" anchor="ctr">
             <a:noAutofit/>
           </a:bodyPr>
           <a:lstStyle/>
@@ -23480,7 +23481,7 @@
           </a:fontRef>
         </p:style>
         <p:txBody>
-          <a:bodyPr rtlCol="0" anchor="ctr" wrap="square" lIns="25400" rIns="25400" tIns="12700" bIns="12700">
+          <a:bodyPr wrap="square" lIns="25400" tIns="12700" rIns="25400" bIns="12700" rtlCol="0" anchor="ctr">
             <a:noAutofit/>
           </a:bodyPr>
           <a:lstStyle/>
@@ -23536,7 +23537,7 @@
           </a:fontRef>
         </p:style>
         <p:txBody>
-          <a:bodyPr rtlCol="0" anchor="ctr" wrap="square" lIns="25400" rIns="25400" tIns="12700" bIns="12700">
+          <a:bodyPr wrap="square" lIns="25400" tIns="12700" rIns="25400" bIns="12700" rtlCol="0" anchor="ctr">
             <a:noAutofit/>
           </a:bodyPr>
           <a:lstStyle/>
@@ -23592,7 +23593,7 @@
           </a:fontRef>
         </p:style>
         <p:txBody>
-          <a:bodyPr rtlCol="0" anchor="ctr" wrap="square" lIns="25400" rIns="25400" tIns="12700" bIns="12700">
+          <a:bodyPr wrap="square" lIns="25400" tIns="12700" rIns="25400" bIns="12700" rtlCol="0" anchor="ctr">
             <a:noAutofit/>
           </a:bodyPr>
           <a:lstStyle/>
@@ -23648,7 +23649,7 @@
           </a:fontRef>
         </p:style>
         <p:txBody>
-          <a:bodyPr rtlCol="0" anchor="ctr" wrap="square" lIns="25400" rIns="25400" tIns="12700" bIns="12700">
+          <a:bodyPr wrap="square" lIns="25400" tIns="12700" rIns="25400" bIns="12700" rtlCol="0" anchor="ctr">
             <a:noAutofit/>
           </a:bodyPr>
           <a:lstStyle/>
@@ -23704,7 +23705,7 @@
           </a:fontRef>
         </p:style>
         <p:txBody>
-          <a:bodyPr rtlCol="0" anchor="ctr" wrap="square" lIns="25400" rIns="25400" tIns="12700" bIns="12700">
+          <a:bodyPr wrap="square" lIns="25400" tIns="12700" rIns="25400" bIns="12700" rtlCol="0" anchor="ctr">
             <a:noAutofit/>
           </a:bodyPr>
           <a:lstStyle/>
@@ -23760,7 +23761,7 @@
           </a:fontRef>
         </p:style>
         <p:txBody>
-          <a:bodyPr rtlCol="0" anchor="ctr" wrap="square" lIns="25400" rIns="25400" tIns="12700" bIns="12700">
+          <a:bodyPr wrap="square" lIns="25400" tIns="12700" rIns="25400" bIns="12700" rtlCol="0" anchor="ctr">
             <a:noAutofit/>
           </a:bodyPr>
           <a:lstStyle/>
@@ -23816,7 +23817,7 @@
           </a:fontRef>
         </p:style>
         <p:txBody>
-          <a:bodyPr rtlCol="0" anchor="ctr" wrap="square" lIns="25400" rIns="25400" tIns="12700" bIns="12700">
+          <a:bodyPr wrap="square" lIns="25400" tIns="12700" rIns="25400" bIns="12700" rtlCol="0" anchor="ctr">
             <a:noAutofit/>
           </a:bodyPr>
           <a:lstStyle/>
@@ -23872,7 +23873,7 @@
           </a:fontRef>
         </p:style>
         <p:txBody>
-          <a:bodyPr rtlCol="0" anchor="ctr" wrap="square" lIns="25400" rIns="25400" tIns="12700" bIns="12700">
+          <a:bodyPr wrap="square" lIns="25400" tIns="12700" rIns="25400" bIns="12700" rtlCol="0" anchor="ctr">
             <a:noAutofit/>
           </a:bodyPr>
           <a:lstStyle/>
@@ -23928,7 +23929,7 @@
           </a:fontRef>
         </p:style>
         <p:txBody>
-          <a:bodyPr rtlCol="0" anchor="ctr" wrap="square" lIns="25400" rIns="25400" tIns="12700" bIns="12700">
+          <a:bodyPr wrap="square" lIns="25400" tIns="12700" rIns="25400" bIns="12700" rtlCol="0" anchor="ctr">
             <a:noAutofit/>
           </a:bodyPr>
           <a:lstStyle/>
@@ -23984,7 +23985,7 @@
           </a:fontRef>
         </p:style>
         <p:txBody>
-          <a:bodyPr rtlCol="0" anchor="ctr" wrap="square" lIns="25400" rIns="25400" tIns="12700" bIns="12700">
+          <a:bodyPr wrap="square" lIns="25400" tIns="12700" rIns="25400" bIns="12700" rtlCol="0" anchor="ctr">
             <a:noAutofit/>
           </a:bodyPr>
           <a:lstStyle/>
@@ -24040,7 +24041,7 @@
           </a:fontRef>
         </p:style>
         <p:txBody>
-          <a:bodyPr rtlCol="0" anchor="ctr" wrap="square" lIns="25400" rIns="25400" tIns="12700" bIns="12700">
+          <a:bodyPr wrap="square" lIns="25400" tIns="12700" rIns="25400" bIns="12700" rtlCol="0" anchor="ctr">
             <a:noAutofit/>
           </a:bodyPr>
           <a:lstStyle/>
@@ -24096,7 +24097,7 @@
           </a:fontRef>
         </p:style>
         <p:txBody>
-          <a:bodyPr rtlCol="0" anchor="ctr" wrap="square" lIns="25400" rIns="25400" tIns="12700" bIns="12700">
+          <a:bodyPr wrap="square" lIns="25400" tIns="12700" rIns="25400" bIns="12700" rtlCol="0" anchor="ctr">
             <a:noAutofit/>
           </a:bodyPr>
           <a:lstStyle/>
@@ -24152,7 +24153,7 @@
           </a:fontRef>
         </p:style>
         <p:txBody>
-          <a:bodyPr rtlCol="0" anchor="ctr" wrap="square" lIns="25400" rIns="25400" tIns="12700" bIns="12700">
+          <a:bodyPr wrap="square" lIns="25400" tIns="12700" rIns="25400" bIns="12700" rtlCol="0" anchor="ctr">
             <a:noAutofit/>
           </a:bodyPr>
           <a:lstStyle/>
@@ -24208,7 +24209,7 @@
           </a:fontRef>
         </p:style>
         <p:txBody>
-          <a:bodyPr rtlCol="0" anchor="ctr" wrap="square" lIns="25400" rIns="25400" tIns="12700" bIns="12700">
+          <a:bodyPr wrap="square" lIns="25400" tIns="12700" rIns="25400" bIns="12700" rtlCol="0" anchor="ctr">
             <a:noAutofit/>
           </a:bodyPr>
           <a:lstStyle/>
@@ -24264,7 +24265,7 @@
           </a:fontRef>
         </p:style>
         <p:txBody>
-          <a:bodyPr rtlCol="0" anchor="ctr" wrap="square" lIns="25400" rIns="25400" tIns="12700" bIns="12700">
+          <a:bodyPr wrap="square" lIns="25400" tIns="12700" rIns="25400" bIns="12700" rtlCol="0" anchor="ctr">
             <a:noAutofit/>
           </a:bodyPr>
           <a:lstStyle/>
@@ -24320,7 +24321,7 @@
           </a:fontRef>
         </p:style>
         <p:txBody>
-          <a:bodyPr rtlCol="0" anchor="ctr" wrap="square" lIns="25400" rIns="25400" tIns="12700" bIns="12700">
+          <a:bodyPr wrap="square" lIns="25400" tIns="12700" rIns="25400" bIns="12700" rtlCol="0" anchor="ctr">
             <a:noAutofit/>
           </a:bodyPr>
           <a:lstStyle/>
@@ -24376,7 +24377,7 @@
           </a:fontRef>
         </p:style>
         <p:txBody>
-          <a:bodyPr rtlCol="0" anchor="ctr" wrap="square" lIns="25400" rIns="25400" tIns="12700" bIns="12700">
+          <a:bodyPr wrap="square" lIns="25400" tIns="12700" rIns="25400" bIns="12700" rtlCol="0" anchor="ctr">
             <a:noAutofit/>
           </a:bodyPr>
           <a:lstStyle/>
@@ -24432,7 +24433,7 @@
           </a:fontRef>
         </p:style>
         <p:txBody>
-          <a:bodyPr rtlCol="0" anchor="ctr" wrap="square" lIns="25400" rIns="25400" tIns="12700" bIns="12700">
+          <a:bodyPr wrap="square" lIns="25400" tIns="12700" rIns="25400" bIns="12700" rtlCol="0" anchor="ctr">
             <a:noAutofit/>
           </a:bodyPr>
           <a:lstStyle/>
@@ -24488,7 +24489,7 @@
           </a:fontRef>
         </p:style>
         <p:txBody>
-          <a:bodyPr rtlCol="0" anchor="ctr" wrap="square" lIns="25400" rIns="25400" tIns="12700" bIns="12700">
+          <a:bodyPr wrap="square" lIns="25400" tIns="12700" rIns="25400" bIns="12700" rtlCol="0" anchor="ctr">
             <a:noAutofit/>
           </a:bodyPr>
           <a:lstStyle/>
@@ -24544,7 +24545,7 @@
           </a:fontRef>
         </p:style>
         <p:txBody>
-          <a:bodyPr rtlCol="0" anchor="ctr" wrap="square" lIns="25400" rIns="25400" tIns="12700" bIns="12700">
+          <a:bodyPr wrap="square" lIns="25400" tIns="12700" rIns="25400" bIns="12700" rtlCol="0" anchor="ctr">
             <a:noAutofit/>
           </a:bodyPr>
           <a:lstStyle/>
@@ -24600,7 +24601,7 @@
           </a:fontRef>
         </p:style>
         <p:txBody>
-          <a:bodyPr rtlCol="0" anchor="ctr" wrap="square" lIns="25400" rIns="25400" tIns="12700" bIns="12700">
+          <a:bodyPr wrap="square" lIns="25400" tIns="12700" rIns="25400" bIns="12700" rtlCol="0" anchor="ctr">
             <a:noAutofit/>
           </a:bodyPr>
           <a:lstStyle/>
@@ -24656,7 +24657,7 @@
           </a:fontRef>
         </p:style>
         <p:txBody>
-          <a:bodyPr rtlCol="0" anchor="ctr" wrap="square" lIns="25400" rIns="25400" tIns="12700" bIns="12700">
+          <a:bodyPr wrap="square" lIns="25400" tIns="12700" rIns="25400" bIns="12700" rtlCol="0" anchor="ctr">
             <a:noAutofit/>
           </a:bodyPr>
           <a:lstStyle/>
@@ -24712,7 +24713,7 @@
           </a:fontRef>
         </p:style>
         <p:txBody>
-          <a:bodyPr rtlCol="0" anchor="ctr" wrap="square" lIns="25400" rIns="25400" tIns="12700" bIns="12700">
+          <a:bodyPr wrap="square" lIns="25400" tIns="12700" rIns="25400" bIns="12700" rtlCol="0" anchor="ctr">
             <a:noAutofit/>
           </a:bodyPr>
           <a:lstStyle/>
@@ -24768,7 +24769,7 @@
           </a:fontRef>
         </p:style>
         <p:txBody>
-          <a:bodyPr rtlCol="0" anchor="ctr" wrap="square" lIns="25400" rIns="25400" tIns="12700" bIns="12700">
+          <a:bodyPr wrap="square" lIns="25400" tIns="12700" rIns="25400" bIns="12700" rtlCol="0" anchor="ctr">
             <a:noAutofit/>
           </a:bodyPr>
           <a:lstStyle/>
@@ -24824,7 +24825,7 @@
           </a:fontRef>
         </p:style>
         <p:txBody>
-          <a:bodyPr rtlCol="0" anchor="ctr" wrap="square" lIns="25400" rIns="25400" tIns="12700" bIns="12700">
+          <a:bodyPr wrap="square" lIns="25400" tIns="12700" rIns="25400" bIns="12700" rtlCol="0" anchor="ctr">
             <a:noAutofit/>
           </a:bodyPr>
           <a:lstStyle/>
@@ -24880,7 +24881,7 @@
           </a:fontRef>
         </p:style>
         <p:txBody>
-          <a:bodyPr rtlCol="0" anchor="ctr" wrap="square" lIns="25400" rIns="25400" tIns="12700" bIns="12700">
+          <a:bodyPr wrap="square" lIns="25400" tIns="12700" rIns="25400" bIns="12700" rtlCol="0" anchor="ctr">
             <a:noAutofit/>
           </a:bodyPr>
           <a:lstStyle/>
@@ -24936,7 +24937,7 @@
           </a:fontRef>
         </p:style>
         <p:txBody>
-          <a:bodyPr rtlCol="0" anchor="ctr" wrap="square" lIns="25400" rIns="25400" tIns="12700" bIns="12700">
+          <a:bodyPr wrap="square" lIns="25400" tIns="12700" rIns="25400" bIns="12700" rtlCol="0" anchor="ctr">
             <a:noAutofit/>
           </a:bodyPr>
           <a:lstStyle/>
@@ -24992,7 +24993,7 @@
           </a:fontRef>
         </p:style>
         <p:txBody>
-          <a:bodyPr rtlCol="0" anchor="ctr" wrap="square" lIns="25400" rIns="25400" tIns="12700" bIns="12700">
+          <a:bodyPr wrap="square" lIns="25400" tIns="12700" rIns="25400" bIns="12700" rtlCol="0" anchor="ctr">
             <a:noAutofit/>
           </a:bodyPr>
           <a:lstStyle/>
@@ -25048,7 +25049,7 @@
           </a:fontRef>
         </p:style>
         <p:txBody>
-          <a:bodyPr rtlCol="0" anchor="ctr" wrap="square" lIns="25400" rIns="25400" tIns="12700" bIns="12700">
+          <a:bodyPr wrap="square" lIns="25400" tIns="12700" rIns="25400" bIns="12700" rtlCol="0" anchor="ctr">
             <a:noAutofit/>
           </a:bodyPr>
           <a:lstStyle/>
@@ -25104,7 +25105,7 @@
           </a:fontRef>
         </p:style>
         <p:txBody>
-          <a:bodyPr rtlCol="0" anchor="ctr" wrap="square" lIns="25400" rIns="25400" tIns="12700" bIns="12700">
+          <a:bodyPr wrap="square" lIns="25400" tIns="12700" rIns="25400" bIns="12700" rtlCol="0" anchor="ctr">
             <a:noAutofit/>
           </a:bodyPr>
           <a:lstStyle/>
@@ -25160,7 +25161,7 @@
           </a:fontRef>
         </p:style>
         <p:txBody>
-          <a:bodyPr rtlCol="0" anchor="ctr" wrap="square" lIns="25400" rIns="25400" tIns="12700" bIns="12700">
+          <a:bodyPr wrap="square" lIns="25400" tIns="12700" rIns="25400" bIns="12700" rtlCol="0" anchor="ctr">
             <a:noAutofit/>
           </a:bodyPr>
           <a:lstStyle/>
@@ -25216,7 +25217,7 @@
           </a:fontRef>
         </p:style>
         <p:txBody>
-          <a:bodyPr rtlCol="0" anchor="ctr" wrap="square" lIns="25400" rIns="25400" tIns="12700" bIns="12700">
+          <a:bodyPr wrap="square" lIns="25400" tIns="12700" rIns="25400" bIns="12700" rtlCol="0" anchor="ctr">
             <a:noAutofit/>
           </a:bodyPr>
           <a:lstStyle/>
@@ -25272,7 +25273,7 @@
           </a:fontRef>
         </p:style>
         <p:txBody>
-          <a:bodyPr rtlCol="0" anchor="ctr" wrap="square" lIns="25400" rIns="25400" tIns="12700" bIns="12700">
+          <a:bodyPr wrap="square" lIns="25400" tIns="12700" rIns="25400" bIns="12700" rtlCol="0" anchor="ctr">
             <a:noAutofit/>
           </a:bodyPr>
           <a:lstStyle/>
@@ -25328,7 +25329,7 @@
           </a:fontRef>
         </p:style>
         <p:txBody>
-          <a:bodyPr rtlCol="0" anchor="ctr" wrap="square" lIns="25400" rIns="25400" tIns="12700" bIns="12700">
+          <a:bodyPr wrap="square" lIns="25400" tIns="12700" rIns="25400" bIns="12700" rtlCol="0" anchor="ctr">
             <a:noAutofit/>
           </a:bodyPr>
           <a:lstStyle/>
@@ -25384,7 +25385,7 @@
           </a:fontRef>
         </p:style>
         <p:txBody>
-          <a:bodyPr rtlCol="0" anchor="ctr" wrap="square" lIns="25400" rIns="25400" tIns="12700" bIns="12700">
+          <a:bodyPr wrap="square" lIns="25400" tIns="12700" rIns="25400" bIns="12700" rtlCol="0" anchor="ctr">
             <a:noAutofit/>
           </a:bodyPr>
           <a:lstStyle/>
@@ -25410,7 +25411,7 @@
 </file>
 
 <file path=ppt/slides/slide6.xml><?xml version="1.0" encoding="utf-8"?>
-<p:sld xmlns:a="http://schemas.openxmlformats.org/drawingml/2006/main" xmlns:p="http://schemas.openxmlformats.org/presentationml/2006/main" xmlns:r="http://schemas.openxmlformats.org/officeDocument/2006/relationships">
+<p:sld xmlns:a="http://schemas.openxmlformats.org/drawingml/2006/main" xmlns:r="http://schemas.openxmlformats.org/officeDocument/2006/relationships" xmlns:p="http://schemas.openxmlformats.org/presentationml/2006/main">
   <p:cSld>
     <p:spTree>
       <p:nvGrpSpPr>
@@ -25418,7 +25419,14 @@
         <p:cNvGrpSpPr/>
         <p:nvPr/>
       </p:nvGrpSpPr>
-      <p:grpSpPr/>
+      <p:grpSpPr>
+        <a:xfrm>
+          <a:off x="0" y="0"/>
+          <a:ext cx="0" cy="0"/>
+          <a:chOff x="0" y="0"/>
+          <a:chExt cx="0" cy="0"/>
+        </a:xfrm>
+      </p:grpSpPr>
       <p:sp>
         <p:nvSpPr>
           <p:cNvPr id="2" name="Rectangle 1"/>
@@ -25458,20 +25466,13 @@
           </a:fontRef>
         </p:style>
         <p:txBody>
-          <a:bodyPr rtlCol="0" anchor="ctr" wrap="square" lIns="25400" rIns="25400" tIns="12700" bIns="12700">
-            <a:noAutofit/>
-          </a:bodyPr>
-          <a:lstStyle/>
-          <a:p>
-            <a:pPr algn="ctr"/>
-            <a:r>
-              <a:rPr sz="1000" b="0">
-                <a:solidFill>
-                  <a:srgbClr val="2B2418"/>
-                </a:solidFill>
-              </a:rPr>
-              <a:t/>
-            </a:r>
+          <a:bodyPr wrap="square" lIns="25400" tIns="12700" rIns="25400" bIns="12700" rtlCol="0" anchor="ctr">
+            <a:noAutofit/>
+          </a:bodyPr>
+          <a:lstStyle/>
+          <a:p>
+            <a:pPr algn="ctr"/>
+            <a:endParaRPr/>
           </a:p>
         </p:txBody>
       </p:sp>
@@ -25555,7 +25556,7 @@
           </a:fontRef>
         </p:style>
         <p:txBody>
-          <a:bodyPr rtlCol="0" anchor="ctr" wrap="square" lIns="25400" rIns="25400" tIns="12700" bIns="12700">
+          <a:bodyPr wrap="square" lIns="25400" tIns="12700" rIns="25400" bIns="12700" rtlCol="0" anchor="ctr">
             <a:noAutofit/>
           </a:bodyPr>
           <a:lstStyle/>
@@ -25611,7 +25612,7 @@
           </a:fontRef>
         </p:style>
         <p:txBody>
-          <a:bodyPr rtlCol="0" anchor="ctr" wrap="square" lIns="25400" rIns="25400" tIns="12700" bIns="12700">
+          <a:bodyPr wrap="square" lIns="25400" tIns="12700" rIns="25400" bIns="12700" rtlCol="0" anchor="ctr">
             <a:noAutofit/>
           </a:bodyPr>
           <a:lstStyle/>
@@ -25667,7 +25668,7 @@
           </a:fontRef>
         </p:style>
         <p:txBody>
-          <a:bodyPr rtlCol="0" anchor="ctr" wrap="square" lIns="25400" rIns="25400" tIns="12700" bIns="12700">
+          <a:bodyPr wrap="square" lIns="25400" tIns="12700" rIns="25400" bIns="12700" rtlCol="0" anchor="ctr">
             <a:noAutofit/>
           </a:bodyPr>
           <a:lstStyle/>
@@ -25723,7 +25724,7 @@
           </a:fontRef>
         </p:style>
         <p:txBody>
-          <a:bodyPr rtlCol="0" anchor="ctr" wrap="square" lIns="25400" rIns="25400" tIns="12700" bIns="12700">
+          <a:bodyPr wrap="square" lIns="25400" tIns="12700" rIns="25400" bIns="12700" rtlCol="0" anchor="ctr">
             <a:noAutofit/>
           </a:bodyPr>
           <a:lstStyle/>
@@ -25779,7 +25780,7 @@
           </a:fontRef>
         </p:style>
         <p:txBody>
-          <a:bodyPr rtlCol="0" anchor="ctr" wrap="square" lIns="25400" rIns="25400" tIns="12700" bIns="12700">
+          <a:bodyPr wrap="square" lIns="25400" tIns="12700" rIns="25400" bIns="12700" rtlCol="0" anchor="ctr">
             <a:noAutofit/>
           </a:bodyPr>
           <a:lstStyle/>
@@ -25835,7 +25836,7 @@
           </a:fontRef>
         </p:style>
         <p:txBody>
-          <a:bodyPr rtlCol="0" anchor="ctr" wrap="square" lIns="25400" rIns="25400" tIns="12700" bIns="12700">
+          <a:bodyPr wrap="square" lIns="25400" tIns="12700" rIns="25400" bIns="12700" rtlCol="0" anchor="ctr">
             <a:noAutofit/>
           </a:bodyPr>
           <a:lstStyle/>
@@ -25891,7 +25892,7 @@
           </a:fontRef>
         </p:style>
         <p:txBody>
-          <a:bodyPr rtlCol="0" anchor="ctr" wrap="square" lIns="25400" rIns="25400" tIns="12700" bIns="12700">
+          <a:bodyPr wrap="square" lIns="25400" tIns="12700" rIns="25400" bIns="12700" rtlCol="0" anchor="ctr">
             <a:noAutofit/>
           </a:bodyPr>
           <a:lstStyle/>
@@ -25947,7 +25948,7 @@
           </a:fontRef>
         </p:style>
         <p:txBody>
-          <a:bodyPr rtlCol="0" anchor="ctr" wrap="square" lIns="25400" rIns="25400" tIns="12700" bIns="12700">
+          <a:bodyPr wrap="square" lIns="25400" tIns="12700" rIns="25400" bIns="12700" rtlCol="0" anchor="ctr">
             <a:noAutofit/>
           </a:bodyPr>
           <a:lstStyle/>
@@ -26003,7 +26004,7 @@
           </a:fontRef>
         </p:style>
         <p:txBody>
-          <a:bodyPr rtlCol="0" anchor="ctr" wrap="square" lIns="25400" rIns="25400" tIns="12700" bIns="12700">
+          <a:bodyPr wrap="square" lIns="25400" tIns="12700" rIns="25400" bIns="12700" rtlCol="0" anchor="ctr">
             <a:noAutofit/>
           </a:bodyPr>
           <a:lstStyle/>
@@ -26059,7 +26060,7 @@
           </a:fontRef>
         </p:style>
         <p:txBody>
-          <a:bodyPr rtlCol="0" anchor="ctr" wrap="square" lIns="25400" rIns="25400" tIns="12700" bIns="12700">
+          <a:bodyPr wrap="square" lIns="25400" tIns="12700" rIns="25400" bIns="12700" rtlCol="0" anchor="ctr">
             <a:noAutofit/>
           </a:bodyPr>
           <a:lstStyle/>
@@ -26115,7 +26116,7 @@
           </a:fontRef>
         </p:style>
         <p:txBody>
-          <a:bodyPr rtlCol="0" anchor="ctr" wrap="square" lIns="25400" rIns="25400" tIns="12700" bIns="12700">
+          <a:bodyPr wrap="square" lIns="25400" tIns="12700" rIns="25400" bIns="12700" rtlCol="0" anchor="ctr">
             <a:noAutofit/>
           </a:bodyPr>
           <a:lstStyle/>
@@ -26171,7 +26172,7 @@
           </a:fontRef>
         </p:style>
         <p:txBody>
-          <a:bodyPr rtlCol="0" anchor="ctr" wrap="square" lIns="25400" rIns="25400" tIns="12700" bIns="12700">
+          <a:bodyPr wrap="square" lIns="25400" tIns="12700" rIns="25400" bIns="12700" rtlCol="0" anchor="ctr">
             <a:noAutofit/>
           </a:bodyPr>
           <a:lstStyle/>
@@ -26227,7 +26228,7 @@
           </a:fontRef>
         </p:style>
         <p:txBody>
-          <a:bodyPr rtlCol="0" anchor="ctr" wrap="square" lIns="25400" rIns="25400" tIns="12700" bIns="12700">
+          <a:bodyPr wrap="square" lIns="25400" tIns="12700" rIns="25400" bIns="12700" rtlCol="0" anchor="ctr">
             <a:noAutofit/>
           </a:bodyPr>
           <a:lstStyle/>
@@ -26283,7 +26284,7 @@
           </a:fontRef>
         </p:style>
         <p:txBody>
-          <a:bodyPr rtlCol="0" anchor="ctr" wrap="square" lIns="25400" rIns="25400" tIns="12700" bIns="12700">
+          <a:bodyPr wrap="square" lIns="25400" tIns="12700" rIns="25400" bIns="12700" rtlCol="0" anchor="ctr">
             <a:noAutofit/>
           </a:bodyPr>
           <a:lstStyle/>
@@ -26339,7 +26340,7 @@
           </a:fontRef>
         </p:style>
         <p:txBody>
-          <a:bodyPr rtlCol="0" anchor="ctr" wrap="square" lIns="25400" rIns="25400" tIns="12700" bIns="12700">
+          <a:bodyPr wrap="square" lIns="25400" tIns="12700" rIns="25400" bIns="12700" rtlCol="0" anchor="ctr">
             <a:noAutofit/>
           </a:bodyPr>
           <a:lstStyle/>
@@ -26395,7 +26396,7 @@
           </a:fontRef>
         </p:style>
         <p:txBody>
-          <a:bodyPr rtlCol="0" anchor="ctr" wrap="square" lIns="25400" rIns="25400" tIns="12700" bIns="12700">
+          <a:bodyPr wrap="square" lIns="25400" tIns="12700" rIns="25400" bIns="12700" rtlCol="0" anchor="ctr">
             <a:noAutofit/>
           </a:bodyPr>
           <a:lstStyle/>
@@ -26451,7 +26452,7 @@
           </a:fontRef>
         </p:style>
         <p:txBody>
-          <a:bodyPr rtlCol="0" anchor="ctr" wrap="square" lIns="25400" rIns="25400" tIns="12700" bIns="12700">
+          <a:bodyPr wrap="square" lIns="25400" tIns="12700" rIns="25400" bIns="12700" rtlCol="0" anchor="ctr">
             <a:noAutofit/>
           </a:bodyPr>
           <a:lstStyle/>
@@ -26507,7 +26508,7 @@
           </a:fontRef>
         </p:style>
         <p:txBody>
-          <a:bodyPr rtlCol="0" anchor="ctr" wrap="square" lIns="25400" rIns="25400" tIns="12700" bIns="12700">
+          <a:bodyPr wrap="square" lIns="25400" tIns="12700" rIns="25400" bIns="12700" rtlCol="0" anchor="ctr">
             <a:noAutofit/>
           </a:bodyPr>
           <a:lstStyle/>
@@ -26563,7 +26564,7 @@
           </a:fontRef>
         </p:style>
         <p:txBody>
-          <a:bodyPr rtlCol="0" anchor="ctr" wrap="square" lIns="25400" rIns="25400" tIns="12700" bIns="12700">
+          <a:bodyPr wrap="square" lIns="25400" tIns="12700" rIns="25400" bIns="12700" rtlCol="0" anchor="ctr">
             <a:noAutofit/>
           </a:bodyPr>
           <a:lstStyle/>
@@ -26619,7 +26620,7 @@
           </a:fontRef>
         </p:style>
         <p:txBody>
-          <a:bodyPr rtlCol="0" anchor="ctr" wrap="square" lIns="25400" rIns="25400" tIns="12700" bIns="12700">
+          <a:bodyPr wrap="square" lIns="25400" tIns="12700" rIns="25400" bIns="12700" rtlCol="0" anchor="ctr">
             <a:noAutofit/>
           </a:bodyPr>
           <a:lstStyle/>
@@ -26675,7 +26676,7 @@
           </a:fontRef>
         </p:style>
         <p:txBody>
-          <a:bodyPr rtlCol="0" anchor="ctr" wrap="square" lIns="25400" rIns="25400" tIns="12700" bIns="12700">
+          <a:bodyPr wrap="square" lIns="25400" tIns="12700" rIns="25400" bIns="12700" rtlCol="0" anchor="ctr">
             <a:noAutofit/>
           </a:bodyPr>
           <a:lstStyle/>
@@ -26731,7 +26732,7 @@
           </a:fontRef>
         </p:style>
         <p:txBody>
-          <a:bodyPr rtlCol="0" anchor="ctr" wrap="square" lIns="25400" rIns="25400" tIns="12700" bIns="12700">
+          <a:bodyPr wrap="square" lIns="25400" tIns="12700" rIns="25400" bIns="12700" rtlCol="0" anchor="ctr">
             <a:noAutofit/>
           </a:bodyPr>
           <a:lstStyle/>
@@ -26787,7 +26788,7 @@
           </a:fontRef>
         </p:style>
         <p:txBody>
-          <a:bodyPr rtlCol="0" anchor="ctr" wrap="square" lIns="25400" rIns="25400" tIns="12700" bIns="12700">
+          <a:bodyPr wrap="square" lIns="25400" tIns="12700" rIns="25400" bIns="12700" rtlCol="0" anchor="ctr">
             <a:noAutofit/>
           </a:bodyPr>
           <a:lstStyle/>
@@ -26843,7 +26844,7 @@
           </a:fontRef>
         </p:style>
         <p:txBody>
-          <a:bodyPr rtlCol="0" anchor="ctr" wrap="square" lIns="25400" rIns="25400" tIns="12700" bIns="12700">
+          <a:bodyPr wrap="square" lIns="25400" tIns="12700" rIns="25400" bIns="12700" rtlCol="0" anchor="ctr">
             <a:noAutofit/>
           </a:bodyPr>
           <a:lstStyle/>
@@ -26899,7 +26900,7 @@
           </a:fontRef>
         </p:style>
         <p:txBody>
-          <a:bodyPr rtlCol="0" anchor="ctr" wrap="square" lIns="25400" rIns="25400" tIns="12700" bIns="12700">
+          <a:bodyPr wrap="square" lIns="25400" tIns="12700" rIns="25400" bIns="12700" rtlCol="0" anchor="ctr">
             <a:noAutofit/>
           </a:bodyPr>
           <a:lstStyle/>
@@ -26955,7 +26956,7 @@
           </a:fontRef>
         </p:style>
         <p:txBody>
-          <a:bodyPr rtlCol="0" anchor="ctr" wrap="square" lIns="25400" rIns="25400" tIns="12700" bIns="12700">
+          <a:bodyPr wrap="square" lIns="25400" tIns="12700" rIns="25400" bIns="12700" rtlCol="0" anchor="ctr">
             <a:noAutofit/>
           </a:bodyPr>
           <a:lstStyle/>
@@ -27011,7 +27012,7 @@
           </a:fontRef>
         </p:style>
         <p:txBody>
-          <a:bodyPr rtlCol="0" anchor="ctr" wrap="square" lIns="25400" rIns="25400" tIns="12700" bIns="12700">
+          <a:bodyPr wrap="square" lIns="25400" tIns="12700" rIns="25400" bIns="12700" rtlCol="0" anchor="ctr">
             <a:noAutofit/>
           </a:bodyPr>
           <a:lstStyle/>
@@ -27067,7 +27068,7 @@
           </a:fontRef>
         </p:style>
         <p:txBody>
-          <a:bodyPr rtlCol="0" anchor="ctr" wrap="square" lIns="25400" rIns="25400" tIns="12700" bIns="12700">
+          <a:bodyPr wrap="square" lIns="25400" tIns="12700" rIns="25400" bIns="12700" rtlCol="0" anchor="ctr">
             <a:noAutofit/>
           </a:bodyPr>
           <a:lstStyle/>
@@ -27123,7 +27124,7 @@
           </a:fontRef>
         </p:style>
         <p:txBody>
-          <a:bodyPr rtlCol="0" anchor="ctr" wrap="square" lIns="25400" rIns="25400" tIns="12700" bIns="12700">
+          <a:bodyPr wrap="square" lIns="25400" tIns="12700" rIns="25400" bIns="12700" rtlCol="0" anchor="ctr">
             <a:noAutofit/>
           </a:bodyPr>
           <a:lstStyle/>
@@ -27179,7 +27180,7 @@
           </a:fontRef>
         </p:style>
         <p:txBody>
-          <a:bodyPr rtlCol="0" anchor="ctr" wrap="square" lIns="25400" rIns="25400" tIns="12700" bIns="12700">
+          <a:bodyPr wrap="square" lIns="25400" tIns="12700" rIns="25400" bIns="12700" rtlCol="0" anchor="ctr">
             <a:noAutofit/>
           </a:bodyPr>
           <a:lstStyle/>
@@ -27235,7 +27236,7 @@
           </a:fontRef>
         </p:style>
         <p:txBody>
-          <a:bodyPr rtlCol="0" anchor="ctr" wrap="square" lIns="25400" rIns="25400" tIns="12700" bIns="12700">
+          <a:bodyPr wrap="square" lIns="25400" tIns="12700" rIns="25400" bIns="12700" rtlCol="0" anchor="ctr">
             <a:noAutofit/>
           </a:bodyPr>
           <a:lstStyle/>
@@ -27291,7 +27292,7 @@
           </a:fontRef>
         </p:style>
         <p:txBody>
-          <a:bodyPr rtlCol="0" anchor="ctr" wrap="square" lIns="25400" rIns="25400" tIns="12700" bIns="12700">
+          <a:bodyPr wrap="square" lIns="25400" tIns="12700" rIns="25400" bIns="12700" rtlCol="0" anchor="ctr">
             <a:noAutofit/>
           </a:bodyPr>
           <a:lstStyle/>
@@ -27347,7 +27348,7 @@
           </a:fontRef>
         </p:style>
         <p:txBody>
-          <a:bodyPr rtlCol="0" anchor="ctr" wrap="square" lIns="25400" rIns="25400" tIns="12700" bIns="12700">
+          <a:bodyPr wrap="square" lIns="25400" tIns="12700" rIns="25400" bIns="12700" rtlCol="0" anchor="ctr">
             <a:noAutofit/>
           </a:bodyPr>
           <a:lstStyle/>
@@ -27403,7 +27404,7 @@
           </a:fontRef>
         </p:style>
         <p:txBody>
-          <a:bodyPr rtlCol="0" anchor="ctr" wrap="square" lIns="25400" rIns="25400" tIns="12700" bIns="12700">
+          <a:bodyPr wrap="square" lIns="25400" tIns="12700" rIns="25400" bIns="12700" rtlCol="0" anchor="ctr">
             <a:noAutofit/>
           </a:bodyPr>
           <a:lstStyle/>
@@ -27459,7 +27460,7 @@
           </a:fontRef>
         </p:style>
         <p:txBody>
-          <a:bodyPr rtlCol="0" anchor="ctr" wrap="square" lIns="25400" rIns="25400" tIns="12700" bIns="12700">
+          <a:bodyPr wrap="square" lIns="25400" tIns="12700" rIns="25400" bIns="12700" rtlCol="0" anchor="ctr">
             <a:noAutofit/>
           </a:bodyPr>
           <a:lstStyle/>
@@ -27516,7 +27517,7 @@
           </a:fontRef>
         </p:style>
         <p:txBody>
-          <a:bodyPr rtlCol="0" anchor="ctr" wrap="square" lIns="25400" rIns="25400" tIns="12700" bIns="12700">
+          <a:bodyPr wrap="square" lIns="25400" tIns="12700" rIns="25400" bIns="12700" rtlCol="0" anchor="ctr">
             <a:noAutofit/>
           </a:bodyPr>
           <a:lstStyle/>
@@ -27573,7 +27574,7 @@
           </a:fontRef>
         </p:style>
         <p:txBody>
-          <a:bodyPr rtlCol="0" anchor="ctr" wrap="square" lIns="25400" rIns="25400" tIns="12700" bIns="12700">
+          <a:bodyPr wrap="square" lIns="25400" tIns="12700" rIns="25400" bIns="12700" rtlCol="0" anchor="ctr">
             <a:noAutofit/>
           </a:bodyPr>
           <a:lstStyle/>
@@ -27630,7 +27631,7 @@
           </a:fontRef>
         </p:style>
         <p:txBody>
-          <a:bodyPr rtlCol="0" anchor="ctr" wrap="square" lIns="25400" rIns="25400" tIns="12700" bIns="12700">
+          <a:bodyPr wrap="square" lIns="25400" tIns="12700" rIns="25400" bIns="12700" rtlCol="0" anchor="ctr">
             <a:noAutofit/>
           </a:bodyPr>
           <a:lstStyle/>
@@ -27687,7 +27688,7 @@
           </a:fontRef>
         </p:style>
         <p:txBody>
-          <a:bodyPr rtlCol="0" anchor="ctr" wrap="square" lIns="25400" rIns="25400" tIns="12700" bIns="12700">
+          <a:bodyPr wrap="square" lIns="25400" tIns="12700" rIns="25400" bIns="12700" rtlCol="0" anchor="ctr">
             <a:noAutofit/>
           </a:bodyPr>
           <a:lstStyle/>
@@ -27743,7 +27744,7 @@
           </a:fontRef>
         </p:style>
         <p:txBody>
-          <a:bodyPr rtlCol="0" anchor="ctr" wrap="square" lIns="25400" rIns="25400" tIns="12700" bIns="12700">
+          <a:bodyPr wrap="square" lIns="25400" tIns="12700" rIns="25400" bIns="12700" rtlCol="0" anchor="ctr">
             <a:noAutofit/>
           </a:bodyPr>
           <a:lstStyle/>
@@ -27799,7 +27800,7 @@
           </a:fontRef>
         </p:style>
         <p:txBody>
-          <a:bodyPr rtlCol="0" anchor="ctr" wrap="square" lIns="25400" rIns="25400" tIns="12700" bIns="12700">
+          <a:bodyPr wrap="square" lIns="25400" tIns="12700" rIns="25400" bIns="12700" rtlCol="0" anchor="ctr">
             <a:noAutofit/>
           </a:bodyPr>
           <a:lstStyle/>
@@ -27856,7 +27857,7 @@
           </a:fontRef>
         </p:style>
         <p:txBody>
-          <a:bodyPr rtlCol="0" anchor="ctr" wrap="square" lIns="25400" rIns="25400" tIns="12700" bIns="12700">
+          <a:bodyPr wrap="square" lIns="25400" tIns="12700" rIns="25400" bIns="12700" rtlCol="0" anchor="ctr">
             <a:noAutofit/>
           </a:bodyPr>
           <a:lstStyle/>
@@ -27882,7 +27883,7 @@
 </file>
 
 <file path=ppt/slides/slide7.xml><?xml version="1.0" encoding="utf-8"?>
-<p:sld xmlns:a="http://schemas.openxmlformats.org/drawingml/2006/main" xmlns:p="http://schemas.openxmlformats.org/presentationml/2006/main" xmlns:r="http://schemas.openxmlformats.org/officeDocument/2006/relationships">
+<p:sld xmlns:a="http://schemas.openxmlformats.org/drawingml/2006/main" xmlns:r="http://schemas.openxmlformats.org/officeDocument/2006/relationships" xmlns:p="http://schemas.openxmlformats.org/presentationml/2006/main">
   <p:cSld>
     <p:spTree>
       <p:nvGrpSpPr>
@@ -27890,7 +27891,14 @@
         <p:cNvGrpSpPr/>
         <p:nvPr/>
       </p:nvGrpSpPr>
-      <p:grpSpPr/>
+      <p:grpSpPr>
+        <a:xfrm>
+          <a:off x="0" y="0"/>
+          <a:ext cx="0" cy="0"/>
+          <a:chOff x="0" y="0"/>
+          <a:chExt cx="0" cy="0"/>
+        </a:xfrm>
+      </p:grpSpPr>
       <p:sp>
         <p:nvSpPr>
           <p:cNvPr id="2" name="Rectangle 1"/>
@@ -27930,20 +27938,13 @@
           </a:fontRef>
         </p:style>
         <p:txBody>
-          <a:bodyPr rtlCol="0" anchor="ctr" wrap="square" lIns="25400" rIns="25400" tIns="12700" bIns="12700">
-            <a:noAutofit/>
-          </a:bodyPr>
-          <a:lstStyle/>
-          <a:p>
-            <a:pPr algn="ctr"/>
-            <a:r>
-              <a:rPr sz="1000" b="0">
-                <a:solidFill>
-                  <a:srgbClr val="2B2418"/>
-                </a:solidFill>
-              </a:rPr>
-              <a:t/>
-            </a:r>
+          <a:bodyPr wrap="square" lIns="25400" tIns="12700" rIns="25400" bIns="12700" rtlCol="0" anchor="ctr">
+            <a:noAutofit/>
+          </a:bodyPr>
+          <a:lstStyle/>
+          <a:p>
+            <a:pPr algn="ctr"/>
+            <a:endParaRPr/>
           </a:p>
         </p:txBody>
       </p:sp>
@@ -28027,7 +28028,7 @@
           </a:fontRef>
         </p:style>
         <p:txBody>
-          <a:bodyPr rtlCol="0" anchor="ctr" wrap="square" lIns="25400" rIns="25400" tIns="12700" bIns="12700">
+          <a:bodyPr wrap="square" lIns="25400" tIns="12700" rIns="25400" bIns="12700" rtlCol="0" anchor="ctr">
             <a:noAutofit/>
           </a:bodyPr>
           <a:lstStyle/>
@@ -28083,7 +28084,7 @@
           </a:fontRef>
         </p:style>
         <p:txBody>
-          <a:bodyPr rtlCol="0" anchor="ctr" wrap="square" lIns="25400" rIns="25400" tIns="12700" bIns="12700">
+          <a:bodyPr wrap="square" lIns="25400" tIns="12700" rIns="25400" bIns="12700" rtlCol="0" anchor="ctr">
             <a:noAutofit/>
           </a:bodyPr>
           <a:lstStyle/>
@@ -28139,7 +28140,7 @@
           </a:fontRef>
         </p:style>
         <p:txBody>
-          <a:bodyPr rtlCol="0" anchor="ctr" wrap="square" lIns="25400" rIns="25400" tIns="12700" bIns="12700">
+          <a:bodyPr wrap="square" lIns="25400" tIns="12700" rIns="25400" bIns="12700" rtlCol="0" anchor="ctr">
             <a:noAutofit/>
           </a:bodyPr>
           <a:lstStyle/>
@@ -28195,7 +28196,7 @@
           </a:fontRef>
         </p:style>
         <p:txBody>
-          <a:bodyPr rtlCol="0" anchor="ctr" wrap="square" lIns="25400" rIns="25400" tIns="12700" bIns="12700">
+          <a:bodyPr wrap="square" lIns="25400" tIns="12700" rIns="25400" bIns="12700" rtlCol="0" anchor="ctr">
             <a:noAutofit/>
           </a:bodyPr>
           <a:lstStyle/>
@@ -28251,7 +28252,7 @@
           </a:fontRef>
         </p:style>
         <p:txBody>
-          <a:bodyPr rtlCol="0" anchor="ctr" wrap="square" lIns="25400" rIns="25400" tIns="12700" bIns="12700">
+          <a:bodyPr wrap="square" lIns="25400" tIns="12700" rIns="25400" bIns="12700" rtlCol="0" anchor="ctr">
             <a:noAutofit/>
           </a:bodyPr>
           <a:lstStyle/>
@@ -28307,7 +28308,7 @@
           </a:fontRef>
         </p:style>
         <p:txBody>
-          <a:bodyPr rtlCol="0" anchor="ctr" wrap="square" lIns="25400" rIns="25400" tIns="12700" bIns="12700">
+          <a:bodyPr wrap="square" lIns="25400" tIns="12700" rIns="25400" bIns="12700" rtlCol="0" anchor="ctr">
             <a:noAutofit/>
           </a:bodyPr>
           <a:lstStyle/>
@@ -28363,7 +28364,7 @@
           </a:fontRef>
         </p:style>
         <p:txBody>
-          <a:bodyPr rtlCol="0" anchor="ctr" wrap="square" lIns="25400" rIns="25400" tIns="12700" bIns="12700">
+          <a:bodyPr wrap="square" lIns="25400" tIns="12700" rIns="25400" bIns="12700" rtlCol="0" anchor="ctr">
             <a:noAutofit/>
           </a:bodyPr>
           <a:lstStyle/>
@@ -28419,7 +28420,7 @@
           </a:fontRef>
         </p:style>
         <p:txBody>
-          <a:bodyPr rtlCol="0" anchor="ctr" wrap="square" lIns="25400" rIns="25400" tIns="12700" bIns="12700">
+          <a:bodyPr wrap="square" lIns="25400" tIns="12700" rIns="25400" bIns="12700" rtlCol="0" anchor="ctr">
             <a:noAutofit/>
           </a:bodyPr>
           <a:lstStyle/>
@@ -28475,7 +28476,7 @@
           </a:fontRef>
         </p:style>
         <p:txBody>
-          <a:bodyPr rtlCol="0" anchor="ctr" wrap="square" lIns="25400" rIns="25400" tIns="12700" bIns="12700">
+          <a:bodyPr wrap="square" lIns="25400" tIns="12700" rIns="25400" bIns="12700" rtlCol="0" anchor="ctr">
             <a:noAutofit/>
           </a:bodyPr>
           <a:lstStyle/>
@@ -28531,7 +28532,7 @@
           </a:fontRef>
         </p:style>
         <p:txBody>
-          <a:bodyPr rtlCol="0" anchor="ctr" wrap="square" lIns="25400" rIns="25400" tIns="12700" bIns="12700">
+          <a:bodyPr wrap="square" lIns="25400" tIns="12700" rIns="25400" bIns="12700" rtlCol="0" anchor="ctr">
             <a:noAutofit/>
           </a:bodyPr>
           <a:lstStyle/>
@@ -28587,7 +28588,7 @@
           </a:fontRef>
         </p:style>
         <p:txBody>
-          <a:bodyPr rtlCol="0" anchor="ctr" wrap="square" lIns="25400" rIns="25400" tIns="12700" bIns="12700">
+          <a:bodyPr wrap="square" lIns="25400" tIns="12700" rIns="25400" bIns="12700" rtlCol="0" anchor="ctr">
             <a:noAutofit/>
           </a:bodyPr>
           <a:lstStyle/>
@@ -28643,7 +28644,7 @@
           </a:fontRef>
         </p:style>
         <p:txBody>
-          <a:bodyPr rtlCol="0" anchor="ctr" wrap="square" lIns="25400" rIns="25400" tIns="12700" bIns="12700">
+          <a:bodyPr wrap="square" lIns="25400" tIns="12700" rIns="25400" bIns="12700" rtlCol="0" anchor="ctr">
             <a:noAutofit/>
           </a:bodyPr>
           <a:lstStyle/>
@@ -28699,7 +28700,7 @@
           </a:fontRef>
         </p:style>
         <p:txBody>
-          <a:bodyPr rtlCol="0" anchor="ctr" wrap="square" lIns="25400" rIns="25400" tIns="12700" bIns="12700">
+          <a:bodyPr wrap="square" lIns="25400" tIns="12700" rIns="25400" bIns="12700" rtlCol="0" anchor="ctr">
             <a:noAutofit/>
           </a:bodyPr>
           <a:lstStyle/>
@@ -28755,7 +28756,7 @@
           </a:fontRef>
         </p:style>
         <p:txBody>
-          <a:bodyPr rtlCol="0" anchor="ctr" wrap="square" lIns="25400" rIns="25400" tIns="12700" bIns="12700">
+          <a:bodyPr wrap="square" lIns="25400" tIns="12700" rIns="25400" bIns="12700" rtlCol="0" anchor="ctr">
             <a:noAutofit/>
           </a:bodyPr>
           <a:lstStyle/>
@@ -28811,7 +28812,7 @@
           </a:fontRef>
         </p:style>
         <p:txBody>
-          <a:bodyPr rtlCol="0" anchor="ctr" wrap="square" lIns="25400" rIns="25400" tIns="12700" bIns="12700">
+          <a:bodyPr wrap="square" lIns="25400" tIns="12700" rIns="25400" bIns="12700" rtlCol="0" anchor="ctr">
             <a:noAutofit/>
           </a:bodyPr>
           <a:lstStyle/>
@@ -28867,7 +28868,7 @@
           </a:fontRef>
         </p:style>
         <p:txBody>
-          <a:bodyPr rtlCol="0" anchor="ctr" wrap="square" lIns="25400" rIns="25400" tIns="12700" bIns="12700">
+          <a:bodyPr wrap="square" lIns="25400" tIns="12700" rIns="25400" bIns="12700" rtlCol="0" anchor="ctr">
             <a:noAutofit/>
           </a:bodyPr>
           <a:lstStyle/>
@@ -28923,7 +28924,7 @@
           </a:fontRef>
         </p:style>
         <p:txBody>
-          <a:bodyPr rtlCol="0" anchor="ctr" wrap="square" lIns="25400" rIns="25400" tIns="12700" bIns="12700">
+          <a:bodyPr wrap="square" lIns="25400" tIns="12700" rIns="25400" bIns="12700" rtlCol="0" anchor="ctr">
             <a:noAutofit/>
           </a:bodyPr>
           <a:lstStyle/>
@@ -28979,7 +28980,7 @@
           </a:fontRef>
         </p:style>
         <p:txBody>
-          <a:bodyPr rtlCol="0" anchor="ctr" wrap="square" lIns="25400" rIns="25400" tIns="12700" bIns="12700">
+          <a:bodyPr wrap="square" lIns="25400" tIns="12700" rIns="25400" bIns="12700" rtlCol="0" anchor="ctr">
             <a:noAutofit/>
           </a:bodyPr>
           <a:lstStyle/>
@@ -29035,7 +29036,7 @@
           </a:fontRef>
         </p:style>
         <p:txBody>
-          <a:bodyPr rtlCol="0" anchor="ctr" wrap="square" lIns="25400" rIns="25400" tIns="12700" bIns="12700">
+          <a:bodyPr wrap="square" lIns="25400" tIns="12700" rIns="25400" bIns="12700" rtlCol="0" anchor="ctr">
             <a:noAutofit/>
           </a:bodyPr>
           <a:lstStyle/>
@@ -29091,7 +29092,7 @@
           </a:fontRef>
         </p:style>
         <p:txBody>
-          <a:bodyPr rtlCol="0" anchor="ctr" wrap="square" lIns="25400" rIns="25400" tIns="12700" bIns="12700">
+          <a:bodyPr wrap="square" lIns="25400" tIns="12700" rIns="25400" bIns="12700" rtlCol="0" anchor="ctr">
             <a:noAutofit/>
           </a:bodyPr>
           <a:lstStyle/>
@@ -29147,7 +29148,7 @@
           </a:fontRef>
         </p:style>
         <p:txBody>
-          <a:bodyPr rtlCol="0" anchor="ctr" wrap="square" lIns="25400" rIns="25400" tIns="12700" bIns="12700">
+          <a:bodyPr wrap="square" lIns="25400" tIns="12700" rIns="25400" bIns="12700" rtlCol="0" anchor="ctr">
             <a:noAutofit/>
           </a:bodyPr>
           <a:lstStyle/>
@@ -29203,7 +29204,7 @@
           </a:fontRef>
         </p:style>
         <p:txBody>
-          <a:bodyPr rtlCol="0" anchor="ctr" wrap="square" lIns="25400" rIns="25400" tIns="12700" bIns="12700">
+          <a:bodyPr wrap="square" lIns="25400" tIns="12700" rIns="25400" bIns="12700" rtlCol="0" anchor="ctr">
             <a:noAutofit/>
           </a:bodyPr>
           <a:lstStyle/>
@@ -29259,7 +29260,7 @@
           </a:fontRef>
         </p:style>
         <p:txBody>
-          <a:bodyPr rtlCol="0" anchor="ctr" wrap="square" lIns="25400" rIns="25400" tIns="12700" bIns="12700">
+          <a:bodyPr wrap="square" lIns="25400" tIns="12700" rIns="25400" bIns="12700" rtlCol="0" anchor="ctr">
             <a:noAutofit/>
           </a:bodyPr>
           <a:lstStyle/>
@@ -29285,7 +29286,7 @@
 </file>
 
 <file path=ppt/slides/slide8.xml><?xml version="1.0" encoding="utf-8"?>
-<p:sld xmlns:a="http://schemas.openxmlformats.org/drawingml/2006/main" xmlns:p="http://schemas.openxmlformats.org/presentationml/2006/main" xmlns:r="http://schemas.openxmlformats.org/officeDocument/2006/relationships">
+<p:sld xmlns:a="http://schemas.openxmlformats.org/drawingml/2006/main" xmlns:r="http://schemas.openxmlformats.org/officeDocument/2006/relationships" xmlns:p="http://schemas.openxmlformats.org/presentationml/2006/main">
   <p:cSld>
     <p:spTree>
       <p:nvGrpSpPr>
@@ -29293,7 +29294,14 @@
         <p:cNvGrpSpPr/>
         <p:nvPr/>
       </p:nvGrpSpPr>
-      <p:grpSpPr/>
+      <p:grpSpPr>
+        <a:xfrm>
+          <a:off x="0" y="0"/>
+          <a:ext cx="0" cy="0"/>
+          <a:chOff x="0" y="0"/>
+          <a:chExt cx="0" cy="0"/>
+        </a:xfrm>
+      </p:grpSpPr>
       <p:sp>
         <p:nvSpPr>
           <p:cNvPr id="2" name="Rectangle 1"/>
@@ -29333,20 +29341,13 @@
           </a:fontRef>
         </p:style>
         <p:txBody>
-          <a:bodyPr rtlCol="0" anchor="ctr" wrap="square" lIns="25400" rIns="25400" tIns="12700" bIns="12700">
-            <a:noAutofit/>
-          </a:bodyPr>
-          <a:lstStyle/>
-          <a:p>
-            <a:pPr algn="ctr"/>
-            <a:r>
-              <a:rPr sz="1000" b="0">
-                <a:solidFill>
-                  <a:srgbClr val="2B2418"/>
-                </a:solidFill>
-              </a:rPr>
-              <a:t/>
-            </a:r>
+          <a:bodyPr wrap="square" lIns="25400" tIns="12700" rIns="25400" bIns="12700" rtlCol="0" anchor="ctr">
+            <a:noAutofit/>
+          </a:bodyPr>
+          <a:lstStyle/>
+          <a:p>
+            <a:pPr algn="ctr"/>
+            <a:endParaRPr/>
           </a:p>
         </p:txBody>
       </p:sp>
@@ -29430,7 +29431,7 @@
           </a:fontRef>
         </p:style>
         <p:txBody>
-          <a:bodyPr rtlCol="0" anchor="ctr" wrap="square" lIns="25400" rIns="25400" tIns="12700" bIns="12700">
+          <a:bodyPr wrap="square" lIns="25400" tIns="12700" rIns="25400" bIns="12700" rtlCol="0" anchor="ctr">
             <a:noAutofit/>
           </a:bodyPr>
           <a:lstStyle/>
@@ -29486,7 +29487,7 @@
           </a:fontRef>
         </p:style>
         <p:txBody>
-          <a:bodyPr rtlCol="0" anchor="ctr" wrap="square" lIns="25400" rIns="25400" tIns="12700" bIns="12700">
+          <a:bodyPr wrap="square" lIns="25400" tIns="12700" rIns="25400" bIns="12700" rtlCol="0" anchor="ctr">
             <a:noAutofit/>
           </a:bodyPr>
           <a:lstStyle/>
@@ -29542,7 +29543,7 @@
           </a:fontRef>
         </p:style>
         <p:txBody>
-          <a:bodyPr rtlCol="0" anchor="ctr" wrap="square" lIns="25400" rIns="25400" tIns="12700" bIns="12700">
+          <a:bodyPr wrap="square" lIns="25400" tIns="12700" rIns="25400" bIns="12700" rtlCol="0" anchor="ctr">
             <a:noAutofit/>
           </a:bodyPr>
           <a:lstStyle/>
@@ -29598,7 +29599,7 @@
           </a:fontRef>
         </p:style>
         <p:txBody>
-          <a:bodyPr rtlCol="0" anchor="ctr" wrap="square" lIns="25400" rIns="25400" tIns="12700" bIns="12700">
+          <a:bodyPr wrap="square" lIns="25400" tIns="12700" rIns="25400" bIns="12700" rtlCol="0" anchor="ctr">
             <a:noAutofit/>
           </a:bodyPr>
           <a:lstStyle/>
@@ -29654,7 +29655,7 @@
           </a:fontRef>
         </p:style>
         <p:txBody>
-          <a:bodyPr rtlCol="0" anchor="ctr" wrap="square" lIns="25400" rIns="25400" tIns="12700" bIns="12700">
+          <a:bodyPr wrap="square" lIns="25400" tIns="12700" rIns="25400" bIns="12700" rtlCol="0" anchor="ctr">
             <a:noAutofit/>
           </a:bodyPr>
           <a:lstStyle/>
@@ -29710,7 +29711,7 @@
           </a:fontRef>
         </p:style>
         <p:txBody>
-          <a:bodyPr rtlCol="0" anchor="ctr" wrap="square" lIns="25400" rIns="25400" tIns="12700" bIns="12700">
+          <a:bodyPr wrap="square" lIns="25400" tIns="12700" rIns="25400" bIns="12700" rtlCol="0" anchor="ctr">
             <a:noAutofit/>
           </a:bodyPr>
           <a:lstStyle/>
@@ -29766,7 +29767,7 @@
           </a:fontRef>
         </p:style>
         <p:txBody>
-          <a:bodyPr rtlCol="0" anchor="ctr" wrap="square" lIns="25400" rIns="25400" tIns="12700" bIns="12700">
+          <a:bodyPr wrap="square" lIns="25400" tIns="12700" rIns="25400" bIns="12700" rtlCol="0" anchor="ctr">
             <a:noAutofit/>
           </a:bodyPr>
           <a:lstStyle/>
@@ -29822,7 +29823,7 @@
           </a:fontRef>
         </p:style>
         <p:txBody>
-          <a:bodyPr rtlCol="0" anchor="ctr" wrap="square" lIns="25400" rIns="25400" tIns="12700" bIns="12700">
+          <a:bodyPr wrap="square" lIns="25400" tIns="12700" rIns="25400" bIns="12700" rtlCol="0" anchor="ctr">
             <a:noAutofit/>
           </a:bodyPr>
           <a:lstStyle/>
@@ -29878,7 +29879,7 @@
           </a:fontRef>
         </p:style>
         <p:txBody>
-          <a:bodyPr rtlCol="0" anchor="ctr" wrap="square" lIns="25400" rIns="25400" tIns="12700" bIns="12700">
+          <a:bodyPr wrap="square" lIns="25400" tIns="12700" rIns="25400" bIns="12700" rtlCol="0" anchor="ctr">
             <a:noAutofit/>
           </a:bodyPr>
           <a:lstStyle/>
@@ -29934,7 +29935,7 @@
           </a:fontRef>
         </p:style>
         <p:txBody>
-          <a:bodyPr rtlCol="0" anchor="ctr" wrap="square" lIns="25400" rIns="25400" tIns="12700" bIns="12700">
+          <a:bodyPr wrap="square" lIns="25400" tIns="12700" rIns="25400" bIns="12700" rtlCol="0" anchor="ctr">
             <a:noAutofit/>
           </a:bodyPr>
           <a:lstStyle/>
@@ -29990,7 +29991,7 @@
           </a:fontRef>
         </p:style>
         <p:txBody>
-          <a:bodyPr rtlCol="0" anchor="ctr" wrap="square" lIns="25400" rIns="25400" tIns="12700" bIns="12700">
+          <a:bodyPr wrap="square" lIns="25400" tIns="12700" rIns="25400" bIns="12700" rtlCol="0" anchor="ctr">
             <a:noAutofit/>
           </a:bodyPr>
           <a:lstStyle/>
@@ -30046,7 +30047,7 @@
           </a:fontRef>
         </p:style>
         <p:txBody>
-          <a:bodyPr rtlCol="0" anchor="ctr" wrap="square" lIns="25400" rIns="25400" tIns="12700" bIns="12700">
+          <a:bodyPr wrap="square" lIns="25400" tIns="12700" rIns="25400" bIns="12700" rtlCol="0" anchor="ctr">
             <a:noAutofit/>
           </a:bodyPr>
           <a:lstStyle/>
@@ -30072,7 +30073,7 @@
 </file>
 
 <file path=ppt/slides/slide9.xml><?xml version="1.0" encoding="utf-8"?>
-<p:sld xmlns:a="http://schemas.openxmlformats.org/drawingml/2006/main" xmlns:p="http://schemas.openxmlformats.org/presentationml/2006/main" xmlns:r="http://schemas.openxmlformats.org/officeDocument/2006/relationships">
+<p:sld xmlns:a="http://schemas.openxmlformats.org/drawingml/2006/main" xmlns:r="http://schemas.openxmlformats.org/officeDocument/2006/relationships" xmlns:p="http://schemas.openxmlformats.org/presentationml/2006/main">
   <p:cSld>
     <p:spTree>
       <p:nvGrpSpPr>
@@ -30080,7 +30081,14 @@
         <p:cNvGrpSpPr/>
         <p:nvPr/>
       </p:nvGrpSpPr>
-      <p:grpSpPr/>
+      <p:grpSpPr>
+        <a:xfrm>
+          <a:off x="0" y="0"/>
+          <a:ext cx="0" cy="0"/>
+          <a:chOff x="0" y="0"/>
+          <a:chExt cx="0" cy="0"/>
+        </a:xfrm>
+      </p:grpSpPr>
       <p:sp>
         <p:nvSpPr>
           <p:cNvPr id="2" name="Rectangle 1"/>
@@ -30120,20 +30128,13 @@
           </a:fontRef>
         </p:style>
         <p:txBody>
-          <a:bodyPr rtlCol="0" anchor="ctr" wrap="square" lIns="25400" rIns="25400" tIns="12700" bIns="12700">
-            <a:noAutofit/>
-          </a:bodyPr>
-          <a:lstStyle/>
-          <a:p>
-            <a:pPr algn="ctr"/>
-            <a:r>
-              <a:rPr sz="1000" b="0">
-                <a:solidFill>
-                  <a:srgbClr val="2B2418"/>
-                </a:solidFill>
-              </a:rPr>
-              <a:t/>
-            </a:r>
+          <a:bodyPr wrap="square" lIns="25400" tIns="12700" rIns="25400" bIns="12700" rtlCol="0" anchor="ctr">
+            <a:noAutofit/>
+          </a:bodyPr>
+          <a:lstStyle/>
+          <a:p>
+            <a:pPr algn="ctr"/>
+            <a:endParaRPr/>
           </a:p>
         </p:txBody>
       </p:sp>
@@ -30217,7 +30218,7 @@
           </a:fontRef>
         </p:style>
         <p:txBody>
-          <a:bodyPr rtlCol="0" anchor="ctr" wrap="square" lIns="25400" rIns="25400" tIns="12700" bIns="12700">
+          <a:bodyPr wrap="square" lIns="25400" tIns="12700" rIns="25400" bIns="12700" rtlCol="0" anchor="ctr">
             <a:noAutofit/>
           </a:bodyPr>
           <a:lstStyle/>
@@ -30273,7 +30274,7 @@
           </a:fontRef>
         </p:style>
         <p:txBody>
-          <a:bodyPr rtlCol="0" anchor="ctr" wrap="square" lIns="25400" rIns="25400" tIns="12700" bIns="12700">
+          <a:bodyPr wrap="square" lIns="25400" tIns="12700" rIns="25400" bIns="12700" rtlCol="0" anchor="ctr">
             <a:noAutofit/>
           </a:bodyPr>
           <a:lstStyle/>
@@ -30329,7 +30330,7 @@
           </a:fontRef>
         </p:style>
         <p:txBody>
-          <a:bodyPr rtlCol="0" anchor="ctr" wrap="square" lIns="25400" rIns="25400" tIns="12700" bIns="12700">
+          <a:bodyPr wrap="square" lIns="25400" tIns="12700" rIns="25400" bIns="12700" rtlCol="0" anchor="ctr">
             <a:noAutofit/>
           </a:bodyPr>
           <a:lstStyle/>
@@ -30385,7 +30386,7 @@
           </a:fontRef>
         </p:style>
         <p:txBody>
-          <a:bodyPr rtlCol="0" anchor="ctr" wrap="square" lIns="25400" rIns="25400" tIns="12700" bIns="12700">
+          <a:bodyPr wrap="square" lIns="25400" tIns="12700" rIns="25400" bIns="12700" rtlCol="0" anchor="ctr">
             <a:noAutofit/>
           </a:bodyPr>
           <a:lstStyle/>
@@ -30441,7 +30442,7 @@
           </a:fontRef>
         </p:style>
         <p:txBody>
-          <a:bodyPr rtlCol="0" anchor="ctr" wrap="square" lIns="25400" rIns="25400" tIns="12700" bIns="12700">
+          <a:bodyPr wrap="square" lIns="25400" tIns="12700" rIns="25400" bIns="12700" rtlCol="0" anchor="ctr">
             <a:noAutofit/>
           </a:bodyPr>
           <a:lstStyle/>
@@ -30497,7 +30498,7 @@
           </a:fontRef>
         </p:style>
         <p:txBody>
-          <a:bodyPr rtlCol="0" anchor="ctr" wrap="square" lIns="25400" rIns="25400" tIns="12700" bIns="12700">
+          <a:bodyPr wrap="square" lIns="25400" tIns="12700" rIns="25400" bIns="12700" rtlCol="0" anchor="ctr">
             <a:noAutofit/>
           </a:bodyPr>
           <a:lstStyle/>
@@ -30553,7 +30554,7 @@
           </a:fontRef>
         </p:style>
         <p:txBody>
-          <a:bodyPr rtlCol="0" anchor="ctr" wrap="square" lIns="25400" rIns="25400" tIns="12700" bIns="12700">
+          <a:bodyPr wrap="square" lIns="25400" tIns="12700" rIns="25400" bIns="12700" rtlCol="0" anchor="ctr">
             <a:noAutofit/>
           </a:bodyPr>
           <a:lstStyle/>
@@ -30609,7 +30610,7 @@
           </a:fontRef>
         </p:style>
         <p:txBody>
-          <a:bodyPr rtlCol="0" anchor="ctr" wrap="square" lIns="25400" rIns="25400" tIns="12700" bIns="12700">
+          <a:bodyPr wrap="square" lIns="25400" tIns="12700" rIns="25400" bIns="12700" rtlCol="0" anchor="ctr">
             <a:noAutofit/>
           </a:bodyPr>
           <a:lstStyle/>
@@ -30665,7 +30666,7 @@
           </a:fontRef>
         </p:style>
         <p:txBody>
-          <a:bodyPr rtlCol="0" anchor="ctr" wrap="square" lIns="25400" rIns="25400" tIns="12700" bIns="12700">
+          <a:bodyPr wrap="square" lIns="25400" tIns="12700" rIns="25400" bIns="12700" rtlCol="0" anchor="ctr">
             <a:noAutofit/>
           </a:bodyPr>
           <a:lstStyle/>
@@ -30721,7 +30722,7 @@
           </a:fontRef>
         </p:style>
         <p:txBody>
-          <a:bodyPr rtlCol="0" anchor="ctr" wrap="square" lIns="25400" rIns="25400" tIns="12700" bIns="12700">
+          <a:bodyPr wrap="square" lIns="25400" tIns="12700" rIns="25400" bIns="12700" rtlCol="0" anchor="ctr">
             <a:noAutofit/>
           </a:bodyPr>
           <a:lstStyle/>
@@ -30777,7 +30778,7 @@
           </a:fontRef>
         </p:style>
         <p:txBody>
-          <a:bodyPr rtlCol="0" anchor="ctr" wrap="square" lIns="25400" rIns="25400" tIns="12700" bIns="12700">
+          <a:bodyPr wrap="square" lIns="25400" tIns="12700" rIns="25400" bIns="12700" rtlCol="0" anchor="ctr">
             <a:noAutofit/>
           </a:bodyPr>
           <a:lstStyle/>
@@ -30833,7 +30834,7 @@
           </a:fontRef>
         </p:style>
         <p:txBody>
-          <a:bodyPr rtlCol="0" anchor="ctr" wrap="square" lIns="25400" rIns="25400" tIns="12700" bIns="12700">
+          <a:bodyPr wrap="square" lIns="25400" tIns="12700" rIns="25400" bIns="12700" rtlCol="0" anchor="ctr">
             <a:noAutofit/>
           </a:bodyPr>
           <a:lstStyle/>
@@ -30889,7 +30890,7 @@
           </a:fontRef>
         </p:style>
         <p:txBody>
-          <a:bodyPr rtlCol="0" anchor="ctr" wrap="square" lIns="25400" rIns="25400" tIns="12700" bIns="12700">
+          <a:bodyPr wrap="square" lIns="25400" tIns="12700" rIns="25400" bIns="12700" rtlCol="0" anchor="ctr">
             <a:noAutofit/>
           </a:bodyPr>
           <a:lstStyle/>
@@ -30945,7 +30946,7 @@
           </a:fontRef>
         </p:style>
         <p:txBody>
-          <a:bodyPr rtlCol="0" anchor="ctr" wrap="square" lIns="25400" rIns="25400" tIns="12700" bIns="12700">
+          <a:bodyPr wrap="square" lIns="25400" tIns="12700" rIns="25400" bIns="12700" rtlCol="0" anchor="ctr">
             <a:noAutofit/>
           </a:bodyPr>
           <a:lstStyle/>
@@ -31001,7 +31002,7 @@
           </a:fontRef>
         </p:style>
         <p:txBody>
-          <a:bodyPr rtlCol="0" anchor="ctr" wrap="square" lIns="25400" rIns="25400" tIns="12700" bIns="12700">
+          <a:bodyPr wrap="square" lIns="25400" tIns="12700" rIns="25400" bIns="12700" rtlCol="0" anchor="ctr">
             <a:noAutofit/>
           </a:bodyPr>
           <a:lstStyle/>
@@ -31057,7 +31058,7 @@
           </a:fontRef>
         </p:style>
         <p:txBody>
-          <a:bodyPr rtlCol="0" anchor="ctr" wrap="square" lIns="25400" rIns="25400" tIns="12700" bIns="12700">
+          <a:bodyPr wrap="square" lIns="25400" tIns="12700" rIns="25400" bIns="12700" rtlCol="0" anchor="ctr">
             <a:noAutofit/>
           </a:bodyPr>
           <a:lstStyle/>
@@ -31113,7 +31114,7 @@
           </a:fontRef>
         </p:style>
         <p:txBody>
-          <a:bodyPr rtlCol="0" anchor="ctr" wrap="square" lIns="25400" rIns="25400" tIns="12700" bIns="12700">
+          <a:bodyPr wrap="square" lIns="25400" tIns="12700" rIns="25400" bIns="12700" rtlCol="0" anchor="ctr">
             <a:noAutofit/>
           </a:bodyPr>
           <a:lstStyle/>
@@ -31169,7 +31170,7 @@
           </a:fontRef>
         </p:style>
         <p:txBody>
-          <a:bodyPr rtlCol="0" anchor="ctr" wrap="square" lIns="25400" rIns="25400" tIns="12700" bIns="12700">
+          <a:bodyPr wrap="square" lIns="25400" tIns="12700" rIns="25400" bIns="12700" rtlCol="0" anchor="ctr">
             <a:noAutofit/>
           </a:bodyPr>
           <a:lstStyle/>
@@ -31225,7 +31226,7 @@
           </a:fontRef>
         </p:style>
         <p:txBody>
-          <a:bodyPr rtlCol="0" anchor="ctr" wrap="square" lIns="25400" rIns="25400" tIns="12700" bIns="12700">
+          <a:bodyPr wrap="square" lIns="25400" tIns="12700" rIns="25400" bIns="12700" rtlCol="0" anchor="ctr">
             <a:noAutofit/>
           </a:bodyPr>
           <a:lstStyle/>
@@ -31281,7 +31282,7 @@
           </a:fontRef>
         </p:style>
         <p:txBody>
-          <a:bodyPr rtlCol="0" anchor="ctr" wrap="square" lIns="25400" rIns="25400" tIns="12700" bIns="12700">
+          <a:bodyPr wrap="square" lIns="25400" tIns="12700" rIns="25400" bIns="12700" rtlCol="0" anchor="ctr">
             <a:noAutofit/>
           </a:bodyPr>
           <a:lstStyle/>
@@ -31337,7 +31338,7 @@
           </a:fontRef>
         </p:style>
         <p:txBody>
-          <a:bodyPr rtlCol="0" anchor="ctr" wrap="square" lIns="25400" rIns="25400" tIns="12700" bIns="12700">
+          <a:bodyPr wrap="square" lIns="25400" tIns="12700" rIns="25400" bIns="12700" rtlCol="0" anchor="ctr">
             <a:noAutofit/>
           </a:bodyPr>
           <a:lstStyle/>
@@ -31393,7 +31394,7 @@
           </a:fontRef>
         </p:style>
         <p:txBody>
-          <a:bodyPr rtlCol="0" anchor="ctr" wrap="square" lIns="25400" rIns="25400" tIns="12700" bIns="12700">
+          <a:bodyPr wrap="square" lIns="25400" tIns="12700" rIns="25400" bIns="12700" rtlCol="0" anchor="ctr">
             <a:noAutofit/>
           </a:bodyPr>
           <a:lstStyle/>
@@ -31449,7 +31450,7 @@
           </a:fontRef>
         </p:style>
         <p:txBody>
-          <a:bodyPr rtlCol="0" anchor="ctr" wrap="square" lIns="25400" rIns="25400" tIns="12700" bIns="12700">
+          <a:bodyPr wrap="square" lIns="25400" tIns="12700" rIns="25400" bIns="12700" rtlCol="0" anchor="ctr">
             <a:noAutofit/>
           </a:bodyPr>
           <a:lstStyle/>
@@ -31505,7 +31506,7 @@
           </a:fontRef>
         </p:style>
         <p:txBody>
-          <a:bodyPr rtlCol="0" anchor="ctr" wrap="square" lIns="25400" rIns="25400" tIns="12700" bIns="12700">
+          <a:bodyPr wrap="square" lIns="25400" tIns="12700" rIns="25400" bIns="12700" rtlCol="0" anchor="ctr">
             <a:noAutofit/>
           </a:bodyPr>
           <a:lstStyle/>
@@ -31561,7 +31562,7 @@
           </a:fontRef>
         </p:style>
         <p:txBody>
-          <a:bodyPr rtlCol="0" anchor="ctr" wrap="square" lIns="25400" rIns="25400" tIns="12700" bIns="12700">
+          <a:bodyPr wrap="square" lIns="25400" tIns="12700" rIns="25400" bIns="12700" rtlCol="0" anchor="ctr">
             <a:noAutofit/>
           </a:bodyPr>
           <a:lstStyle/>
@@ -31617,7 +31618,7 @@
           </a:fontRef>
         </p:style>
         <p:txBody>
-          <a:bodyPr rtlCol="0" anchor="ctr" wrap="square" lIns="25400" rIns="25400" tIns="12700" bIns="12700">
+          <a:bodyPr wrap="square" lIns="25400" tIns="12700" rIns="25400" bIns="12700" rtlCol="0" anchor="ctr">
             <a:noAutofit/>
           </a:bodyPr>
           <a:lstStyle/>
@@ -31673,7 +31674,7 @@
           </a:fontRef>
         </p:style>
         <p:txBody>
-          <a:bodyPr rtlCol="0" anchor="ctr" wrap="square" lIns="25400" rIns="25400" tIns="12700" bIns="12700">
+          <a:bodyPr wrap="square" lIns="25400" tIns="12700" rIns="25400" bIns="12700" rtlCol="0" anchor="ctr">
             <a:noAutofit/>
           </a:bodyPr>
           <a:lstStyle/>
@@ -31729,7 +31730,7 @@
           </a:fontRef>
         </p:style>
         <p:txBody>
-          <a:bodyPr rtlCol="0" anchor="ctr" wrap="square" lIns="25400" rIns="25400" tIns="12700" bIns="12700">
+          <a:bodyPr wrap="square" lIns="25400" tIns="12700" rIns="25400" bIns="12700" rtlCol="0" anchor="ctr">
             <a:noAutofit/>
           </a:bodyPr>
           <a:lstStyle/>
@@ -31785,7 +31786,7 @@
           </a:fontRef>
         </p:style>
         <p:txBody>
-          <a:bodyPr rtlCol="0" anchor="ctr" wrap="square" lIns="25400" rIns="25400" tIns="12700" bIns="12700">
+          <a:bodyPr wrap="square" lIns="25400" tIns="12700" rIns="25400" bIns="12700" rtlCol="0" anchor="ctr">
             <a:noAutofit/>
           </a:bodyPr>
           <a:lstStyle/>
@@ -31841,7 +31842,7 @@
           </a:fontRef>
         </p:style>
         <p:txBody>
-          <a:bodyPr rtlCol="0" anchor="ctr" wrap="square" lIns="25400" rIns="25400" tIns="12700" bIns="12700">
+          <a:bodyPr wrap="square" lIns="25400" tIns="12700" rIns="25400" bIns="12700" rtlCol="0" anchor="ctr">
             <a:noAutofit/>
           </a:bodyPr>
           <a:lstStyle/>
@@ -31897,7 +31898,7 @@
           </a:fontRef>
         </p:style>
         <p:txBody>
-          <a:bodyPr rtlCol="0" anchor="ctr" wrap="square" lIns="25400" rIns="25400" tIns="12700" bIns="12700">
+          <a:bodyPr wrap="square" lIns="25400" tIns="12700" rIns="25400" bIns="12700" rtlCol="0" anchor="ctr">
             <a:noAutofit/>
           </a:bodyPr>
           <a:lstStyle/>
@@ -31953,7 +31954,7 @@
           </a:fontRef>
         </p:style>
         <p:txBody>
-          <a:bodyPr rtlCol="0" anchor="ctr" wrap="square" lIns="25400" rIns="25400" tIns="12700" bIns="12700">
+          <a:bodyPr wrap="square" lIns="25400" tIns="12700" rIns="25400" bIns="12700" rtlCol="0" anchor="ctr">
             <a:noAutofit/>
           </a:bodyPr>
           <a:lstStyle/>
@@ -32009,7 +32010,7 @@
           </a:fontRef>
         </p:style>
         <p:txBody>
-          <a:bodyPr rtlCol="0" anchor="ctr" wrap="square" lIns="25400" rIns="25400" tIns="12700" bIns="12700">
+          <a:bodyPr wrap="square" lIns="25400" tIns="12700" rIns="25400" bIns="12700" rtlCol="0" anchor="ctr">
             <a:noAutofit/>
           </a:bodyPr>
           <a:lstStyle/>
@@ -32065,7 +32066,7 @@
           </a:fontRef>
         </p:style>
         <p:txBody>
-          <a:bodyPr rtlCol="0" anchor="ctr" wrap="square" lIns="25400" rIns="25400" tIns="12700" bIns="12700">
+          <a:bodyPr wrap="square" lIns="25400" tIns="12700" rIns="25400" bIns="12700" rtlCol="0" anchor="ctr">
             <a:noAutofit/>
           </a:bodyPr>
           <a:lstStyle/>
@@ -32121,7 +32122,7 @@
           </a:fontRef>
         </p:style>
         <p:txBody>
-          <a:bodyPr rtlCol="0" anchor="ctr" wrap="square" lIns="25400" rIns="25400" tIns="12700" bIns="12700">
+          <a:bodyPr wrap="square" lIns="25400" tIns="12700" rIns="25400" bIns="12700" rtlCol="0" anchor="ctr">
             <a:noAutofit/>
           </a:bodyPr>
           <a:lstStyle/>
@@ -32177,7 +32178,7 @@
           </a:fontRef>
         </p:style>
         <p:txBody>
-          <a:bodyPr rtlCol="0" anchor="ctr" wrap="square" lIns="25400" rIns="25400" tIns="12700" bIns="12700">
+          <a:bodyPr wrap="square" lIns="25400" tIns="12700" rIns="25400" bIns="12700" rtlCol="0" anchor="ctr">
             <a:noAutofit/>
           </a:bodyPr>
           <a:lstStyle/>
